--- a/Sem 4/RDBMS/Module 4/4.2_Indexing.pptx
+++ b/Sem 4/RDBMS/Module 4/4.2_Indexing.pptx
@@ -147,7 +147,7 @@
   </p:defaultTextStyle>
   <p:extLst>
     <p:ext uri="{EFAFB233-063F-42B5-8137-9DF3F51BA10A}">
-      <p15:sldGuideLst xmlns:p15="http://schemas.microsoft.com/office/powerpoint/2012/main" xmlns="">
+      <p15:sldGuideLst xmlns:p15="http://schemas.microsoft.com/office/powerpoint/2012/main">
         <p15:guide id="1" orient="horz" pos="2880">
           <p15:clr>
             <a:srgbClr val="A4A3A4"/>
@@ -162,6 +162,93 @@
     </p:ext>
   </p:extLst>
 </p:presentation>
+</file>
+
+<file path=ppt/ink/ink1.xml><?xml version="1.0" encoding="utf-8"?>
+<inkml:ink xmlns:inkml="http://www.w3.org/2003/InkML">
+  <inkml:definitions>
+    <inkml:context xml:id="ctx0">
+      <inkml:inkSource xml:id="inkSrc0">
+        <inkml:traceFormat>
+          <inkml:channel name="X" type="integer" min="-2.14748E9" max="2.14748E9" units="cm"/>
+          <inkml:channel name="Y" type="integer" min="-2.14748E9" max="2.14748E9" units="cm"/>
+        </inkml:traceFormat>
+        <inkml:channelProperties>
+          <inkml:channelProperty channel="X" name="resolution" value="1000" units="1/cm"/>
+          <inkml:channelProperty channel="Y" name="resolution" value="1000" units="1/cm"/>
+        </inkml:channelProperties>
+      </inkml:inkSource>
+      <inkml:timestamp xml:id="ts0" timeString="2025-05-04T18:43:37.151"/>
+    </inkml:context>
+    <inkml:brush xml:id="br0">
+      <inkml:brushProperty name="width" value="0.3" units="cm"/>
+      <inkml:brushProperty name="height" value="0.6" units="cm"/>
+      <inkml:brushProperty name="color" value="#FFFC00"/>
+      <inkml:brushProperty name="tip" value="rectangle"/>
+      <inkml:brushProperty name="rasterOp" value="maskPen"/>
+      <inkml:brushProperty name="ignorePressure" value="1"/>
+    </inkml:brush>
+  </inkml:definitions>
+  <inkml:trace contextRef="#ctx0" brushRef="#br0">0 323,'2'-2,"-1"-1,1 0,0 1,0-1,1 1,-1 0,0 0,1 0,-1 0,1 0,0 1,5-4,40-12,-34 13,65-17,1 3,1 3,128-6,256 17,-338 5,1056 2,-756-31,-258 2,44-5,615 15,-518 20,417-5,-651 5,119 21,-44-3,683 35,-591-46,10 4,242 10,1-34,-140-20,208-13,-23 24,669 64,-844-8,200 17,-372-39,465 26,-136-42,-251-1,-72 15,-61-2,583-4,61 4,-195 28,265-26,-526-17,-220 6,-1 4,144 27,-186-23,109 2,67-14,-83-2,269-16,-329 13,-50 5,-1-3,58-12,-20 3,-54 9,42-10,-18 5,-46 8,0 1,1-1,-1-1,0 0,0 0,0 0,0-1,14-7,-22 9,0 1,1 0,-1-1,0 1,1-1,-1 1,0-1,1 0,-1 1,0-1,0 1,0-1,0 1,0-1,0 0,1 1,-1-1,0 1,-1-1,1 0,0 1,0-1,0 1,0-1,0 0,-1 1,1-1,0 1,0-1,-1 1,1-1,0 1,-1-1,1 1,-1-1,1 1,-1 0,1-1,-1 1,-22-21,20 19,-7-6,0 2,0-1,-1 2,1-1,-1 1,-1 1,-13-4,-89-16,50 12,-543-149,556 145,0 2,-61-7,-60-5,74 10,-170-7,188 23,-92-1,-231 29,22 31,-487 58,-103-69,0-39,-52-36,886 20,0-5,1-7,-212-56,263 49,-162-44,215 62,-61-7,81 14,-1 0,0 1,0 1,0 0,1 1,-1 0,0 1,-13 4,-8 9,1 1,-60 41,60-37,-607 350,446-278,-291 97,73-68,-795 126,342-177,-5-67,452-7,336 3,-344-5,2-35,-34-19,-776 0,1075 58,-288 10,383-1,0 3,-82 24,-117 51,109-33,-162 49,309-100,0-1,0 0,0 0,0 0,0-1,-1 0,1 0,0-1,0 1,0-2,0 1,0-1,-11-4,-5-5,0 0,-32-21,36 20,-340-222,351 228,-47-28,-93-41,-13-7,84 39,45 26,0-1,1-2,-43-35,73 54,-1 0,1-1,-1 1,1-1,0 1,-1-1,1 0,0 0,0 1,0-1,0 0,0-3,1 5,-1-1,1 0,0 0,0 1,0-1,1 0,-1 0,0 1,0-1,0 0,0 1,1-1,-1 0,0 1,1-1,-1 0,0 1,1-1,-1 0,1 1,-1-1,1 1,0-2,4 0,-1-1,1 1,0 0,0 0,-1 1,1 0,0-1,0 1,9 0,108-8,141 9,-144 2,1422 0,-1096-2,-224 19,-96-6,405 33,105 25,334 58,-889-122,-29-3,91 19,-114-18,0 0,1-2,52-1,85-12,-162 9,54-4,-1-3,0-3,0-2,-1-2,75-32,-129 46,-1 1,0-1,0 1,1-1,-1 1,0-1,0 0,0 0,0 0,0 1,0-1,0 0,0 0,0-1,0 1,0 0,0-2,-1 2,0 0,0 1,0-1,0 0,0 1,0-1,0 0,-1 1,1-1,0 1,0-1,-1 0,1 1,-1-1,1 1,0-1,-1 1,1-1,-1 1,1-1,-1 1,1 0,-1-1,-1 0,-6-3,0 0,0 1,0 0,-10-2,11 3,-81-20,-2 4,-105-7,66 9,-146-14,-317 7,300 7,52 2,235 14,-1 0,1-1,0 1,0-1,0 0,0 0,0-1,0 1,0-1,0 0,0-1,-7-4,9 5,1-1,0 1,0 0,0-1,1 1,-1-1,1 0,-1 0,1 1,0-1,0 0,0 0,0 0,1 0,-1 0,1-1,0 1,0 0,0 0,0 0,1 0,-1 0,2-4,-1 3,0 0,0 0,0 1,1-1,-1 0,1 1,0-1,0 1,1 0,-1 0,1-1,-1 1,1 1,0-1,0 0,0 1,1 0,-1-1,0 1,1 1,0-1,4-1,8-3,0 1,0 1,1 1,22-2,492-10,-384 17,176-1,497 4,-605 2,-1 9,245 52,-319-42,1-5,2-6,173-6,-254-10,287 1,-210 16,47 1,822-19,-807 17,-38-1,216-9,110 6,-370-3,345 35,-307-21,86 15,-209-31,-1-1,1-2,0-2,39-3,131-24,-124 14,819-73,9 67,-376 46,-399-18,223 20,-204-18,-2 7,216 56,-122-15,-180-48,121 6,-132-14,98 21,-32-3,94 6,264 44,-176-20,-230-41,-43-7,1 0,0-2,37-3,-49 0,1-1,-1-2,0 1,0-2,-1 0,27-13,136-64,-145 65</inkml:trace>
+</inkml:ink>
+</file>
+
+<file path=ppt/ink/ink2.xml><?xml version="1.0" encoding="utf-8"?>
+<inkml:ink xmlns:inkml="http://www.w3.org/2003/InkML">
+  <inkml:definitions>
+    <inkml:context xml:id="ctx0">
+      <inkml:inkSource xml:id="inkSrc0">
+        <inkml:traceFormat>
+          <inkml:channel name="X" type="integer" min="-2.14748E9" max="2.14748E9" units="cm"/>
+          <inkml:channel name="Y" type="integer" min="-2.14748E9" max="2.14748E9" units="cm"/>
+        </inkml:traceFormat>
+        <inkml:channelProperties>
+          <inkml:channelProperty channel="X" name="resolution" value="1000" units="1/cm"/>
+          <inkml:channelProperty channel="Y" name="resolution" value="1000" units="1/cm"/>
+        </inkml:channelProperties>
+      </inkml:inkSource>
+      <inkml:timestamp xml:id="ts0" timeString="2025-05-04T18:51:31.697"/>
+    </inkml:context>
+    <inkml:brush xml:id="br0">
+      <inkml:brushProperty name="width" value="0.3" units="cm"/>
+      <inkml:brushProperty name="height" value="0.6" units="cm"/>
+      <inkml:brushProperty name="color" value="#FFFC00"/>
+      <inkml:brushProperty name="tip" value="rectangle"/>
+      <inkml:brushProperty name="rasterOp" value="maskPen"/>
+      <inkml:brushProperty name="ignorePressure" value="1"/>
+    </inkml:brush>
+  </inkml:definitions>
+  <inkml:trace contextRef="#ctx0" brushRef="#br0">1031 517,'80'-4,"138"-24,16-3,1 27,81-7,-156-15,178-53,-199 44,394-75,-309 85,24-3,311-42,-461 57,53-5,10 2,43-2,332 18,-231 1,-271-1,61 9,-84-8,0 1,0 1,0 0,-1 1,1 0,-1 0,0 1,0 0,13 10,-20-13,0 0,0 1,-1-1,1 1,-1 0,1 0,-1 0,0 0,0 0,-1 0,1 1,-1-1,1 1,-1-1,0 1,0-1,0 1,-1 0,0-1,1 1,-1 0,0-1,-1 1,1 0,-1-1,1 1,-3 5,1-3,-1-1,1 1,-1-1,0 0,-1 0,1-1,-1 1,0-1,0 1,0-1,-1-1,1 1,-1 0,0-1,0 0,-11 4,-9 1,0-1,-1-1,0-1,-1-2,-44 1,7 0,-879 20,851-24,-354-21,272 10,29 2,-482-18,477 26,-24-2,-201 22,298-7,-138 41,-69 43,252-84,-52 15,49-17,1 2,1 1,-35 19,67-31,-1 0,1 0,-1 0,1-1,-1 1,0 0,1-1,-1 1,0-1,0 1,1-1,-1 0,0 0,0 0,0 0,1 0,-1 0,-3-1,4 1,1-1,-1 0,0 1,0-1,0 0,1 1,-1-1,0 0,0 0,1 0,-1 1,1-1,-1 0,1 0,-1 0,1 0,0 0,-1 0,1 0,0 0,0 0,0 0,0-1,0-2,0-1,0 1,1 0,-1 1,1-1,0 0,0 0,0 0,1 0,0 1,-1-1,1 0,0 1,1 0,3-5,7-4,1 2,0 0,1 1,0 0,0 1,0 0,18-4,-31 11,80-30,1 3,1 5,126-20,269-7,697 34,-309 74,-606-11,76 9,-49-48,-75-5,766 24,-492 5,-49-1,-189-31,237 12,331 9,-597-23,-26-2,0-9,295-59,-368 42,148-57,65-19,-289 98,0 2,0 2,1 2,74 6,-31 0,276 0,548 27,-183 41,-77 30,-344-58,6-25,-112-7,704 29,226-40,-513-2,-364-16,11 0,-109 17,195 6,-267-1,-1 5,91 21,612 147,-485-110,-233-53,1-4,1-2,-1-4,1-2,0-4,0-3,119-22,200-84,-14 3,-300 93,1 4,82-1,157 13,-171 1,279 1,-2680-4,1301 47,676-12,-379 98,570-110,1 5,1 3,2 4,1 3,-80 52,135-74,0-1,-36 15,-373 130,-23-31,34-29,-5-19,-519 32,564-95,0-16,-675-84,-422-59,562 56,-364-110,1197 181,-430-63,-3 31,76 21,-343-4,281 55,390-14,0 6,-148 42,97-8,-286 130,428-169,0 2,0 1,-25 21,-741 503,-7-106,598-346,-5-9,-247 62,222-86,-3-9,-375 25,-329-66,441-11,481 7,-1-2,0 0,0-1,0 0,1-1,-1-1,1-1,0 0,0-1,1 0,0-2,0 1,-14-12,-92-78,42 31,35 30,1-1,2-1,-37-48,62 68,0-1,2-1,0-1,2 0,0 0,1-1,1 0,1-1,-8-40,15 60,1 0,-1 0,1 0,0 0,0 0,0 0,1 0,-1 0,1 0,-1 0,1 0,0 0,0 0,0 0,1 0,-1 1,0-1,1 0,0 1,0 0,0-1,0 1,0 0,0 0,5-3,3-1,2 0,-1 0,1 1,-1 1,19-5,52-12,112-14,92 4,957 5,-710 57,31 1,756-28,-697-6,-405 0,228 5,-403 3,-30 1,-15 2,-25 6,-13-1,0-2,-1-2,0-2,-70 5,82-9,-165 12,-1-8,-371-33,-376-136,869 144,-779-196,263 31,502 160,39 10,0-1,-57-26,95 34,10 2,22 2,399 30,-168-9,-124-11,408 23,-292-22,717 11,-682-33,288-50,-387 35,353-4,366 34,-518-4,-157-4,-1-11,387-76,-575 83,-1-2,56-25,-43 15</inkml:trace>
+</inkml:ink>
+</file>
+
+<file path=ppt/ink/ink3.xml><?xml version="1.0" encoding="utf-8"?>
+<inkml:ink xmlns:inkml="http://www.w3.org/2003/InkML">
+  <inkml:definitions>
+    <inkml:context xml:id="ctx0">
+      <inkml:inkSource xml:id="inkSrc0">
+        <inkml:traceFormat>
+          <inkml:channel name="X" type="integer" min="-2.14748E9" max="2.14748E9" units="cm"/>
+          <inkml:channel name="Y" type="integer" min="-2.14748E9" max="2.14748E9" units="cm"/>
+        </inkml:traceFormat>
+        <inkml:channelProperties>
+          <inkml:channelProperty channel="X" name="resolution" value="1000" units="1/cm"/>
+          <inkml:channelProperty channel="Y" name="resolution" value="1000" units="1/cm"/>
+        </inkml:channelProperties>
+      </inkml:inkSource>
+      <inkml:timestamp xml:id="ts0" timeString="2025-05-04T18:51:46.237"/>
+    </inkml:context>
+    <inkml:brush xml:id="br0">
+      <inkml:brushProperty name="width" value="0.3" units="cm"/>
+      <inkml:brushProperty name="height" value="0.6" units="cm"/>
+      <inkml:brushProperty name="color" value="#FFFC00"/>
+      <inkml:brushProperty name="tip" value="rectangle"/>
+      <inkml:brushProperty name="rasterOp" value="maskPen"/>
+      <inkml:brushProperty name="ignorePressure" value="1"/>
+    </inkml:brush>
+  </inkml:definitions>
+  <inkml:trace contextRef="#ctx0" brushRef="#br0">330 586,'11'-1,"-1"0,0 0,0-1,0-1,0 1,11-6,3 0,536-161,705-116,-923 235,2 14,586 16,-120 27,-640-7,-158 0,-1 0,0 1,0 0,0 1,16 4,-24-5,0 0,0 0,0 1,0-1,0 1,0 0,-1 0,1 0,0 0,-1 0,0 0,1 1,-1-1,0 1,0 0,-1 0,1-1,0 1,-1 0,0 0,0 1,2 4,-2-2,0-1,0 0,-1 0,1 1,-1-1,0 0,-1 0,1 1,-1-1,0 0,-1 0,1 0,-1 0,0 0,0 0,-4 7,0-5,0 1,0-1,0-1,-1 1,1-1,-2 0,1 0,-15 7,-12 6,-1-3,0 0,-1-3,-74 18,-158 15,246-42,-840 76,333-83,-98 4,502 4,1 6,0 6,-218 58,18 43,253-89,-5 3,3 4,0 3,3 3,-129 101,194-139,0 0,0 0,0 0,-1-1,0 0,0-1,0 1,-10 2,14-4,0-1,0 0,0 0,0 0,0 0,0 0,0 0,0 0,0-1,0 1,0-1,0 0,1 1,-1-1,0 0,0 0,1 0,-1 0,0 0,1-1,-1 1,1 0,-1-1,1 1,0-1,0 1,0-1,0 0,0 1,0-1,0 0,0-2,-3-5,0 0,1-1,0 1,1-1,0 0,1 0,0 0,0 0,1 0,0 0,1 0,2-11,0 7,1 0,0 1,1-1,1 1,0 0,1 1,14-21,-2 9,0 1,2 1,0 1,2 1,0 1,1 1,38-22,-3 8,2 3,83-28,136-30,-259 81,240-64,282-39,-384 88,0 7,0 7,190 15,-272 1,109 26,71 35,-95-24,136 52,-241-74,0 3,-2 2,53 38,-77-50,0 0,0-3,2 0,-1-2,44 10,25 9,-31-8,1-2,1-4,74 8,-61-11,38 3,-197-4,-618 6,528-19,-592-24,633 13,-1006-55,335 69,630 10,-18 2,179-15,0 0,0 0,1 0,-1-1,0 1,0-1,0 1,1-1,-1 0,0 0,1 0,-1 0,1 0,-1-1,1 1,0-1,-3-2,5 4,-1-1,1 0,0 1,-1-1,1 0,0 1,-1-1,1 0,0 0,0 1,0-1,0 0,-1 1,1-1,0 0,0 0,0 0,1 1,-1-1,0 0,0 1,0-1,1 0,-1 0,1-2,1 1,-1 0,1 0,-1 0,1 0,0 0,0 1,0-1,0 0,4-1,17-10,0 1,1 2,0 0,33-7,56-14,1 5,154-15,241 7,293 53,-7 76,137 13,-913-107,195 18,-206-18,0 0,0 1,-1 0,1 0,-1 0,0 1,9 4,-15-7,-1 1,1-1,-1 0,1 1,-1-1,1 1,0-1,-1 1,0 0,1-1,-1 1,1-1,-1 1,0 0,1-1,-1 1,0 0,0-1,1 1,-1 0,0 0,0-1,0 1,0 0,0-1,0 1,0 0,0 0,-1 1,0 0,0 0,-1 1,0-1,1 0,-1 0,0 0,0 0,0 0,-1 0,1-1,0 1,-5 2,-25 14,-2-1,-69 25,-85 14,168-51,-132 32,-211 24,-166-13,310-31,-913 82,-362 111,1123-161,213-32,149-15,0-1,0-1,1 1,-1-2,-9 0,15 0,1 1,-1-1,0 0,1 0,-1 0,1 0,0-1,-1 1,1-1,0 1,0-1,0 0,0 0,0 0,0 0,0 0,1 0,-1 0,1-1,-2-2,-2-6,0 0,1 0,1-1,0 1,0-1,1 0,0 0,1-23,1 28,0 0,1 0,0 0,0 0,0 0,1 0,0 0,1 0,0 1,0-1,0 1,1 0,-1 0,2 0,-1 0,9-8,9-5,0 2,1 1,1 1,1 1,35-15,143-45,-203 74,161-47,2 7,266-30,345 22,374 50,-679 39,-7 33,-299-45,-106-22,-36-5,0 1,0 1,21 6,-41-9,1-1,-1 1,1-1,-1 1,1 0,-1-1,1 1,-1 0,0 0,0 0,1 0,-1 0,1 1,-2-1,0 0,0 0,0 0,0-1,-1 1,1 0,0 0,0-1,-1 1,1 0,0-1,-1 1,1 0,-1-1,1 1,-1 0,1-1,-1 1,0-1,1 1,-1-1,1 0,-1 1,0-1,0 1,1-1,-1 0,0 0,0 1,1-1,-1 0,-1 0,-24 10,-1-1,0-1,-1-2,-42 5,-38 3,-161-2,-114-24,273 7,-662-39,7-1,733 44,15 1,-1 0,0-2,-25-5,42 7,-1 0,1-1,0 1,0 0,0 0,0-1,0 1,-1 0,1-1,0 1,0-1,0 0,0 1,0-1,1 0,-1 0,0 1,0-1,0 0,0 0,1 0,-1 0,1 0,-1 0,0 0,1 0,0 0,-1 0,1 0,0-1,-1 1,1 0,0-2,1 0,0 1,0-1,0 1,0-1,1 1,-1 0,1 0,0 0,-1-1,1 2,0-1,0 0,0 0,0 1,3-2,20-12,1 1,1 1,0 2,51-15,39-7,1 6,209-22,248 17,-166 26,724 85,-238 45,-628-87,321 37,-493-65,1249 92,-847-61,-346-25,351-5,-114-7,-275 8,114 26,-155-23,-37-4,-35-10,1 1,0-1,-1 0,1 0,-1 0,1 1,-1-1,1 0,-1 1,1-1,-1 0,1 1,-1-1,1 1,-1-1,1 1,-1-1,0 1,1-1,-1 1,0-1,0 1,1-1,-1 1,0 0,0-1,0 1,0-1,0 1,0 0,0-1,0 1,0-1,0 1,0 0,0-1,0 1,0-1,0 1,-1 0,1-1,0 1,0-1,-1 1,1-1,0 1,-1-1,1 1,-1-1,1 1,-1-1,1 0,-1 1,1-1,-1 0,0 1,-16 11,0-1,-1-1,0-1,-24 9,7-2,-101 43,-2-5,-3-6,-1-7,-3-6,0-6,-188 13,47-33,1-12,-475-67,-543-178,425 84,841 161,30 3,0 0,0 0,0-1,0 0,0 0,0-1,0 1,0-2,1 1,-1-1,-8-5,14 8,0-1,0 0,1 1,-1-1,0 0,1 0,-1 1,1-1,-1 0,1 0,-1 0,1 0,0 0,-1 0,1 1,0-1,0 0,0 0,0 0,-1 0,1 0,1 0,-1 0,0 0,0 0,0 0,0 0,1 0,-1 0,0 0,1 0,-1 0,1 1,-1-1,1 0,-1 0,1 0,0 1,-1-1,3-1,1-2,1 0,0 0,0 0,0 1,8-4,16-6,2 1,-1 2,1 1,1 2,-1 1,38-3,-42 5,937-84,7 55,-761 27,1942-9,-1783 16,-368-1,32-1,50 7,-64 1,-19-7,0 0,0 0,0 1,0-1,1 0,-1 0,0 0,0 1,0-1,0 0,0 0,0 0,0 1,0-1,0 0,0 0,0 1,0-1,0 0,0 0,0 0,0 1,0-1,0 0,0 0,0 0,0 1,0-1,-1 0,1 0,0 0,0 1,0-1,0 0,0 0,-1 0,1 0,0 1,0-1,-31 16,0-5,0-1,-1-1,0-2,-48 4,-137 1,186-11,-284-2,-529-68,710 51,-280-33,-5 26,189 25,-451-10,544 5,-261-18,295 12,-186-45,-485-210,738 252,-33-9,-1 3,-1 3,-1 4,0 2,-116-1,174 11,6 1,-1 0,1 0,0-1,-17-4,22 0,11 0,17-4,93-11,214-8,-198 20,1674-71,-55 110,-944-7,918 52,-1292-37,-264-21,-43-3,132 9,551-21,-428-6,-166 3,428 4,-6 46,-46 20,-118-64,-286-8,153-15,-20 1,786-37,374 10,-1229 45,548-4,-359-41,-44 1,974 27,-953 18,132-2,-546-1,-1 0,1 0,-1 1,1-1,-1 1,1 0,7 3,-11-4,-1 1,1-1,-1 0,0 0,1 1,-1-1,0 0,1 0,-1 1,0-1,1 0,-1 1,0-1,0 1,1-1,-1 0,0 1,0-1,0 1,1-1,-1 0,0 1,0-1,0 1,0-1,0 1,0-1,0 1,0-1,0 1,-1 1,0 0,0-1,0 1,0 0,0-1,0 1,-1-1,1 0,-1 1,1-1,-1 0,-1 2,-28 17,-1 0,-1-2,0-2,-1-1,-44 13,-189 42,206-56,-883 157,728-149,-1-9,-310-21,18-72,208 25,247 47,0 2,-1 3,1 2,-1 2,-79 13,-31 7,-101 9,-84 2,-1752 12,833-157,847 66,-1042-82,-10 82,1358 48,-361 7,319 2,-158 30,252-29,-85 15,-255 79,83 29,8 24,289-146,-98 52,3 6,3 4,-189 159,226-161,79-72,0 0,0 0,0 0,0 0,0 0,0 0,0 0,0 0,0 0,0 0,0 0,0 0,-1 0,1 0,0 0,0 0,0 0,0 0,0 1,0-1,0 0,0 0,0 0,0 0,0 0,0 0,0 0,0 0,0 0,0 0,0 0,0 1,0-1,0 0,0 0,0 0,0 0,0 0,0 0,0 0,0 0,0 0,0 0,0 0,0 1,0-1,0 0,0 0,0 0,0 0,1 0,-1 0,0 0,0 0,0 0,0 0,0 0,0 0,0 0,0 0,0 0,0 0,0 0,0 0,1 0,-1 0,0 0,11-1,20-8,201-70,3 11,3 9,2 11,459-31,957 49,-1420 43,427 80,277 22,-719-94,530 56,1 33,-697-103,-39-5,-1-1,0 2,0 0,27 10,-41-13,-1 0,0 0,1 0,-1 0,1 0,-1 1,0-1,1 0,-1 0,0 0,1 1,-1-1,0 0,1 0,-1 1,0-1,0 0,1 1,-1-1,0 0,0 1,1-1,-1 0,0 1,0-1,0 0,0 1,0-1,0 1,0-1,0 0,1 1,-1-1,0 1,-1-1,1 0,0 1,0-1,0 1,0-1,0 0,0 1,0-1,-1 0,1 1,0-1,0 0,-1 1,-2 2,0 0,0-1,-1 1,1-1,-1 0,1 0,-1 0,0-1,-7 3,-48 12,0-3,-108 11,162-23,-246 22,-1198 16,76-106,14-70,907 92,0 29,338 21,-202 36,-103 52,281-50,24-6,89-32,-1-1,-33 2,10-2,48-3,-1-1,1 0,0 0,-1 0,1 0,0 0,0 0,-1 0,1 0,0 0,-1-1,1 1,0 0,0-1,0 1,-1-1,1 0,0 1,0-1,0 0,-1-1,2 2,-1-1,1 0,0 0,0 0,0 0,0 0,0 0,0 0,0 0,0 0,0 0,0 0,0 0,1 0,-1 0,0 0,1 0,-1 0,1 0,-1 1,1-1,-1 0,1 0,0 1,-1-1,1 0,0 1,0-1,0 0,9-8,0 2,1-1,0 1,0 1,0 0,1 0,16-5,-23 9,96-36,1 4,127-24,219-20,-313 57,1146-127,-602 100,97-8,275 12,-32 46,-606-2,-330 3,1 3,-1 4,-1 4,134 40,-46-13,206 23,-312-54,73 10,339 47,-303-38,-104-15,112 8,-6-6,26 0,-115-16,-35-1,0 2,75 11,6 5,-80-13,64 16,-111-19,-1 0,1 1,-1-1,1 1,-1 0,7 5,-10-7,-1 1,1-1,-1 0,0 1,1-1,-1 0,0 1,1-1,-1 0,0 1,0-1,1 1,-1-1,0 1,0-1,0 0,1 1,-1-1,0 1,0-1,0 1,0-1,0 1,0-1,0 1,0-1,0 1,-1 1,0-1,0 0,0 0,1 0,-1 0,0-1,0 1,-1 0,1 0,0 0,0-1,0 1,0-1,-1 1,-1 0,-19 6,-1-2,1 0,-45 4,35-6,-457 43,239-25,-1600 30,-392-247,698-63,-49-7,-7 121,1209 143,276 8,-150 26,42 14,-343 118,284-77,-79 30,252-69,1 5,-147 97,168-96,-68 42,-583 327,657-387,-2-3,-1-4,-2-3,-167 26,67-30,-241-2,-105-4,-62 0,-164-42,-333-47,747 41,-7 0,212 34,-85-3,220 1,0 0,0-1,1 0,-1 0,1 0,-1 0,1-1,-1 1,1-1,0 0,-1 0,1 0,0 0,0-1,1 1,-1-1,1 0,-1 1,1-1,0 0,0-1,0 1,0 0,0 0,1-1,0 1,0-1,0 0,0 1,0-1,1 0,-1 1,1-1,0 0,0 0,0 1,1-1,0 0,-1 1,1-1,0 0,1 1,-1-1,1 1,-1 0,1-1,0 1,0 0,5-5,-1 2,1-1,0 1,1 1,-1-1,1 1,0 1,16-8,68-19,-90 30,87-21,117-15,-93 20,761-97,-210 78,-57-10,51-1,-556 41,141-24,96-42,-292 63,1 2,0 2,71 3,-94 1,-1-2,1 0,35-11,16-2,6 6,148 0,82 24,-43-1,-250-12,31 1,-47-2,0 1,0-1,0 1,0 0,0 0,0 0,-1 0,1 1,0-1,0 1,-1-1,5 5,-6-5,-1-1,1 1,-1 0,1 0,0 0,-1 0,0 0,1 0,-1 0,0 0,1 0,-1 1,0-1,0 0,0 0,0 0,0 0,0 0,0 0,0 0,0 0,-1 0,1 0,0 1,-1-1,1 0,-1 0,1-1,-1 1,1 0,-1 0,0 0,1 0,-1 0,0-1,0 1,0 0,0-1,-1 2,-4 3,-1 0,1-1,-1 0,-13 6,-10 2,-1-2,-1-1,1-1,-42 4,-136 6,201-18,-900 9,550-13,-908-16,1259 20,-463-14,457 14,8 1,1-1,-1 0,0 0,0-1,0 0,0 1,1-1,-7-3,11 4,0 0,0 0,0 0,0 0,-1 0,1 0,0 0,0 0,0 0,0 0,0 0,-1 0,1 0,0 0,0 0,0-1,0 1,0 0,0 0,0 0,0 0,-1 0,1 0,0-1,0 1,0 0,0 0,0 0,0 0,0 0,0-1,0 1,0 0,0 0,0 0,0 0,0-1,0 1,0 0,0 0,0 0,0 0,0 0,0-1,0 1,0 0,0 0,0 0,1 0,-1 0,0 0,0-1,0 1,0 0,0 0,0 0,14-6,19-1,312-2,-245 10,707 25,-638-17,42 6,127 3,-313-18</inkml:trace>
+</inkml:ink>
 </file>
 
 <file path=ppt/notesMasters/notesMaster1.xml><?xml version="1.0" encoding="utf-8"?>
@@ -246,7 +333,7 @@
           <a:p>
             <a:fld id="{208D3539-DA3D-4484-8125-A50ADCDF7799}" type="datetimeFigureOut">
               <a:rPr lang="en-IN" smtClean="0"/>
-              <a:t>01-04-2025</a:t>
+              <a:t>04-05-2025</a:t>
             </a:fld>
             <a:endParaRPr lang="en-IN"/>
           </a:p>
@@ -792,7 +879,7 @@
           <a:p>
             <a:fld id="{1D8BD707-D9CF-40AE-B4C6-C98DA3205C09}" type="datetimeFigureOut">
               <a:rPr lang="en-US" smtClean="0"/>
-              <a:t>4/1/2025</a:t>
+              <a:t>5/4/2025</a:t>
             </a:fld>
             <a:endParaRPr lang="en-US"/>
           </a:p>
@@ -955,7 +1042,7 @@
           <a:p>
             <a:fld id="{1D8BD707-D9CF-40AE-B4C6-C98DA3205C09}" type="datetimeFigureOut">
               <a:rPr lang="en-US" smtClean="0"/>
-              <a:t>4/1/2025</a:t>
+              <a:t>5/4/2025</a:t>
             </a:fld>
             <a:endParaRPr lang="en-US"/>
           </a:p>
@@ -1129,7 +1216,7 @@
           <a:p>
             <a:fld id="{1D8BD707-D9CF-40AE-B4C6-C98DA3205C09}" type="datetimeFigureOut">
               <a:rPr lang="en-US" smtClean="0"/>
-              <a:t>4/1/2025</a:t>
+              <a:t>5/4/2025</a:t>
             </a:fld>
             <a:endParaRPr lang="en-US"/>
           </a:p>
@@ -1292,7 +1379,7 @@
           <a:p>
             <a:fld id="{1D8BD707-D9CF-40AE-B4C6-C98DA3205C09}" type="datetimeFigureOut">
               <a:rPr lang="en-US" smtClean="0"/>
-              <a:t>4/1/2025</a:t>
+              <a:t>5/4/2025</a:t>
             </a:fld>
             <a:endParaRPr lang="en-US"/>
           </a:p>
@@ -1533,7 +1620,7 @@
           <a:p>
             <a:fld id="{1D8BD707-D9CF-40AE-B4C6-C98DA3205C09}" type="datetimeFigureOut">
               <a:rPr lang="en-US" smtClean="0"/>
-              <a:t>4/1/2025</a:t>
+              <a:t>5/4/2025</a:t>
             </a:fld>
             <a:endParaRPr lang="en-US"/>
           </a:p>
@@ -1815,7 +1902,7 @@
           <a:p>
             <a:fld id="{1D8BD707-D9CF-40AE-B4C6-C98DA3205C09}" type="datetimeFigureOut">
               <a:rPr lang="en-US" smtClean="0"/>
-              <a:t>4/1/2025</a:t>
+              <a:t>5/4/2025</a:t>
             </a:fld>
             <a:endParaRPr lang="en-US"/>
           </a:p>
@@ -2242,7 +2329,7 @@
           <a:p>
             <a:fld id="{1D8BD707-D9CF-40AE-B4C6-C98DA3205C09}" type="datetimeFigureOut">
               <a:rPr lang="en-US" smtClean="0"/>
-              <a:t>4/1/2025</a:t>
+              <a:t>5/4/2025</a:t>
             </a:fld>
             <a:endParaRPr lang="en-US"/>
           </a:p>
@@ -2354,7 +2441,7 @@
           <a:p>
             <a:fld id="{1D8BD707-D9CF-40AE-B4C6-C98DA3205C09}" type="datetimeFigureOut">
               <a:rPr lang="en-US" smtClean="0"/>
-              <a:t>4/1/2025</a:t>
+              <a:t>5/4/2025</a:t>
             </a:fld>
             <a:endParaRPr lang="en-US"/>
           </a:p>
@@ -2444,7 +2531,7 @@
           <a:p>
             <a:fld id="{1D8BD707-D9CF-40AE-B4C6-C98DA3205C09}" type="datetimeFigureOut">
               <a:rPr lang="en-US" smtClean="0"/>
-              <a:t>4/1/2025</a:t>
+              <a:t>5/4/2025</a:t>
             </a:fld>
             <a:endParaRPr lang="en-US"/>
           </a:p>
@@ -2633,7 +2720,7 @@
           <a:p>
             <a:fld id="{1D8BD707-D9CF-40AE-B4C6-C98DA3205C09}" type="datetimeFigureOut">
               <a:rPr lang="en-US" smtClean="0"/>
-              <a:t>4/1/2025</a:t>
+              <a:t>5/4/2025</a:t>
             </a:fld>
             <a:endParaRPr lang="en-US"/>
           </a:p>
@@ -2950,7 +3037,7 @@
           <a:p>
             <a:fld id="{1D8BD707-D9CF-40AE-B4C6-C98DA3205C09}" type="datetimeFigureOut">
               <a:rPr lang="en-US" smtClean="0"/>
-              <a:t>4/1/2025</a:t>
+              <a:t>5/4/2025</a:t>
             </a:fld>
             <a:endParaRPr lang="en-US"/>
           </a:p>
@@ -3329,7 +3416,7 @@
           <a:p>
             <a:fld id="{1D8BD707-D9CF-40AE-B4C6-C98DA3205C09}" type="datetimeFigureOut">
               <a:rPr lang="en-US" smtClean="0"/>
-              <a:t>4/1/2025</a:t>
+              <a:t>5/4/2025</a:t>
             </a:fld>
             <a:endParaRPr lang="en-US"/>
           </a:p>
@@ -4286,7 +4373,11 @@
               <a:buChar char="■"/>
             </a:pPr>
             <a:r>
-              <a:rPr lang="en-US" dirty="0"/>
+              <a:rPr lang="en-US" dirty="0">
+                <a:highlight>
+                  <a:srgbClr val="FFFF00"/>
+                </a:highlight>
+              </a:rPr>
               <a:t>Indexes may be dense or sparse</a:t>
             </a:r>
           </a:p>
@@ -4302,15 +4393,27 @@
               <a:buChar char="■"/>
             </a:pPr>
             <a:r>
-              <a:rPr lang="en-US" dirty="0"/>
+              <a:rPr lang="en-US" dirty="0">
+                <a:highlight>
+                  <a:srgbClr val="FFFF00"/>
+                </a:highlight>
+              </a:rPr>
               <a:t>Dense index has an index entry for every search key value</a:t>
             </a:r>
             <a:r>
-              <a:rPr lang="en-US" i="1" dirty="0"/>
-              <a:t> </a:t>
-            </a:r>
-            <a:r>
-              <a:rPr lang="en-US" dirty="0"/>
+              <a:rPr lang="en-US" i="1" dirty="0">
+                <a:highlight>
+                  <a:srgbClr val="FFFF00"/>
+                </a:highlight>
+              </a:rPr>
+              <a:t> </a:t>
+            </a:r>
+            <a:r>
+              <a:rPr lang="en-US" dirty="0">
+                <a:highlight>
+                  <a:srgbClr val="FFFF00"/>
+                </a:highlight>
+              </a:rPr>
               <a:t>in the data file</a:t>
             </a:r>
           </a:p>
@@ -4326,7 +4429,11 @@
               <a:buChar char="■"/>
             </a:pPr>
             <a:r>
-              <a:rPr lang="en-US" dirty="0"/>
+              <a:rPr lang="en-US" dirty="0">
+                <a:highlight>
+                  <a:srgbClr val="FFFF00"/>
+                </a:highlight>
+              </a:rPr>
               <a:t>Sparse index has entries for only some search values</a:t>
             </a:r>
           </a:p>
@@ -5291,6 +5398,9 @@
             </a:pPr>
             <a:r>
               <a:rPr sz="2200" spc="-5" dirty="0">
+                <a:highlight>
+                  <a:srgbClr val="FFFF00"/>
+                </a:highlight>
                 <a:latin typeface="Calibri"/>
                 <a:cs typeface="Calibri"/>
               </a:rPr>
@@ -5298,6 +5408,9 @@
             </a:r>
             <a:r>
               <a:rPr sz="2200" spc="-20" dirty="0">
+                <a:highlight>
+                  <a:srgbClr val="FFFF00"/>
+                </a:highlight>
                 <a:latin typeface="Calibri"/>
                 <a:cs typeface="Calibri"/>
               </a:rPr>
@@ -5305,6 +5418,9 @@
             </a:r>
             <a:r>
               <a:rPr sz="2200" spc="-5" dirty="0">
+                <a:highlight>
+                  <a:srgbClr val="FFFF00"/>
+                </a:highlight>
                 <a:latin typeface="Calibri"/>
                 <a:cs typeface="Calibri"/>
               </a:rPr>
@@ -5312,6 +5428,9 @@
             </a:r>
             <a:r>
               <a:rPr sz="2200" spc="10" dirty="0">
+                <a:highlight>
+                  <a:srgbClr val="FFFF00"/>
+                </a:highlight>
                 <a:latin typeface="Calibri"/>
                 <a:cs typeface="Calibri"/>
               </a:rPr>
@@ -5319,6 +5438,9 @@
             </a:r>
             <a:r>
               <a:rPr sz="2200" spc="-10" dirty="0">
+                <a:highlight>
+                  <a:srgbClr val="FFFF00"/>
+                </a:highlight>
                 <a:latin typeface="Calibri"/>
                 <a:cs typeface="Calibri"/>
               </a:rPr>
@@ -5326,6 +5448,9 @@
             </a:r>
             <a:r>
               <a:rPr sz="2200" spc="-5" dirty="0">
+                <a:highlight>
+                  <a:srgbClr val="FFFF00"/>
+                </a:highlight>
                 <a:latin typeface="Calibri"/>
                 <a:cs typeface="Calibri"/>
               </a:rPr>
@@ -5333,6 +5458,9 @@
             </a:r>
             <a:r>
               <a:rPr sz="2200" spc="-10" dirty="0">
+                <a:highlight>
+                  <a:srgbClr val="FFFF00"/>
+                </a:highlight>
                 <a:latin typeface="Calibri"/>
                 <a:cs typeface="Calibri"/>
               </a:rPr>
@@ -5340,6 +5468,9 @@
             </a:r>
             <a:r>
               <a:rPr sz="2200" spc="-15" dirty="0">
+                <a:highlight>
+                  <a:srgbClr val="FFFF00"/>
+                </a:highlight>
                 <a:latin typeface="Calibri"/>
                 <a:cs typeface="Calibri"/>
               </a:rPr>
@@ -5347,6 +5478,9 @@
             </a:r>
             <a:r>
               <a:rPr sz="2200" spc="-5" dirty="0">
+                <a:highlight>
+                  <a:srgbClr val="FFFF00"/>
+                </a:highlight>
                 <a:latin typeface="Calibri"/>
                 <a:cs typeface="Calibri"/>
               </a:rPr>
@@ -5354,6 +5488,9 @@
             </a:r>
             <a:r>
               <a:rPr sz="2200" spc="-480" dirty="0">
+                <a:highlight>
+                  <a:srgbClr val="FFFF00"/>
+                </a:highlight>
                 <a:latin typeface="Calibri"/>
                 <a:cs typeface="Calibri"/>
               </a:rPr>
@@ -5361,6 +5498,9 @@
             </a:r>
             <a:r>
               <a:rPr sz="2200" spc="-10" dirty="0">
+                <a:highlight>
+                  <a:srgbClr val="FFFF00"/>
+                </a:highlight>
                 <a:latin typeface="Calibri"/>
                 <a:cs typeface="Calibri"/>
               </a:rPr>
@@ -5368,6 +5508,9 @@
             </a:r>
             <a:r>
               <a:rPr sz="2200" spc="-15" dirty="0">
+                <a:highlight>
+                  <a:srgbClr val="FFFF00"/>
+                </a:highlight>
                 <a:latin typeface="Calibri"/>
                 <a:cs typeface="Calibri"/>
               </a:rPr>
@@ -5375,6 +5518,9 @@
             </a:r>
             <a:r>
               <a:rPr sz="2200" spc="-20" dirty="0">
+                <a:highlight>
+                  <a:srgbClr val="FFFF00"/>
+                </a:highlight>
                 <a:latin typeface="Calibri"/>
                 <a:cs typeface="Calibri"/>
               </a:rPr>
@@ -5382,6 +5528,9 @@
             </a:r>
             <a:r>
               <a:rPr sz="2200" spc="-5" dirty="0">
+                <a:highlight>
+                  <a:srgbClr val="FFFF00"/>
+                </a:highlight>
                 <a:latin typeface="Calibri"/>
                 <a:cs typeface="Calibri"/>
               </a:rPr>
@@ -5389,6 +5538,9 @@
             </a:r>
             <a:r>
               <a:rPr sz="2200" spc="-10" dirty="0">
+                <a:highlight>
+                  <a:srgbClr val="FFFF00"/>
+                </a:highlight>
                 <a:latin typeface="Calibri"/>
                 <a:cs typeface="Calibri"/>
               </a:rPr>
@@ -5396,6 +5548,9 @@
             </a:r>
             <a:r>
               <a:rPr sz="2200" spc="-5" dirty="0">
+                <a:highlight>
+                  <a:srgbClr val="FFFF00"/>
+                </a:highlight>
                 <a:latin typeface="Calibri"/>
                 <a:cs typeface="Calibri"/>
               </a:rPr>
@@ -5403,6 +5558,9 @@
             </a:r>
             <a:r>
               <a:rPr sz="2200" spc="-10" dirty="0">
+                <a:highlight>
+                  <a:srgbClr val="FFFF00"/>
+                </a:highlight>
                 <a:latin typeface="Calibri"/>
                 <a:cs typeface="Calibri"/>
               </a:rPr>
@@ -5410,6 +5568,9 @@
             </a:r>
             <a:r>
               <a:rPr sz="2200" spc="-20" dirty="0">
+                <a:highlight>
+                  <a:srgbClr val="FFFF00"/>
+                </a:highlight>
                 <a:latin typeface="Calibri"/>
                 <a:cs typeface="Calibri"/>
               </a:rPr>
@@ -5417,6 +5578,9 @@
             </a:r>
             <a:r>
               <a:rPr sz="2200" spc="-35" dirty="0">
+                <a:highlight>
+                  <a:srgbClr val="FFFF00"/>
+                </a:highlight>
                 <a:latin typeface="Calibri"/>
                 <a:cs typeface="Calibri"/>
               </a:rPr>
@@ -5424,6 +5588,9 @@
             </a:r>
             <a:r>
               <a:rPr sz="2200" spc="10" dirty="0">
+                <a:highlight>
+                  <a:srgbClr val="FFFF00"/>
+                </a:highlight>
                 <a:latin typeface="Calibri"/>
                 <a:cs typeface="Calibri"/>
               </a:rPr>
@@ -5431,6 +5598,9 @@
             </a:r>
             <a:r>
               <a:rPr sz="2200" spc="-10" dirty="0">
+                <a:highlight>
+                  <a:srgbClr val="FFFF00"/>
+                </a:highlight>
                 <a:latin typeface="Calibri"/>
                 <a:cs typeface="Calibri"/>
               </a:rPr>
@@ -5438,6 +5608,9 @@
             </a:r>
             <a:r>
               <a:rPr sz="2200" spc="-15" dirty="0">
+                <a:highlight>
+                  <a:srgbClr val="FFFF00"/>
+                </a:highlight>
                 <a:latin typeface="Calibri"/>
                 <a:cs typeface="Calibri"/>
               </a:rPr>
@@ -5445,6 +5618,9 @@
             </a:r>
             <a:r>
               <a:rPr sz="2200" spc="-5" dirty="0">
+                <a:highlight>
+                  <a:srgbClr val="FFFF00"/>
+                </a:highlight>
                 <a:latin typeface="Calibri"/>
                 <a:cs typeface="Calibri"/>
               </a:rPr>
@@ -5452,6 +5628,9 @@
             </a:r>
             <a:r>
               <a:rPr sz="2200" dirty="0">
+                <a:highlight>
+                  <a:srgbClr val="FFFF00"/>
+                </a:highlight>
                 <a:latin typeface="Calibri"/>
                 <a:cs typeface="Calibri"/>
               </a:rPr>
@@ -5459,12 +5638,18 @@
             </a:r>
             <a:r>
               <a:rPr sz="2200" spc="-15" dirty="0">
+                <a:highlight>
+                  <a:srgbClr val="FFFF00"/>
+                </a:highlight>
                 <a:latin typeface="Calibri"/>
                 <a:cs typeface="Calibri"/>
               </a:rPr>
               <a:t>database.</a:t>
             </a:r>
-            <a:endParaRPr sz="2200">
+            <a:endParaRPr sz="2200" dirty="0">
+              <a:highlight>
+                <a:srgbClr val="FFFF00"/>
+              </a:highlight>
               <a:latin typeface="Calibri"/>
               <a:cs typeface="Calibri"/>
             </a:endParaRPr>
@@ -5486,6 +5671,9 @@
             </a:pPr>
             <a:r>
               <a:rPr sz="2200" spc="-10" dirty="0">
+                <a:highlight>
+                  <a:srgbClr val="FFFF00"/>
+                </a:highlight>
                 <a:latin typeface="Calibri"/>
                 <a:cs typeface="Calibri"/>
               </a:rPr>
@@ -5493,6 +5681,9 @@
             </a:r>
             <a:r>
               <a:rPr sz="2200" spc="-20" dirty="0">
+                <a:highlight>
+                  <a:srgbClr val="FFFF00"/>
+                </a:highlight>
                 <a:latin typeface="Calibri"/>
                 <a:cs typeface="Calibri"/>
               </a:rPr>
@@ -5500,6 +5691,9 @@
             </a:r>
             <a:r>
               <a:rPr sz="2200" spc="15" dirty="0">
+                <a:highlight>
+                  <a:srgbClr val="FFFF00"/>
+                </a:highlight>
                 <a:latin typeface="Calibri"/>
                 <a:cs typeface="Calibri"/>
               </a:rPr>
@@ -5507,6 +5701,9 @@
             </a:r>
             <a:r>
               <a:rPr sz="2200" spc="-10" dirty="0">
+                <a:highlight>
+                  <a:srgbClr val="FFFF00"/>
+                </a:highlight>
                 <a:latin typeface="Calibri"/>
                 <a:cs typeface="Calibri"/>
               </a:rPr>
@@ -5514,6 +5711,9 @@
             </a:r>
             <a:r>
               <a:rPr sz="2200" spc="-5" dirty="0">
+                <a:highlight>
+                  <a:srgbClr val="FFFF00"/>
+                </a:highlight>
                 <a:latin typeface="Calibri"/>
                 <a:cs typeface="Calibri"/>
               </a:rPr>
@@ -5521,6 +5721,9 @@
             </a:r>
             <a:r>
               <a:rPr sz="2200" spc="-20" dirty="0">
+                <a:highlight>
+                  <a:srgbClr val="FFFF00"/>
+                </a:highlight>
                 <a:latin typeface="Calibri"/>
                 <a:cs typeface="Calibri"/>
               </a:rPr>
@@ -5528,6 +5731,9 @@
             </a:r>
             <a:r>
               <a:rPr sz="2200" spc="-10" dirty="0">
+                <a:highlight>
+                  <a:srgbClr val="FFFF00"/>
+                </a:highlight>
                 <a:latin typeface="Calibri"/>
                 <a:cs typeface="Calibri"/>
               </a:rPr>
@@ -5535,6 +5741,9 @@
             </a:r>
             <a:r>
               <a:rPr sz="2200" spc="-484" dirty="0">
+                <a:highlight>
+                  <a:srgbClr val="FFFF00"/>
+                </a:highlight>
                 <a:latin typeface="Calibri"/>
                 <a:cs typeface="Calibri"/>
               </a:rPr>
@@ -5542,6 +5751,9 @@
             </a:r>
             <a:r>
               <a:rPr sz="2200" spc="-5" dirty="0">
+                <a:highlight>
+                  <a:srgbClr val="FFFF00"/>
+                </a:highlight>
                 <a:latin typeface="Calibri"/>
                 <a:cs typeface="Calibri"/>
               </a:rPr>
@@ -5549,6 +5761,9 @@
             </a:r>
             <a:r>
               <a:rPr sz="2200" spc="-15" dirty="0">
+                <a:highlight>
+                  <a:srgbClr val="FFFF00"/>
+                </a:highlight>
                 <a:latin typeface="Calibri"/>
                 <a:cs typeface="Calibri"/>
               </a:rPr>
@@ -5556,6 +5771,9 @@
             </a:r>
             <a:r>
               <a:rPr sz="2200" spc="-20" dirty="0">
+                <a:highlight>
+                  <a:srgbClr val="FFFF00"/>
+                </a:highlight>
                 <a:latin typeface="Calibri"/>
                 <a:cs typeface="Calibri"/>
               </a:rPr>
@@ -5563,6 +5781,9 @@
             </a:r>
             <a:r>
               <a:rPr sz="2200" dirty="0">
+                <a:highlight>
+                  <a:srgbClr val="FFFF00"/>
+                </a:highlight>
                 <a:latin typeface="Calibri"/>
                 <a:cs typeface="Calibri"/>
               </a:rPr>
@@ -5570,6 +5791,9 @@
             </a:r>
             <a:r>
               <a:rPr sz="2200" spc="-20" dirty="0">
+                <a:highlight>
+                  <a:srgbClr val="FFFF00"/>
+                </a:highlight>
                 <a:latin typeface="Calibri"/>
                 <a:cs typeface="Calibri"/>
               </a:rPr>
@@ -5577,6 +5801,9 @@
             </a:r>
             <a:r>
               <a:rPr sz="2200" spc="-5" dirty="0">
+                <a:highlight>
+                  <a:srgbClr val="FFFF00"/>
+                </a:highlight>
                 <a:latin typeface="Calibri"/>
                 <a:cs typeface="Calibri"/>
               </a:rPr>
@@ -5584,6 +5811,9 @@
             </a:r>
             <a:r>
               <a:rPr sz="2200" spc="-10" dirty="0">
+                <a:highlight>
+                  <a:srgbClr val="FFFF00"/>
+                </a:highlight>
                 <a:latin typeface="Calibri"/>
                 <a:cs typeface="Calibri"/>
               </a:rPr>
@@ -5591,6 +5821,9 @@
             </a:r>
             <a:r>
               <a:rPr sz="2200" spc="-5" dirty="0">
+                <a:highlight>
+                  <a:srgbClr val="FFFF00"/>
+                </a:highlight>
                 <a:latin typeface="Calibri"/>
                 <a:cs typeface="Calibri"/>
               </a:rPr>
@@ -5598,6 +5831,9 @@
             </a:r>
             <a:r>
               <a:rPr sz="2200" spc="-15" dirty="0">
+                <a:highlight>
+                  <a:srgbClr val="FFFF00"/>
+                </a:highlight>
                 <a:latin typeface="Calibri"/>
                 <a:cs typeface="Calibri"/>
               </a:rPr>
@@ -5605,6 +5841,9 @@
             </a:r>
             <a:r>
               <a:rPr sz="2200" spc="-10" dirty="0">
+                <a:highlight>
+                  <a:srgbClr val="FFFF00"/>
+                </a:highlight>
                 <a:latin typeface="Calibri"/>
                 <a:cs typeface="Calibri"/>
               </a:rPr>
@@ -5612,12 +5851,18 @@
             </a:r>
             <a:r>
               <a:rPr sz="2200" spc="-25" dirty="0">
+                <a:highlight>
+                  <a:srgbClr val="FFFF00"/>
+                </a:highlight>
                 <a:latin typeface="Calibri"/>
                 <a:cs typeface="Calibri"/>
               </a:rPr>
               <a:t>itself.</a:t>
             </a:r>
-            <a:endParaRPr sz="2200">
+            <a:endParaRPr sz="2200" dirty="0">
+              <a:highlight>
+                <a:srgbClr val="FFFF00"/>
+              </a:highlight>
               <a:latin typeface="Calibri"/>
               <a:cs typeface="Calibri"/>
             </a:endParaRPr>
@@ -5954,7 +6199,7 @@
               </a:rPr>
               <a:t>file.</a:t>
             </a:r>
-            <a:endParaRPr sz="1900">
+            <a:endParaRPr sz="1900" dirty="0">
               <a:latin typeface="Calibri"/>
               <a:cs typeface="Calibri"/>
             </a:endParaRPr>
@@ -5967,7 +6212,7 @@
               <a:buFont typeface="Arial MT"/>
               <a:buChar char="•"/>
             </a:pPr>
-            <a:endParaRPr sz="1900">
+            <a:endParaRPr sz="1900" dirty="0">
               <a:latin typeface="Calibri"/>
               <a:cs typeface="Calibri"/>
             </a:endParaRPr>
@@ -6162,7 +6407,7 @@
               </a:rPr>
               <a:t>DBMS.</a:t>
             </a:r>
-            <a:endParaRPr sz="1900">
+            <a:endParaRPr sz="1900" dirty="0">
               <a:latin typeface="Calibri"/>
               <a:cs typeface="Calibri"/>
             </a:endParaRPr>
@@ -6175,7 +6420,7 @@
               <a:buFont typeface="Arial MT"/>
               <a:buChar char="•"/>
             </a:pPr>
-            <a:endParaRPr sz="1900">
+            <a:endParaRPr sz="1900" dirty="0">
               <a:latin typeface="Calibri"/>
               <a:cs typeface="Calibri"/>
             </a:endParaRPr>
@@ -6197,6 +6442,9 @@
             </a:pPr>
             <a:r>
               <a:rPr sz="1900" spc="-5" dirty="0">
+                <a:highlight>
+                  <a:srgbClr val="FFFF00"/>
+                </a:highlight>
                 <a:latin typeface="Calibri"/>
                 <a:cs typeface="Calibri"/>
               </a:rPr>
@@ -6204,6 +6452,9 @@
             </a:r>
             <a:r>
               <a:rPr sz="1900" spc="-10" dirty="0">
+                <a:highlight>
+                  <a:srgbClr val="FFFF00"/>
+                </a:highlight>
                 <a:latin typeface="Calibri"/>
                 <a:cs typeface="Calibri"/>
               </a:rPr>
@@ -6211,6 +6462,9 @@
             </a:r>
             <a:r>
               <a:rPr sz="1900" spc="-5" dirty="0">
+                <a:highlight>
+                  <a:srgbClr val="FFFF00"/>
+                </a:highlight>
                 <a:latin typeface="Calibri"/>
                 <a:cs typeface="Calibri"/>
               </a:rPr>
@@ -6218,6 +6472,9 @@
             </a:r>
             <a:r>
               <a:rPr sz="1900" spc="5" dirty="0">
+                <a:highlight>
+                  <a:srgbClr val="FFFF00"/>
+                </a:highlight>
                 <a:latin typeface="Calibri"/>
                 <a:cs typeface="Calibri"/>
               </a:rPr>
@@ -6225,6 +6482,9 @@
             </a:r>
             <a:r>
               <a:rPr sz="1900" spc="-5" dirty="0">
+                <a:highlight>
+                  <a:srgbClr val="FFFF00"/>
+                </a:highlight>
                 <a:latin typeface="Calibri"/>
                 <a:cs typeface="Calibri"/>
               </a:rPr>
@@ -6232,6 +6492,9 @@
             </a:r>
             <a:r>
               <a:rPr sz="1900" spc="-10" dirty="0">
+                <a:highlight>
+                  <a:srgbClr val="FFFF00"/>
+                </a:highlight>
                 <a:latin typeface="Calibri"/>
                 <a:cs typeface="Calibri"/>
               </a:rPr>
@@ -6239,6 +6502,9 @@
             </a:r>
             <a:r>
               <a:rPr sz="1900" spc="25" dirty="0">
+                <a:highlight>
+                  <a:srgbClr val="FFFF00"/>
+                </a:highlight>
                 <a:latin typeface="Calibri"/>
                 <a:cs typeface="Calibri"/>
               </a:rPr>
@@ -6246,6 +6512,9 @@
             </a:r>
             <a:r>
               <a:rPr sz="1900" spc="-10" dirty="0">
+                <a:highlight>
+                  <a:srgbClr val="FFFF00"/>
+                </a:highlight>
                 <a:latin typeface="Calibri"/>
                 <a:cs typeface="Calibri"/>
               </a:rPr>
@@ -6253,6 +6522,9 @@
             </a:r>
             <a:r>
               <a:rPr sz="1900" spc="10" dirty="0">
+                <a:highlight>
+                  <a:srgbClr val="FFFF00"/>
+                </a:highlight>
                 <a:latin typeface="Calibri"/>
                 <a:cs typeface="Calibri"/>
               </a:rPr>
@@ -6260,6 +6532,9 @@
             </a:r>
             <a:r>
               <a:rPr sz="1900" spc="-5" dirty="0">
+                <a:highlight>
+                  <a:srgbClr val="FFFF00"/>
+                </a:highlight>
                 <a:latin typeface="Calibri"/>
                 <a:cs typeface="Calibri"/>
               </a:rPr>
@@ -6267,6 +6542,9 @@
             </a:r>
             <a:r>
               <a:rPr sz="1900" spc="-10" dirty="0">
+                <a:highlight>
+                  <a:srgbClr val="FFFF00"/>
+                </a:highlight>
                 <a:latin typeface="Calibri"/>
                 <a:cs typeface="Calibri"/>
               </a:rPr>
@@ -6274,6 +6552,9 @@
             </a:r>
             <a:r>
               <a:rPr sz="1900" spc="-15" dirty="0">
+                <a:highlight>
+                  <a:srgbClr val="FFFF00"/>
+                </a:highlight>
                 <a:latin typeface="Calibri"/>
                 <a:cs typeface="Calibri"/>
               </a:rPr>
@@ -6281,6 +6562,9 @@
             </a:r>
             <a:r>
               <a:rPr sz="1900" spc="15" dirty="0">
+                <a:highlight>
+                  <a:srgbClr val="FFFF00"/>
+                </a:highlight>
                 <a:latin typeface="Calibri"/>
                 <a:cs typeface="Calibri"/>
               </a:rPr>
@@ -6288,6 +6572,9 @@
             </a:r>
             <a:r>
               <a:rPr sz="1900" spc="-10" dirty="0">
+                <a:highlight>
+                  <a:srgbClr val="FFFF00"/>
+                </a:highlight>
                 <a:latin typeface="Calibri"/>
                 <a:cs typeface="Calibri"/>
               </a:rPr>
@@ -6295,6 +6582,9 @@
             </a:r>
             <a:r>
               <a:rPr sz="1900" spc="-415" dirty="0">
+                <a:highlight>
+                  <a:srgbClr val="FFFF00"/>
+                </a:highlight>
                 <a:latin typeface="Calibri"/>
                 <a:cs typeface="Calibri"/>
               </a:rPr>
@@ -6302,6 +6592,9 @@
             </a:r>
             <a:r>
               <a:rPr sz="1900" spc="-10" dirty="0">
+                <a:highlight>
+                  <a:srgbClr val="FFFF00"/>
+                </a:highlight>
                 <a:latin typeface="Calibri"/>
                 <a:cs typeface="Calibri"/>
               </a:rPr>
@@ -6309,6 +6602,9 @@
             </a:r>
             <a:r>
               <a:rPr sz="1900" dirty="0">
+                <a:highlight>
+                  <a:srgbClr val="FFFF00"/>
+                </a:highlight>
                 <a:latin typeface="Calibri"/>
                 <a:cs typeface="Calibri"/>
               </a:rPr>
@@ -6316,6 +6612,9 @@
             </a:r>
             <a:r>
               <a:rPr sz="1900" spc="-10" dirty="0">
+                <a:highlight>
+                  <a:srgbClr val="FFFF00"/>
+                </a:highlight>
                 <a:latin typeface="Calibri"/>
                 <a:cs typeface="Calibri"/>
               </a:rPr>
@@ -6323,6 +6622,9 @@
             </a:r>
             <a:r>
               <a:rPr sz="1900" spc="-5" dirty="0">
+                <a:highlight>
+                  <a:srgbClr val="FFFF00"/>
+                </a:highlight>
                 <a:latin typeface="Calibri"/>
                 <a:cs typeface="Calibri"/>
               </a:rPr>
@@ -6330,6 +6632,9 @@
             </a:r>
             <a:r>
               <a:rPr sz="1900" spc="-15" dirty="0">
+                <a:highlight>
+                  <a:srgbClr val="FFFF00"/>
+                </a:highlight>
                 <a:latin typeface="Calibri"/>
                 <a:cs typeface="Calibri"/>
               </a:rPr>
@@ -6337,6 +6642,9 @@
             </a:r>
             <a:r>
               <a:rPr sz="1900" dirty="0">
+                <a:highlight>
+                  <a:srgbClr val="FFFF00"/>
+                </a:highlight>
                 <a:latin typeface="Calibri"/>
                 <a:cs typeface="Calibri"/>
               </a:rPr>
@@ -6344,6 +6652,9 @@
             </a:r>
             <a:r>
               <a:rPr sz="1900" spc="-5" dirty="0">
+                <a:highlight>
+                  <a:srgbClr val="FFFF00"/>
+                </a:highlight>
                 <a:latin typeface="Calibri"/>
                 <a:cs typeface="Calibri"/>
               </a:rPr>
@@ -6351,6 +6662,9 @@
             </a:r>
             <a:r>
               <a:rPr sz="1900" dirty="0">
+                <a:highlight>
+                  <a:srgbClr val="FFFF00"/>
+                </a:highlight>
                 <a:latin typeface="Calibri"/>
                 <a:cs typeface="Calibri"/>
               </a:rPr>
@@ -6358,6 +6672,9 @@
             </a:r>
             <a:r>
               <a:rPr sz="1900" spc="-5" dirty="0">
+                <a:highlight>
+                  <a:srgbClr val="FFFF00"/>
+                </a:highlight>
                 <a:latin typeface="Calibri"/>
                 <a:cs typeface="Calibri"/>
               </a:rPr>
@@ -6365,6 +6682,9 @@
             </a:r>
             <a:r>
               <a:rPr sz="1900" spc="-15" dirty="0">
+                <a:highlight>
+                  <a:srgbClr val="FFFF00"/>
+                </a:highlight>
                 <a:latin typeface="Calibri"/>
                 <a:cs typeface="Calibri"/>
               </a:rPr>
@@ -6372,6 +6692,9 @@
             </a:r>
             <a:r>
               <a:rPr sz="1900" spc="-5" dirty="0">
+                <a:highlight>
+                  <a:srgbClr val="FFFF00"/>
+                </a:highlight>
                 <a:latin typeface="Calibri"/>
                 <a:cs typeface="Calibri"/>
               </a:rPr>
@@ -6379,6 +6702,9 @@
             </a:r>
             <a:r>
               <a:rPr sz="1900" spc="-10" dirty="0">
+                <a:highlight>
+                  <a:srgbClr val="FFFF00"/>
+                </a:highlight>
                 <a:latin typeface="Calibri"/>
                 <a:cs typeface="Calibri"/>
               </a:rPr>
@@ -6386,6 +6712,9 @@
             </a:r>
             <a:r>
               <a:rPr sz="1900" spc="-5" dirty="0">
+                <a:highlight>
+                  <a:srgbClr val="FFFF00"/>
+                </a:highlight>
                 <a:latin typeface="Calibri"/>
                 <a:cs typeface="Calibri"/>
               </a:rPr>
@@ -6393,6 +6722,9 @@
             </a:r>
             <a:r>
               <a:rPr sz="1900" spc="-10" dirty="0">
+                <a:highlight>
+                  <a:srgbClr val="FFFF00"/>
+                </a:highlight>
                 <a:latin typeface="Calibri"/>
                 <a:cs typeface="Calibri"/>
               </a:rPr>
@@ -6400,6 +6732,9 @@
             </a:r>
             <a:r>
               <a:rPr sz="1900" spc="-5" dirty="0">
+                <a:highlight>
+                  <a:srgbClr val="FFFF00"/>
+                </a:highlight>
                 <a:latin typeface="Calibri"/>
                 <a:cs typeface="Calibri"/>
               </a:rPr>
@@ -6407,6 +6742,9 @@
             </a:r>
             <a:r>
               <a:rPr sz="1900" spc="10" dirty="0">
+                <a:highlight>
+                  <a:srgbClr val="FFFF00"/>
+                </a:highlight>
                 <a:latin typeface="Calibri"/>
                 <a:cs typeface="Calibri"/>
               </a:rPr>
@@ -6414,6 +6752,9 @@
             </a:r>
             <a:r>
               <a:rPr sz="1900" spc="-5" dirty="0">
+                <a:highlight>
+                  <a:srgbClr val="FFFF00"/>
+                </a:highlight>
                 <a:latin typeface="Calibri"/>
                 <a:cs typeface="Calibri"/>
               </a:rPr>
@@ -6421,6 +6762,9 @@
             </a:r>
             <a:r>
               <a:rPr sz="1900" spc="20" dirty="0">
+                <a:highlight>
+                  <a:srgbClr val="FFFF00"/>
+                </a:highlight>
                 <a:latin typeface="Calibri"/>
                 <a:cs typeface="Calibri"/>
               </a:rPr>
@@ -6428,6 +6772,9 @@
             </a:r>
             <a:r>
               <a:rPr sz="1900" spc="-15" dirty="0">
+                <a:highlight>
+                  <a:srgbClr val="FFFF00"/>
+                </a:highlight>
                 <a:latin typeface="Calibri"/>
                 <a:cs typeface="Calibri"/>
               </a:rPr>
@@ -6435,6 +6782,9 @@
             </a:r>
             <a:r>
               <a:rPr sz="1900" dirty="0">
+                <a:highlight>
+                  <a:srgbClr val="FFFF00"/>
+                </a:highlight>
                 <a:latin typeface="Calibri"/>
                 <a:cs typeface="Calibri"/>
               </a:rPr>
@@ -6442,6 +6792,9 @@
             </a:r>
             <a:r>
               <a:rPr sz="1900" spc="-10" dirty="0">
+                <a:highlight>
+                  <a:srgbClr val="FFFF00"/>
+                </a:highlight>
                 <a:latin typeface="Calibri"/>
                 <a:cs typeface="Calibri"/>
               </a:rPr>
@@ -6449,6 +6802,9 @@
             </a:r>
             <a:r>
               <a:rPr sz="1900" spc="5" dirty="0">
+                <a:highlight>
+                  <a:srgbClr val="FFFF00"/>
+                </a:highlight>
                 <a:latin typeface="Calibri"/>
                 <a:cs typeface="Calibri"/>
               </a:rPr>
@@ -6456,6 +6812,9 @@
             </a:r>
             <a:r>
               <a:rPr sz="1900" spc="-15" dirty="0">
+                <a:highlight>
+                  <a:srgbClr val="FFFF00"/>
+                </a:highlight>
                 <a:latin typeface="Calibri"/>
                 <a:cs typeface="Calibri"/>
               </a:rPr>
@@ -6463,6 +6822,9 @@
             </a:r>
             <a:r>
               <a:rPr sz="1900" spc="10" dirty="0">
+                <a:highlight>
+                  <a:srgbClr val="FFFF00"/>
+                </a:highlight>
                 <a:latin typeface="Calibri"/>
                 <a:cs typeface="Calibri"/>
               </a:rPr>
@@ -6470,6 +6832,9 @@
             </a:r>
             <a:r>
               <a:rPr sz="1900" spc="-5" dirty="0">
+                <a:highlight>
+                  <a:srgbClr val="FFFF00"/>
+                </a:highlight>
                 <a:latin typeface="Calibri"/>
                 <a:cs typeface="Calibri"/>
               </a:rPr>
@@ -6477,6 +6842,9 @@
             </a:r>
             <a:r>
               <a:rPr sz="1900" spc="5" dirty="0">
+                <a:highlight>
+                  <a:srgbClr val="FFFF00"/>
+                </a:highlight>
                 <a:latin typeface="Calibri"/>
                 <a:cs typeface="Calibri"/>
               </a:rPr>
@@ -6484,6 +6852,9 @@
             </a:r>
             <a:r>
               <a:rPr sz="1900" spc="-15" dirty="0">
+                <a:highlight>
+                  <a:srgbClr val="FFFF00"/>
+                </a:highlight>
                 <a:latin typeface="Calibri"/>
                 <a:cs typeface="Calibri"/>
               </a:rPr>
@@ -6491,6 +6862,9 @@
             </a:r>
             <a:r>
               <a:rPr sz="1900" spc="-10" dirty="0">
+                <a:highlight>
+                  <a:srgbClr val="FFFF00"/>
+                </a:highlight>
                 <a:latin typeface="Calibri"/>
                 <a:cs typeface="Calibri"/>
               </a:rPr>
@@ -6498,6 +6872,9 @@
             </a:r>
             <a:r>
               <a:rPr sz="1900" spc="-5" dirty="0">
+                <a:highlight>
+                  <a:srgbClr val="FFFF00"/>
+                </a:highlight>
                 <a:latin typeface="Calibri"/>
                 <a:cs typeface="Calibri"/>
               </a:rPr>
@@ -6505,6 +6882,9 @@
             </a:r>
             <a:r>
               <a:rPr sz="1900" spc="-10" dirty="0">
+                <a:highlight>
+                  <a:srgbClr val="FFFF00"/>
+                </a:highlight>
                 <a:latin typeface="Calibri"/>
                 <a:cs typeface="Calibri"/>
               </a:rPr>
@@ -6512,6 +6892,9 @@
             </a:r>
             <a:r>
               <a:rPr sz="1900" spc="-5" dirty="0">
+                <a:highlight>
+                  <a:srgbClr val="FFFF00"/>
+                </a:highlight>
                 <a:latin typeface="Calibri"/>
                 <a:cs typeface="Calibri"/>
               </a:rPr>
@@ -6519,6 +6902,9 @@
             </a:r>
             <a:r>
               <a:rPr sz="1900" spc="-10" dirty="0">
+                <a:highlight>
+                  <a:srgbClr val="FFFF00"/>
+                </a:highlight>
                 <a:latin typeface="Calibri"/>
                 <a:cs typeface="Calibri"/>
               </a:rPr>
@@ -6526,6 +6912,9 @@
             </a:r>
             <a:r>
               <a:rPr sz="1900" spc="-5" dirty="0">
+                <a:highlight>
+                  <a:srgbClr val="FFFF00"/>
+                </a:highlight>
                 <a:latin typeface="Calibri"/>
                 <a:cs typeface="Calibri"/>
               </a:rPr>
@@ -6533,6 +6922,9 @@
             </a:r>
             <a:r>
               <a:rPr sz="1900" spc="10" dirty="0">
+                <a:highlight>
+                  <a:srgbClr val="FFFF00"/>
+                </a:highlight>
                 <a:latin typeface="Calibri"/>
                 <a:cs typeface="Calibri"/>
               </a:rPr>
@@ -6540,6 +6932,9 @@
             </a:r>
             <a:r>
               <a:rPr sz="1900" spc="-5" dirty="0">
+                <a:highlight>
+                  <a:srgbClr val="FFFF00"/>
+                </a:highlight>
                 <a:latin typeface="Calibri"/>
                 <a:cs typeface="Calibri"/>
               </a:rPr>
@@ -6547,12 +6942,18 @@
             </a:r>
             <a:r>
               <a:rPr sz="1900" spc="-15" dirty="0">
+                <a:highlight>
+                  <a:srgbClr val="FFFF00"/>
+                </a:highlight>
                 <a:latin typeface="Calibri"/>
                 <a:cs typeface="Calibri"/>
               </a:rPr>
               <a:t>fetched.</a:t>
             </a:r>
-            <a:endParaRPr sz="1900">
+            <a:endParaRPr sz="1900" dirty="0">
+              <a:highlight>
+                <a:srgbClr val="FFFF00"/>
+              </a:highlight>
               <a:latin typeface="Calibri"/>
               <a:cs typeface="Calibri"/>
             </a:endParaRPr>
@@ -6565,7 +6966,7 @@
               <a:buFont typeface="Arial MT"/>
               <a:buChar char="•"/>
             </a:pPr>
-            <a:endParaRPr sz="1900">
+            <a:endParaRPr sz="1900" dirty="0">
               <a:latin typeface="Calibri"/>
               <a:cs typeface="Calibri"/>
             </a:endParaRPr>
@@ -6732,7 +7133,7 @@
               </a:rPr>
               <a:t>values.</a:t>
             </a:r>
-            <a:endParaRPr sz="1900">
+            <a:endParaRPr sz="1900" dirty="0">
               <a:latin typeface="Calibri"/>
               <a:cs typeface="Calibri"/>
             </a:endParaRPr>
@@ -6745,7 +7146,7 @@
               <a:buFont typeface="Arial MT"/>
               <a:buChar char="•"/>
             </a:pPr>
-            <a:endParaRPr sz="1900">
+            <a:endParaRPr sz="1900" dirty="0">
               <a:latin typeface="Calibri"/>
               <a:cs typeface="Calibri"/>
             </a:endParaRPr>
@@ -6767,6 +7168,9 @@
             </a:pPr>
             <a:r>
               <a:rPr sz="1900" spc="-5" dirty="0">
+                <a:highlight>
+                  <a:srgbClr val="FFFF00"/>
+                </a:highlight>
                 <a:latin typeface="Calibri"/>
                 <a:cs typeface="Calibri"/>
               </a:rPr>
@@ -6774,6 +7178,9 @@
             </a:r>
             <a:r>
               <a:rPr sz="1900" spc="-10" dirty="0">
+                <a:highlight>
+                  <a:srgbClr val="FFFF00"/>
+                </a:highlight>
                 <a:latin typeface="Calibri"/>
                 <a:cs typeface="Calibri"/>
               </a:rPr>
@@ -6781,6 +7188,9 @@
             </a:r>
             <a:r>
               <a:rPr sz="1900" spc="-5" dirty="0">
+                <a:highlight>
+                  <a:srgbClr val="FFFF00"/>
+                </a:highlight>
                 <a:latin typeface="Calibri"/>
                 <a:cs typeface="Calibri"/>
               </a:rPr>
@@ -6788,6 +7198,9 @@
             </a:r>
             <a:r>
               <a:rPr sz="1900" spc="10" dirty="0">
+                <a:highlight>
+                  <a:srgbClr val="FFFF00"/>
+                </a:highlight>
                 <a:latin typeface="Calibri"/>
                 <a:cs typeface="Calibri"/>
               </a:rPr>
@@ -6795,6 +7208,9 @@
             </a:r>
             <a:r>
               <a:rPr sz="1900" spc="-5" dirty="0">
+                <a:highlight>
+                  <a:srgbClr val="FFFF00"/>
+                </a:highlight>
                 <a:latin typeface="Calibri"/>
                 <a:cs typeface="Calibri"/>
               </a:rPr>
@@ -6802,6 +7218,9 @@
             </a:r>
             <a:r>
               <a:rPr sz="1900" spc="5" dirty="0">
+                <a:highlight>
+                  <a:srgbClr val="FFFF00"/>
+                </a:highlight>
                 <a:latin typeface="Calibri"/>
                 <a:cs typeface="Calibri"/>
               </a:rPr>
@@ -6809,6 +7228,9 @@
             </a:r>
             <a:r>
               <a:rPr sz="1900" spc="-10" dirty="0">
+                <a:highlight>
+                  <a:srgbClr val="FFFF00"/>
+                </a:highlight>
                 <a:latin typeface="Calibri"/>
                 <a:cs typeface="Calibri"/>
               </a:rPr>
@@ -6816,6 +7238,9 @@
             </a:r>
             <a:r>
               <a:rPr sz="1900" spc="20" dirty="0">
+                <a:highlight>
+                  <a:srgbClr val="FFFF00"/>
+                </a:highlight>
                 <a:latin typeface="Calibri"/>
                 <a:cs typeface="Calibri"/>
               </a:rPr>
@@ -6823,6 +7248,9 @@
             </a:r>
             <a:r>
               <a:rPr sz="1900" spc="-10" dirty="0">
+                <a:highlight>
+                  <a:srgbClr val="FFFF00"/>
+                </a:highlight>
                 <a:latin typeface="Calibri"/>
                 <a:cs typeface="Calibri"/>
               </a:rPr>
@@ -6830,6 +7258,9 @@
             </a:r>
             <a:r>
               <a:rPr sz="1900" spc="-415" dirty="0">
+                <a:highlight>
+                  <a:srgbClr val="FFFF00"/>
+                </a:highlight>
                 <a:latin typeface="Calibri"/>
                 <a:cs typeface="Calibri"/>
               </a:rPr>
@@ -6837,6 +7268,9 @@
             </a:r>
             <a:r>
               <a:rPr sz="1900" spc="-20" dirty="0">
+                <a:highlight>
+                  <a:srgbClr val="FFFF00"/>
+                </a:highlight>
                 <a:latin typeface="Calibri"/>
                 <a:cs typeface="Calibri"/>
               </a:rPr>
@@ -6844,6 +7278,9 @@
             </a:r>
             <a:r>
               <a:rPr sz="1900" spc="-5" dirty="0">
+                <a:highlight>
+                  <a:srgbClr val="FFFF00"/>
+                </a:highlight>
                 <a:latin typeface="Calibri"/>
                 <a:cs typeface="Calibri"/>
               </a:rPr>
@@ -6851,6 +7288,9 @@
             </a:r>
             <a:r>
               <a:rPr sz="1900" spc="5" dirty="0">
+                <a:highlight>
+                  <a:srgbClr val="FFFF00"/>
+                </a:highlight>
                 <a:latin typeface="Calibri"/>
                 <a:cs typeface="Calibri"/>
               </a:rPr>
@@ -6858,6 +7298,9 @@
             </a:r>
             <a:r>
               <a:rPr sz="1900" spc="-5" dirty="0">
+                <a:highlight>
+                  <a:srgbClr val="FFFF00"/>
+                </a:highlight>
                 <a:latin typeface="Calibri"/>
                 <a:cs typeface="Calibri"/>
               </a:rPr>
@@ -6865,6 +7308,9 @@
             </a:r>
             <a:r>
               <a:rPr sz="1900" spc="15" dirty="0">
+                <a:highlight>
+                  <a:srgbClr val="FFFF00"/>
+                </a:highlight>
                 <a:latin typeface="Calibri"/>
                 <a:cs typeface="Calibri"/>
               </a:rPr>
@@ -6872,6 +7318,9 @@
             </a:r>
             <a:r>
               <a:rPr sz="1900" spc="-10" dirty="0">
+                <a:highlight>
+                  <a:srgbClr val="FFFF00"/>
+                </a:highlight>
                 <a:latin typeface="Calibri"/>
                 <a:cs typeface="Calibri"/>
               </a:rPr>
@@ -6879,6 +7328,9 @@
             </a:r>
             <a:r>
               <a:rPr sz="1900" spc="10" dirty="0">
+                <a:highlight>
+                  <a:srgbClr val="FFFF00"/>
+                </a:highlight>
                 <a:latin typeface="Calibri"/>
                 <a:cs typeface="Calibri"/>
               </a:rPr>
@@ -6886,6 +7338,9 @@
             </a:r>
             <a:r>
               <a:rPr sz="1900" spc="-10" dirty="0">
+                <a:highlight>
+                  <a:srgbClr val="FFFF00"/>
+                </a:highlight>
                 <a:latin typeface="Calibri"/>
                 <a:cs typeface="Calibri"/>
               </a:rPr>
@@ -6893,6 +7348,9 @@
             </a:r>
             <a:r>
               <a:rPr sz="1900" spc="-5" dirty="0">
+                <a:highlight>
+                  <a:srgbClr val="FFFF00"/>
+                </a:highlight>
                 <a:latin typeface="Calibri"/>
                 <a:cs typeface="Calibri"/>
               </a:rPr>
@@ -6900,6 +7358,9 @@
             </a:r>
             <a:r>
               <a:rPr sz="1900" dirty="0">
+                <a:highlight>
+                  <a:srgbClr val="FFFF00"/>
+                </a:highlight>
                 <a:latin typeface="Calibri"/>
                 <a:cs typeface="Calibri"/>
               </a:rPr>
@@ -6907,6 +7368,9 @@
             </a:r>
             <a:r>
               <a:rPr sz="1900" spc="-10" dirty="0">
+                <a:highlight>
+                  <a:srgbClr val="FFFF00"/>
+                </a:highlight>
                 <a:latin typeface="Calibri"/>
                 <a:cs typeface="Calibri"/>
               </a:rPr>
@@ -6914,6 +7378,9 @@
             </a:r>
             <a:r>
               <a:rPr sz="1900" spc="-5" dirty="0">
+                <a:highlight>
+                  <a:srgbClr val="FFFF00"/>
+                </a:highlight>
                 <a:latin typeface="Calibri"/>
                 <a:cs typeface="Calibri"/>
               </a:rPr>
@@ -6921,6 +7388,9 @@
             </a:r>
             <a:r>
               <a:rPr sz="1900" dirty="0">
+                <a:highlight>
+                  <a:srgbClr val="FFFF00"/>
+                </a:highlight>
                 <a:latin typeface="Calibri"/>
                 <a:cs typeface="Calibri"/>
               </a:rPr>
@@ -6928,6 +7398,9 @@
             </a:r>
             <a:r>
               <a:rPr sz="1900" spc="-10" dirty="0">
+                <a:highlight>
+                  <a:srgbClr val="FFFF00"/>
+                </a:highlight>
                 <a:latin typeface="Calibri"/>
                 <a:cs typeface="Calibri"/>
               </a:rPr>
@@ -6935,6 +7408,9 @@
             </a:r>
             <a:r>
               <a:rPr sz="1900" spc="-5" dirty="0">
+                <a:highlight>
+                  <a:srgbClr val="FFFF00"/>
+                </a:highlight>
                 <a:latin typeface="Calibri"/>
                 <a:cs typeface="Calibri"/>
               </a:rPr>
@@ -6942,6 +7418,9 @@
             </a:r>
             <a:r>
               <a:rPr sz="1900" spc="-10" dirty="0">
+                <a:highlight>
+                  <a:srgbClr val="FFFF00"/>
+                </a:highlight>
                 <a:latin typeface="Calibri"/>
                 <a:cs typeface="Calibri"/>
               </a:rPr>
@@ -6949,6 +7428,9 @@
             </a:r>
             <a:r>
               <a:rPr sz="1900" dirty="0">
+                <a:highlight>
+                  <a:srgbClr val="FFFF00"/>
+                </a:highlight>
                 <a:latin typeface="Calibri"/>
                 <a:cs typeface="Calibri"/>
               </a:rPr>
@@ -6956,6 +7438,9 @@
             </a:r>
             <a:r>
               <a:rPr sz="1900" spc="-15" dirty="0">
+                <a:highlight>
+                  <a:srgbClr val="FFFF00"/>
+                </a:highlight>
                 <a:latin typeface="Calibri"/>
                 <a:cs typeface="Calibri"/>
               </a:rPr>
@@ -6963,6 +7448,9 @@
             </a:r>
             <a:r>
               <a:rPr sz="1900" spc="-5" dirty="0">
+                <a:highlight>
+                  <a:srgbClr val="FFFF00"/>
+                </a:highlight>
                 <a:latin typeface="Calibri"/>
                 <a:cs typeface="Calibri"/>
               </a:rPr>
@@ -6970,6 +7458,9 @@
             </a:r>
             <a:r>
               <a:rPr sz="1900" spc="15" dirty="0">
+                <a:highlight>
+                  <a:srgbClr val="FFFF00"/>
+                </a:highlight>
                 <a:latin typeface="Calibri"/>
                 <a:cs typeface="Calibri"/>
               </a:rPr>
@@ -6977,6 +7468,9 @@
             </a:r>
             <a:r>
               <a:rPr sz="1900" spc="-5" dirty="0">
+                <a:highlight>
+                  <a:srgbClr val="FFFF00"/>
+                </a:highlight>
                 <a:latin typeface="Calibri"/>
                 <a:cs typeface="Calibri"/>
               </a:rPr>
@@ -6984,6 +7478,9 @@
             </a:r>
             <a:r>
               <a:rPr sz="1900" spc="-10" dirty="0">
+                <a:highlight>
+                  <a:srgbClr val="FFFF00"/>
+                </a:highlight>
                 <a:latin typeface="Calibri"/>
                 <a:cs typeface="Calibri"/>
               </a:rPr>
@@ -6991,6 +7488,9 @@
             </a:r>
             <a:r>
               <a:rPr sz="1900" spc="5" dirty="0">
+                <a:highlight>
+                  <a:srgbClr val="FFFF00"/>
+                </a:highlight>
                 <a:latin typeface="Calibri"/>
                 <a:cs typeface="Calibri"/>
               </a:rPr>
@@ -6998,6 +7498,9 @@
             </a:r>
             <a:r>
               <a:rPr sz="1900" spc="-20" dirty="0">
+                <a:highlight>
+                  <a:srgbClr val="FFFF00"/>
+                </a:highlight>
                 <a:latin typeface="Calibri"/>
                 <a:cs typeface="Calibri"/>
               </a:rPr>
@@ -7005,6 +7508,9 @@
             </a:r>
             <a:r>
               <a:rPr sz="1900" spc="-10" dirty="0">
+                <a:highlight>
+                  <a:srgbClr val="FFFF00"/>
+                </a:highlight>
                 <a:latin typeface="Calibri"/>
                 <a:cs typeface="Calibri"/>
               </a:rPr>
@@ -7012,6 +7518,9 @@
             </a:r>
             <a:r>
               <a:rPr sz="1900" spc="-5" dirty="0">
+                <a:highlight>
+                  <a:srgbClr val="FFFF00"/>
+                </a:highlight>
                 <a:latin typeface="Calibri"/>
                 <a:cs typeface="Calibri"/>
               </a:rPr>
@@ -7019,12 +7528,18 @@
             </a:r>
             <a:r>
               <a:rPr sz="1900" spc="-15" dirty="0">
+                <a:highlight>
+                  <a:srgbClr val="FFFF00"/>
+                </a:highlight>
                 <a:latin typeface="Calibri"/>
                 <a:cs typeface="Calibri"/>
               </a:rPr>
               <a:t>records</a:t>
             </a:r>
-            <a:endParaRPr sz="1900">
+            <a:endParaRPr sz="1900" dirty="0">
+              <a:highlight>
+                <a:srgbClr val="FFFF00"/>
+              </a:highlight>
               <a:latin typeface="Calibri"/>
               <a:cs typeface="Calibri"/>
             </a:endParaRPr>
@@ -7252,14 +7767,38 @@
             <a:pPr lvl="1"/>
             <a:r>
               <a:rPr lang="en-US" dirty="0"/>
-              <a:t>The first field is of the same data type as the ordering key field—called the primary key—of the data file, </a:t>
+              <a:t>The </a:t>
+            </a:r>
+            <a:r>
+              <a:rPr lang="en-US" dirty="0">
+                <a:highlight>
+                  <a:srgbClr val="FFFF00"/>
+                </a:highlight>
+              </a:rPr>
+              <a:t>first field is of the same data type as the ordering key field</a:t>
+            </a:r>
+            <a:r>
+              <a:rPr lang="en-US" dirty="0"/>
+              <a:t>—called the primary key—of the data file, </a:t>
             </a:r>
           </a:p>
           <a:p>
             <a:pPr lvl="1"/>
             <a:r>
               <a:rPr lang="en-US" dirty="0"/>
-              <a:t>and the second field is a pointer to a disk block (a block address). </a:t>
+              <a:t>and </a:t>
+            </a:r>
+            <a:r>
+              <a:rPr lang="en-US" dirty="0">
+                <a:highlight>
+                  <a:srgbClr val="FFFF00"/>
+                </a:highlight>
+              </a:rPr>
+              <a:t>the second field is a pointer to a disk </a:t>
+            </a:r>
+            <a:r>
+              <a:rPr lang="en-US" dirty="0"/>
+              <a:t>block (a block address). </a:t>
             </a:r>
           </a:p>
           <a:p>
@@ -7270,40 +7809,80 @@
           </a:p>
           <a:p>
             <a:r>
+              <a:rPr lang="en-US" dirty="0">
+                <a:highlight>
+                  <a:srgbClr val="FFFF00"/>
+                </a:highlight>
+              </a:rPr>
+              <a:t>Each index entry has the value of the primary key field for the first record in a block and a pointer to that block as its two field values. </a:t>
+            </a:r>
+          </a:p>
+          <a:p>
+            <a:r>
               <a:rPr lang="en-US" dirty="0"/>
-              <a:t>Each index entry has the value of the primary key field for the first record in a block and a pointer to that block as its two field values. </a:t>
-            </a:r>
-          </a:p>
-          <a:p>
-            <a:r>
-              <a:rPr lang="en-US" dirty="0"/>
-              <a:t>We will refer to the two field values of index entry </a:t>
-            </a:r>
-            <a:r>
-              <a:rPr lang="en-US" dirty="0" err="1"/>
+              <a:t>We will refer to</a:t>
+            </a:r>
+            <a:r>
+              <a:rPr lang="en-US" dirty="0">
+                <a:highlight>
+                  <a:srgbClr val="FFFF00"/>
+                </a:highlight>
+              </a:rPr>
+              <a:t> the two field values of index entry </a:t>
+            </a:r>
+            <a:r>
+              <a:rPr lang="en-US" dirty="0" err="1">
+                <a:highlight>
+                  <a:srgbClr val="FFFF00"/>
+                </a:highlight>
+              </a:rPr>
               <a:t>i</a:t>
             </a:r>
             <a:r>
-              <a:rPr lang="en-US" dirty="0"/>
+              <a:rPr lang="en-US" dirty="0">
+                <a:highlight>
+                  <a:srgbClr val="FFFF00"/>
+                </a:highlight>
+              </a:rPr>
               <a:t> as &lt;K(</a:t>
             </a:r>
             <a:r>
-              <a:rPr lang="en-US" dirty="0" err="1"/>
+              <a:rPr lang="en-US" dirty="0" err="1">
+                <a:highlight>
+                  <a:srgbClr val="FFFF00"/>
+                </a:highlight>
+              </a:rPr>
               <a:t>i</a:t>
             </a:r>
             <a:r>
-              <a:rPr lang="en-US" dirty="0"/>
+              <a:rPr lang="en-US" dirty="0">
+                <a:highlight>
+                  <a:srgbClr val="FFFF00"/>
+                </a:highlight>
+              </a:rPr>
               <a:t>),P(</a:t>
             </a:r>
             <a:r>
-              <a:rPr lang="en-US" dirty="0" err="1"/>
+              <a:rPr lang="en-US" dirty="0" err="1">
+                <a:highlight>
+                  <a:srgbClr val="FFFF00"/>
+                </a:highlight>
+              </a:rPr>
               <a:t>i</a:t>
             </a:r>
             <a:r>
-              <a:rPr lang="en-US" dirty="0"/>
+              <a:rPr lang="en-US" dirty="0">
+                <a:highlight>
+                  <a:srgbClr val="FFFF00"/>
+                </a:highlight>
+              </a:rPr>
               <a:t>)&gt;</a:t>
             </a:r>
-            <a:endParaRPr lang="en-IN" dirty="0"/>
+            <a:endParaRPr lang="en-IN" dirty="0">
+              <a:highlight>
+                <a:srgbClr val="FFFF00"/>
+              </a:highlight>
+            </a:endParaRPr>
           </a:p>
         </p:txBody>
       </p:sp>
@@ -7598,7 +8177,15 @@
             <a:pPr fontAlgn="base"/>
             <a:r>
               <a:rPr lang="en-US" sz="2400" dirty="0"/>
-              <a:t>Sometimes the index is created on non-primary key columns which may not be unique for each record.</a:t>
+              <a:t>Sometimes </a:t>
+            </a:r>
+            <a:r>
+              <a:rPr lang="en-US" sz="2400" dirty="0">
+                <a:highlight>
+                  <a:srgbClr val="FFFF00"/>
+                </a:highlight>
+              </a:rPr>
+              <a:t>the index is created on non-primary key columns which may not be unique for each record.</a:t>
             </a:r>
           </a:p>
           <a:p>
@@ -7625,7 +8212,11 @@
           <a:p>
             <a:pPr fontAlgn="base"/>
             <a:r>
-              <a:rPr lang="en-US" sz="2400" dirty="0"/>
+              <a:rPr lang="en-US" sz="2400" dirty="0">
+                <a:highlight>
+                  <a:srgbClr val="FFFF00"/>
+                </a:highlight>
+              </a:rPr>
               <a:t>The records which have similar characteristics are grouped, and indexes are created for these group.</a:t>
             </a:r>
           </a:p>
@@ -7636,23 +8227,43 @@
           <a:p>
             <a:pPr fontAlgn="base"/>
             <a:r>
-              <a:rPr lang="en-US" sz="2400" dirty="0"/>
+              <a:rPr lang="en-US" sz="2400" dirty="0">
+                <a:highlight>
+                  <a:srgbClr val="FFFF00"/>
+                </a:highlight>
+              </a:rPr>
               <a:t>Ordered file with two fields</a:t>
             </a:r>
-            <a:endParaRPr lang="en-US" sz="1600" dirty="0"/>
+            <a:endParaRPr lang="en-US" sz="1600" dirty="0">
+              <a:highlight>
+                <a:srgbClr val="FFFF00"/>
+              </a:highlight>
+            </a:endParaRPr>
           </a:p>
           <a:p>
             <a:pPr lvl="1" fontAlgn="base"/>
             <a:r>
-              <a:rPr lang="en-US" dirty="0"/>
+              <a:rPr lang="en-US" dirty="0">
+                <a:highlight>
+                  <a:srgbClr val="FFFF00"/>
+                </a:highlight>
+              </a:rPr>
               <a:t>Same type as clustering field</a:t>
             </a:r>
-            <a:endParaRPr lang="en-US" sz="1200" dirty="0"/>
+            <a:endParaRPr lang="en-US" sz="1200" dirty="0">
+              <a:highlight>
+                <a:srgbClr val="FFFF00"/>
+              </a:highlight>
+            </a:endParaRPr>
           </a:p>
           <a:p>
             <a:pPr lvl="1" fontAlgn="base"/>
             <a:r>
-              <a:rPr lang="en-US" dirty="0"/>
+              <a:rPr lang="en-US" dirty="0">
+                <a:highlight>
+                  <a:srgbClr val="FFFF00"/>
+                </a:highlight>
+              </a:rPr>
               <a:t>Disk block pointer</a:t>
             </a:r>
           </a:p>
@@ -8338,6 +8949,57 @@
           </a:extLst>
         </p:spPr>
       </p:pic>
+      <mc:AlternateContent xmlns:mc="http://schemas.openxmlformats.org/markup-compatibility/2006">
+        <mc:Choice xmlns:p14="http://schemas.microsoft.com/office/powerpoint/2010/main" Requires="p14">
+          <p:contentPart p14:bwMode="auto" r:id="rId3">
+            <p14:nvContentPartPr>
+              <p14:cNvPr id="4" name="Ink 3">
+                <a:extLst>
+                  <a:ext uri="{FF2B5EF4-FFF2-40B4-BE49-F238E27FC236}">
+                    <a16:creationId xmlns:a16="http://schemas.microsoft.com/office/drawing/2014/main" id="{D918760F-022B-368C-28C1-1F36E3A9B444}"/>
+                  </a:ext>
+                </a:extLst>
+              </p14:cNvPr>
+              <p14:cNvContentPartPr/>
+              <p14:nvPr/>
+            </p14:nvContentPartPr>
+            <p14:xfrm>
+              <a:off x="1018741" y="2036415"/>
+              <a:ext cx="6749640" cy="493560"/>
+            </p14:xfrm>
+          </p:contentPart>
+        </mc:Choice>
+        <mc:Fallback>
+          <p:pic>
+            <p:nvPicPr>
+              <p:cNvPr id="4" name="Ink 3">
+                <a:extLst>
+                  <a:ext uri="{FF2B5EF4-FFF2-40B4-BE49-F238E27FC236}">
+                    <a16:creationId xmlns:a16="http://schemas.microsoft.com/office/drawing/2014/main" id="{D918760F-022B-368C-28C1-1F36E3A9B444}"/>
+                  </a:ext>
+                </a:extLst>
+              </p:cNvPr>
+              <p:cNvPicPr/>
+              <p:nvPr/>
+            </p:nvPicPr>
+            <p:blipFill>
+              <a:blip r:embed="rId4"/>
+              <a:stretch>
+                <a:fillRect/>
+              </a:stretch>
+            </p:blipFill>
+            <p:spPr>
+              <a:xfrm>
+                <a:off x="964741" y="1928415"/>
+                <a:ext cx="6857280" cy="709200"/>
+              </a:xfrm>
+              <a:prstGeom prst="rect">
+                <a:avLst/>
+              </a:prstGeom>
+            </p:spPr>
+          </p:pic>
+        </mc:Fallback>
+      </mc:AlternateContent>
     </p:spTree>
     <p:extLst>
       <p:ext uri="{BB962C8B-B14F-4D97-AF65-F5344CB8AC3E}">
@@ -8914,6 +9576,9 @@
             </a:pPr>
             <a:r>
               <a:rPr sz="2600" dirty="0">
+                <a:highlight>
+                  <a:srgbClr val="FFFF00"/>
+                </a:highlight>
                 <a:latin typeface="Calibri"/>
                 <a:cs typeface="Calibri"/>
               </a:rPr>
@@ -8921,6 +9586,9 @@
             </a:r>
             <a:r>
               <a:rPr sz="2600" spc="-15" dirty="0">
+                <a:highlight>
+                  <a:srgbClr val="FFFF00"/>
+                </a:highlight>
                 <a:latin typeface="Calibri"/>
                 <a:cs typeface="Calibri"/>
               </a:rPr>
@@ -8928,6 +9596,9 @@
             </a:r>
             <a:r>
               <a:rPr sz="2600" dirty="0">
+                <a:highlight>
+                  <a:srgbClr val="FFFF00"/>
+                </a:highlight>
                 <a:latin typeface="Calibri"/>
                 <a:cs typeface="Calibri"/>
               </a:rPr>
@@ -8935,6 +9606,9 @@
             </a:r>
             <a:r>
               <a:rPr sz="2600" spc="-15" dirty="0">
+                <a:highlight>
+                  <a:srgbClr val="FFFF00"/>
+                </a:highlight>
                 <a:latin typeface="Calibri"/>
                 <a:cs typeface="Calibri"/>
               </a:rPr>
@@ -8942,6 +9616,9 @@
             </a:r>
             <a:r>
               <a:rPr sz="2600" dirty="0">
+                <a:highlight>
+                  <a:srgbClr val="FFFF00"/>
+                </a:highlight>
                 <a:latin typeface="Calibri"/>
                 <a:cs typeface="Calibri"/>
               </a:rPr>
@@ -8949,6 +9626,9 @@
             </a:r>
             <a:r>
               <a:rPr sz="2600" spc="-10" dirty="0">
+                <a:highlight>
+                  <a:srgbClr val="FFFF00"/>
+                </a:highlight>
                 <a:latin typeface="Calibri"/>
                 <a:cs typeface="Calibri"/>
               </a:rPr>
@@ -8956,6 +9636,9 @@
             </a:r>
             <a:r>
               <a:rPr sz="2600" spc="-25" dirty="0">
+                <a:highlight>
+                  <a:srgbClr val="FFFF00"/>
+                </a:highlight>
                 <a:latin typeface="Calibri"/>
                 <a:cs typeface="Calibri"/>
               </a:rPr>
@@ -8963,6 +9646,9 @@
             </a:r>
             <a:r>
               <a:rPr sz="2600" dirty="0">
+                <a:highlight>
+                  <a:srgbClr val="FFFF00"/>
+                </a:highlight>
                 <a:latin typeface="Calibri"/>
                 <a:cs typeface="Calibri"/>
               </a:rPr>
@@ -8970,6 +9656,9 @@
             </a:r>
             <a:r>
               <a:rPr sz="2600" spc="-10" dirty="0">
+                <a:highlight>
+                  <a:srgbClr val="FFFF00"/>
+                </a:highlight>
                 <a:latin typeface="Calibri"/>
                 <a:cs typeface="Calibri"/>
               </a:rPr>
@@ -8977,6 +9666,9 @@
             </a:r>
             <a:r>
               <a:rPr sz="2600" dirty="0">
+                <a:highlight>
+                  <a:srgbClr val="FFFF00"/>
+                </a:highlight>
                 <a:latin typeface="Calibri"/>
                 <a:cs typeface="Calibri"/>
               </a:rPr>
@@ -8984,6 +9676,9 @@
             </a:r>
             <a:r>
               <a:rPr sz="2600" spc="-15" dirty="0">
+                <a:highlight>
+                  <a:srgbClr val="FFFF00"/>
+                </a:highlight>
                 <a:latin typeface="Calibri"/>
                 <a:cs typeface="Calibri"/>
               </a:rPr>
@@ -8991,6 +9686,9 @@
             </a:r>
             <a:r>
               <a:rPr sz="2600" spc="-10" dirty="0">
+                <a:highlight>
+                  <a:srgbClr val="FFFF00"/>
+                </a:highlight>
                 <a:latin typeface="Calibri"/>
                 <a:cs typeface="Calibri"/>
               </a:rPr>
@@ -8998,6 +9696,9 @@
             </a:r>
             <a:r>
               <a:rPr sz="2600" spc="-15" dirty="0">
+                <a:highlight>
+                  <a:srgbClr val="FFFF00"/>
+                </a:highlight>
                 <a:latin typeface="Calibri"/>
                 <a:cs typeface="Calibri"/>
               </a:rPr>
@@ -9005,6 +9706,9 @@
             </a:r>
             <a:r>
               <a:rPr sz="2600" dirty="0">
+                <a:highlight>
+                  <a:srgbClr val="FFFF00"/>
+                </a:highlight>
                 <a:latin typeface="Calibri"/>
                 <a:cs typeface="Calibri"/>
               </a:rPr>
@@ -9012,6 +9716,9 @@
             </a:r>
             <a:r>
               <a:rPr sz="2600" spc="5" dirty="0">
+                <a:highlight>
+                  <a:srgbClr val="FFFF00"/>
+                </a:highlight>
                 <a:latin typeface="Calibri"/>
                 <a:cs typeface="Calibri"/>
               </a:rPr>
@@ -9019,12 +9726,18 @@
             </a:r>
             <a:r>
               <a:rPr sz="2600" spc="-5" dirty="0">
+                <a:highlight>
+                  <a:srgbClr val="FFFF00"/>
+                </a:highlight>
                 <a:latin typeface="Calibri"/>
                 <a:cs typeface="Calibri"/>
               </a:rPr>
               <a:t>table.</a:t>
             </a:r>
             <a:endParaRPr sz="2600" dirty="0">
+              <a:highlight>
+                <a:srgbClr val="FFFF00"/>
+              </a:highlight>
               <a:latin typeface="Calibri"/>
               <a:cs typeface="Calibri"/>
             </a:endParaRPr>
@@ -9045,6 +9758,9 @@
             </a:pPr>
             <a:r>
               <a:rPr sz="2600" dirty="0">
+                <a:highlight>
+                  <a:srgbClr val="FFFF00"/>
+                </a:highlight>
                 <a:latin typeface="Calibri"/>
                 <a:cs typeface="Calibri"/>
               </a:rPr>
@@ -9052,6 +9768,9 @@
             </a:r>
             <a:r>
               <a:rPr sz="2600" spc="-10" dirty="0">
+                <a:highlight>
+                  <a:srgbClr val="FFFF00"/>
+                </a:highlight>
                 <a:latin typeface="Calibri"/>
                 <a:cs typeface="Calibri"/>
               </a:rPr>
@@ -9059,6 +9778,9 @@
             </a:r>
             <a:r>
               <a:rPr sz="2600" spc="-5" dirty="0">
+                <a:highlight>
+                  <a:srgbClr val="FFFF00"/>
+                </a:highlight>
                 <a:latin typeface="Calibri"/>
                 <a:cs typeface="Calibri"/>
               </a:rPr>
@@ -9066,6 +9788,9 @@
             </a:r>
             <a:r>
               <a:rPr sz="2600" spc="-20" dirty="0">
+                <a:highlight>
+                  <a:srgbClr val="FFFF00"/>
+                </a:highlight>
                 <a:latin typeface="Calibri"/>
                 <a:cs typeface="Calibri"/>
               </a:rPr>
@@ -9073,6 +9798,9 @@
             </a:r>
             <a:r>
               <a:rPr sz="2600" spc="-5" dirty="0">
+                <a:highlight>
+                  <a:srgbClr val="FFFF00"/>
+                </a:highlight>
                 <a:latin typeface="Calibri"/>
                 <a:cs typeface="Calibri"/>
               </a:rPr>
@@ -9080,6 +9808,9 @@
             </a:r>
             <a:r>
               <a:rPr sz="2600" spc="-25" dirty="0">
+                <a:highlight>
+                  <a:srgbClr val="FFFF00"/>
+                </a:highlight>
                 <a:latin typeface="Calibri"/>
                 <a:cs typeface="Calibri"/>
               </a:rPr>
@@ -9087,6 +9818,9 @@
             </a:r>
             <a:r>
               <a:rPr sz="2600" spc="-10" dirty="0">
+                <a:highlight>
+                  <a:srgbClr val="FFFF00"/>
+                </a:highlight>
                 <a:latin typeface="Calibri"/>
                 <a:cs typeface="Calibri"/>
               </a:rPr>
@@ -9094,6 +9828,9 @@
             </a:r>
             <a:r>
               <a:rPr sz="2600" spc="5" dirty="0">
+                <a:highlight>
+                  <a:srgbClr val="FFFF00"/>
+                </a:highlight>
                 <a:latin typeface="Calibri"/>
                 <a:cs typeface="Calibri"/>
               </a:rPr>
@@ -9101,6 +9838,9 @@
             </a:r>
             <a:r>
               <a:rPr sz="2600" spc="-5" dirty="0">
+                <a:highlight>
+                  <a:srgbClr val="FFFF00"/>
+                </a:highlight>
                 <a:latin typeface="Calibri"/>
                 <a:cs typeface="Calibri"/>
               </a:rPr>
@@ -9108,6 +9848,9 @@
             </a:r>
             <a:r>
               <a:rPr sz="2600" spc="-30" dirty="0">
+                <a:highlight>
+                  <a:srgbClr val="FFFF00"/>
+                </a:highlight>
                 <a:latin typeface="Calibri"/>
                 <a:cs typeface="Calibri"/>
               </a:rPr>
@@ -9115,6 +9858,9 @@
             </a:r>
             <a:r>
               <a:rPr sz="2600" dirty="0">
+                <a:highlight>
+                  <a:srgbClr val="FFFF00"/>
+                </a:highlight>
                 <a:latin typeface="Calibri"/>
                 <a:cs typeface="Calibri"/>
               </a:rPr>
@@ -9122,6 +9868,9 @@
             </a:r>
             <a:r>
               <a:rPr sz="2600" spc="-40" dirty="0">
+                <a:highlight>
+                  <a:srgbClr val="FFFF00"/>
+                </a:highlight>
                 <a:latin typeface="Calibri"/>
                 <a:cs typeface="Calibri"/>
               </a:rPr>
@@ -9129,6 +9878,9 @@
             </a:r>
             <a:r>
               <a:rPr sz="2600" b="1" spc="-5" dirty="0">
+                <a:highlight>
+                  <a:srgbClr val="FFFF00"/>
+                </a:highlight>
                 <a:latin typeface="Calibri"/>
                 <a:cs typeface="Calibri"/>
               </a:rPr>
@@ -9136,6 +9888,9 @@
             </a:r>
             <a:r>
               <a:rPr sz="2600" b="1" spc="-40" dirty="0">
+                <a:highlight>
+                  <a:srgbClr val="FFFF00"/>
+                </a:highlight>
                 <a:latin typeface="Calibri"/>
                 <a:cs typeface="Calibri"/>
               </a:rPr>
@@ -9143,6 +9898,9 @@
             </a:r>
             <a:r>
               <a:rPr sz="2600" spc="-5" dirty="0">
+                <a:highlight>
+                  <a:srgbClr val="FFFF00"/>
+                </a:highlight>
                 <a:latin typeface="Calibri"/>
                 <a:cs typeface="Calibri"/>
               </a:rPr>
@@ -9150,6 +9908,9 @@
             </a:r>
             <a:r>
               <a:rPr sz="2600" spc="-35" dirty="0">
+                <a:highlight>
+                  <a:srgbClr val="FFFF00"/>
+                </a:highlight>
                 <a:latin typeface="Calibri"/>
                 <a:cs typeface="Calibri"/>
               </a:rPr>
@@ -9157,6 +9918,9 @@
             </a:r>
             <a:r>
               <a:rPr sz="2600" dirty="0">
+                <a:highlight>
+                  <a:srgbClr val="FFFF00"/>
+                </a:highlight>
                 <a:latin typeface="Calibri"/>
                 <a:cs typeface="Calibri"/>
               </a:rPr>
@@ -9164,6 +9928,9 @@
             </a:r>
             <a:r>
               <a:rPr sz="2600" spc="10" dirty="0">
+                <a:highlight>
+                  <a:srgbClr val="FFFF00"/>
+                </a:highlight>
                 <a:latin typeface="Calibri"/>
                 <a:cs typeface="Calibri"/>
               </a:rPr>
@@ -9171,6 +9938,9 @@
             </a:r>
             <a:r>
               <a:rPr sz="2600" b="1" spc="-5" dirty="0">
+                <a:highlight>
+                  <a:srgbClr val="FFFF00"/>
+                </a:highlight>
                 <a:latin typeface="Calibri"/>
                 <a:cs typeface="Calibri"/>
               </a:rPr>
@@ -9178,6 +9948,9 @@
             </a:r>
             <a:r>
               <a:rPr sz="2600" b="1" spc="-20" dirty="0">
+                <a:highlight>
+                  <a:srgbClr val="FFFF00"/>
+                </a:highlight>
                 <a:latin typeface="Calibri"/>
                 <a:cs typeface="Calibri"/>
               </a:rPr>
@@ -9185,6 +9958,9 @@
             </a:r>
             <a:r>
               <a:rPr sz="2600" dirty="0">
+                <a:highlight>
+                  <a:srgbClr val="FFFF00"/>
+                </a:highlight>
                 <a:latin typeface="Calibri"/>
                 <a:cs typeface="Calibri"/>
               </a:rPr>
@@ -9192,6 +9968,9 @@
             </a:r>
             <a:r>
               <a:rPr sz="2600" spc="-25" dirty="0">
+                <a:highlight>
+                  <a:srgbClr val="FFFF00"/>
+                </a:highlight>
                 <a:latin typeface="Calibri"/>
                 <a:cs typeface="Calibri"/>
               </a:rPr>
@@ -9199,6 +9978,9 @@
             </a:r>
             <a:r>
               <a:rPr sz="2600" spc="-5" dirty="0">
+                <a:highlight>
+                  <a:srgbClr val="FFFF00"/>
+                </a:highlight>
                 <a:latin typeface="Calibri"/>
                 <a:cs typeface="Calibri"/>
               </a:rPr>
@@ -9206,6 +9988,9 @@
             </a:r>
             <a:r>
               <a:rPr sz="2600" spc="-10" dirty="0">
+                <a:highlight>
+                  <a:srgbClr val="FFFF00"/>
+                </a:highlight>
                 <a:latin typeface="Calibri"/>
                 <a:cs typeface="Calibri"/>
               </a:rPr>
@@ -9213,6 +9998,9 @@
             </a:r>
             <a:r>
               <a:rPr sz="2600" dirty="0">
+                <a:highlight>
+                  <a:srgbClr val="FFFF00"/>
+                </a:highlight>
                 <a:latin typeface="Calibri"/>
                 <a:cs typeface="Calibri"/>
               </a:rPr>
@@ -9220,6 +10008,9 @@
             </a:r>
             <a:r>
               <a:rPr sz="2600" spc="-10" dirty="0">
+                <a:highlight>
+                  <a:srgbClr val="FFFF00"/>
+                </a:highlight>
                 <a:latin typeface="Calibri"/>
                 <a:cs typeface="Calibri"/>
               </a:rPr>
@@ -9227,6 +10018,9 @@
             </a:r>
             <a:r>
               <a:rPr sz="2600" spc="-575" dirty="0">
+                <a:highlight>
+                  <a:srgbClr val="FFFF00"/>
+                </a:highlight>
                 <a:latin typeface="Calibri"/>
                 <a:cs typeface="Calibri"/>
               </a:rPr>
@@ -9234,6 +10028,9 @@
             </a:r>
             <a:r>
               <a:rPr sz="2600" spc="-5" dirty="0">
+                <a:highlight>
+                  <a:srgbClr val="FFFF00"/>
+                </a:highlight>
                 <a:latin typeface="Calibri"/>
                 <a:cs typeface="Calibri"/>
               </a:rPr>
@@ -9241,6 +10038,9 @@
             </a:r>
             <a:r>
               <a:rPr sz="2600" dirty="0">
+                <a:highlight>
+                  <a:srgbClr val="FFFF00"/>
+                </a:highlight>
                 <a:latin typeface="Calibri"/>
                 <a:cs typeface="Calibri"/>
               </a:rPr>
@@ -9248,6 +10048,9 @@
             </a:r>
             <a:r>
               <a:rPr sz="2600" spc="-15" dirty="0">
+                <a:highlight>
+                  <a:srgbClr val="FFFF00"/>
+                </a:highlight>
                 <a:latin typeface="Calibri"/>
                 <a:cs typeface="Calibri"/>
               </a:rPr>
@@ -9255,6 +10058,9 @@
             </a:r>
             <a:r>
               <a:rPr sz="2600" dirty="0">
+                <a:highlight>
+                  <a:srgbClr val="FFFF00"/>
+                </a:highlight>
                 <a:latin typeface="Calibri"/>
                 <a:cs typeface="Calibri"/>
               </a:rPr>
@@ -9262,6 +10068,9 @@
             </a:r>
             <a:r>
               <a:rPr sz="2600" spc="-10" dirty="0">
+                <a:highlight>
+                  <a:srgbClr val="FFFF00"/>
+                </a:highlight>
                 <a:latin typeface="Calibri"/>
                 <a:cs typeface="Calibri"/>
               </a:rPr>
@@ -9269,6 +10078,9 @@
             </a:r>
             <a:r>
               <a:rPr sz="2600" dirty="0">
+                <a:highlight>
+                  <a:srgbClr val="FFFF00"/>
+                </a:highlight>
                 <a:latin typeface="Calibri"/>
                 <a:cs typeface="Calibri"/>
               </a:rPr>
@@ -9276,6 +10088,9 @@
             </a:r>
             <a:r>
               <a:rPr sz="2600" spc="-5" dirty="0">
+                <a:highlight>
+                  <a:srgbClr val="FFFF00"/>
+                </a:highlight>
                 <a:latin typeface="Calibri"/>
                 <a:cs typeface="Calibri"/>
               </a:rPr>
@@ -9283,6 +10098,9 @@
             </a:r>
             <a:r>
               <a:rPr sz="2600" dirty="0">
+                <a:highlight>
+                  <a:srgbClr val="FFFF00"/>
+                </a:highlight>
                 <a:latin typeface="Calibri"/>
                 <a:cs typeface="Calibri"/>
               </a:rPr>
@@ -9290,6 +10108,9 @@
             </a:r>
             <a:r>
               <a:rPr sz="2600" spc="-50" dirty="0">
+                <a:highlight>
+                  <a:srgbClr val="FFFF00"/>
+                </a:highlight>
                 <a:latin typeface="Calibri"/>
                 <a:cs typeface="Calibri"/>
               </a:rPr>
@@ -9297,6 +10118,9 @@
             </a:r>
             <a:r>
               <a:rPr sz="2600" b="1" spc="-45" dirty="0">
+                <a:highlight>
+                  <a:srgbClr val="FFFF00"/>
+                </a:highlight>
                 <a:latin typeface="Calibri"/>
                 <a:cs typeface="Calibri"/>
               </a:rPr>
@@ -9304,6 +10128,9 @@
             </a:r>
             <a:r>
               <a:rPr sz="2600" b="1" spc="-20" dirty="0">
+                <a:highlight>
+                  <a:srgbClr val="FFFF00"/>
+                </a:highlight>
                 <a:latin typeface="Calibri"/>
                 <a:cs typeface="Calibri"/>
               </a:rPr>
@@ -9311,6 +10138,9 @@
             </a:r>
             <a:r>
               <a:rPr sz="2600" dirty="0">
+                <a:highlight>
+                  <a:srgbClr val="FFFF00"/>
+                </a:highlight>
                 <a:latin typeface="Calibri"/>
                 <a:cs typeface="Calibri"/>
               </a:rPr>
@@ -9318,6 +10148,9 @@
             </a:r>
             <a:r>
               <a:rPr sz="2600" spc="-10" dirty="0">
+                <a:highlight>
+                  <a:srgbClr val="FFFF00"/>
+                </a:highlight>
                 <a:latin typeface="Calibri"/>
                 <a:cs typeface="Calibri"/>
               </a:rPr>
@@ -9325,6 +10158,9 @@
             </a:r>
             <a:r>
               <a:rPr sz="2600" dirty="0">
+                <a:highlight>
+                  <a:srgbClr val="FFFF00"/>
+                </a:highlight>
                 <a:latin typeface="Calibri"/>
                 <a:cs typeface="Calibri"/>
               </a:rPr>
@@ -9332,6 +10168,9 @@
             </a:r>
             <a:r>
               <a:rPr sz="2600" spc="-5" dirty="0">
+                <a:highlight>
+                  <a:srgbClr val="FFFF00"/>
+                </a:highlight>
                 <a:latin typeface="Calibri"/>
                 <a:cs typeface="Calibri"/>
               </a:rPr>
@@ -9339,6 +10178,9 @@
             </a:r>
             <a:r>
               <a:rPr sz="2600" b="1" spc="-5" dirty="0">
+                <a:highlight>
+                  <a:srgbClr val="FFFF00"/>
+                </a:highlight>
                 <a:latin typeface="Calibri"/>
                 <a:cs typeface="Calibri"/>
               </a:rPr>
@@ -9346,6 +10188,9 @@
             </a:r>
             <a:r>
               <a:rPr sz="2600" b="1" spc="-45" dirty="0">
+                <a:highlight>
+                  <a:srgbClr val="FFFF00"/>
+                </a:highlight>
                 <a:latin typeface="Calibri"/>
                 <a:cs typeface="Calibri"/>
               </a:rPr>
@@ -9353,12 +10198,18 @@
             </a:r>
             <a:r>
               <a:rPr sz="2600" spc="-15" dirty="0">
+                <a:highlight>
+                  <a:srgbClr val="FFFF00"/>
+                </a:highlight>
                 <a:latin typeface="Calibri"/>
                 <a:cs typeface="Calibri"/>
               </a:rPr>
               <a:t>statements.</a:t>
             </a:r>
             <a:endParaRPr sz="2600" dirty="0">
+              <a:highlight>
+                <a:srgbClr val="FFFF00"/>
+              </a:highlight>
               <a:latin typeface="Calibri"/>
               <a:cs typeface="Calibri"/>
             </a:endParaRPr>
@@ -9379,6 +10230,9 @@
             </a:pPr>
             <a:r>
               <a:rPr sz="2600" b="1" spc="-15" dirty="0">
+                <a:highlight>
+                  <a:srgbClr val="FFFF00"/>
+                </a:highlight>
                 <a:latin typeface="Calibri"/>
                 <a:cs typeface="Calibri"/>
               </a:rPr>
@@ -9386,6 +10240,9 @@
             </a:r>
             <a:r>
               <a:rPr sz="2600" b="1" dirty="0">
+                <a:highlight>
+                  <a:srgbClr val="FFFF00"/>
+                </a:highlight>
                 <a:latin typeface="Calibri"/>
                 <a:cs typeface="Calibri"/>
               </a:rPr>
@@ -9393,6 +10250,9 @@
             </a:r>
             <a:r>
               <a:rPr sz="2600" b="1" spc="-5" dirty="0">
+                <a:highlight>
+                  <a:srgbClr val="FFFF00"/>
+                </a:highlight>
                 <a:latin typeface="Calibri"/>
                 <a:cs typeface="Calibri"/>
               </a:rPr>
@@ -9400,6 +10260,9 @@
             </a:r>
             <a:r>
               <a:rPr sz="2600" b="1" dirty="0">
+                <a:highlight>
+                  <a:srgbClr val="FFFF00"/>
+                </a:highlight>
                 <a:latin typeface="Calibri"/>
                 <a:cs typeface="Calibri"/>
               </a:rPr>
@@ -9407,6 +10270,9 @@
             </a:r>
             <a:r>
               <a:rPr sz="2600" b="1" spc="5" dirty="0">
+                <a:highlight>
+                  <a:srgbClr val="FFFF00"/>
+                </a:highlight>
                 <a:latin typeface="Calibri"/>
                 <a:cs typeface="Calibri"/>
               </a:rPr>
@@ -9414,6 +10280,9 @@
             </a:r>
             <a:r>
               <a:rPr sz="2600" b="1" spc="-15" dirty="0">
+                <a:highlight>
+                  <a:srgbClr val="FFFF00"/>
+                </a:highlight>
                 <a:latin typeface="Calibri"/>
                 <a:cs typeface="Calibri"/>
               </a:rPr>
@@ -9421,6 +10290,9 @@
             </a:r>
             <a:r>
               <a:rPr sz="2600" b="1" spc="5" dirty="0">
+                <a:highlight>
+                  <a:srgbClr val="FFFF00"/>
+                </a:highlight>
                 <a:latin typeface="Calibri"/>
                 <a:cs typeface="Calibri"/>
               </a:rPr>
@@ -9428,6 +10300,9 @@
             </a:r>
             <a:r>
               <a:rPr sz="2600" b="1" dirty="0">
+                <a:highlight>
+                  <a:srgbClr val="FFFF00"/>
+                </a:highlight>
                 <a:latin typeface="Calibri"/>
                 <a:cs typeface="Calibri"/>
               </a:rPr>
@@ -9435,6 +10310,9 @@
             </a:r>
             <a:r>
               <a:rPr sz="2600" b="1" spc="5" dirty="0">
+                <a:highlight>
+                  <a:srgbClr val="FFFF00"/>
+                </a:highlight>
                 <a:latin typeface="Calibri"/>
                 <a:cs typeface="Calibri"/>
               </a:rPr>
@@ -9442,6 +10320,9 @@
             </a:r>
             <a:r>
               <a:rPr sz="2600" b="1" spc="-5" dirty="0">
+                <a:highlight>
+                  <a:srgbClr val="FFFF00"/>
+                </a:highlight>
                 <a:latin typeface="Calibri"/>
                 <a:cs typeface="Calibri"/>
               </a:rPr>
@@ -9449,6 +10330,9 @@
             </a:r>
             <a:r>
               <a:rPr sz="2600" b="1" spc="25" dirty="0">
+                <a:highlight>
+                  <a:srgbClr val="FFFF00"/>
+                </a:highlight>
                 <a:latin typeface="Calibri"/>
                 <a:cs typeface="Calibri"/>
               </a:rPr>
@@ -9456,6 +10340,9 @@
             </a:r>
             <a:r>
               <a:rPr sz="2600" b="1" spc="-5" dirty="0">
+                <a:highlight>
+                  <a:srgbClr val="FFFF00"/>
+                </a:highlight>
                 <a:latin typeface="Calibri"/>
                 <a:cs typeface="Calibri"/>
               </a:rPr>
@@ -9463,6 +10350,9 @@
             </a:r>
             <a:r>
               <a:rPr sz="2600" b="1" spc="5" dirty="0">
+                <a:highlight>
+                  <a:srgbClr val="FFFF00"/>
+                </a:highlight>
                 <a:latin typeface="Calibri"/>
                 <a:cs typeface="Calibri"/>
               </a:rPr>
@@ -9470,6 +10360,9 @@
             </a:r>
             <a:r>
               <a:rPr sz="2600" b="1" dirty="0">
+                <a:highlight>
+                  <a:srgbClr val="FFFF00"/>
+                </a:highlight>
                 <a:latin typeface="Calibri"/>
                 <a:cs typeface="Calibri"/>
               </a:rPr>
@@ -9477,6 +10370,9 @@
             </a:r>
             <a:r>
               <a:rPr sz="2600" b="1" spc="-15" dirty="0">
+                <a:highlight>
+                  <a:srgbClr val="FFFF00"/>
+                </a:highlight>
                 <a:latin typeface="Calibri"/>
                 <a:cs typeface="Calibri"/>
               </a:rPr>
@@ -9484,6 +10380,9 @@
             </a:r>
             <a:r>
               <a:rPr sz="2600" b="1" spc="15" dirty="0">
+                <a:highlight>
+                  <a:srgbClr val="FFFF00"/>
+                </a:highlight>
                 <a:latin typeface="Calibri"/>
                 <a:cs typeface="Calibri"/>
               </a:rPr>
@@ -9491,6 +10390,9 @@
             </a:r>
             <a:r>
               <a:rPr sz="2600" b="1" dirty="0">
+                <a:highlight>
+                  <a:srgbClr val="FFFF00"/>
+                </a:highlight>
                 <a:latin typeface="Calibri"/>
                 <a:cs typeface="Calibri"/>
               </a:rPr>
@@ -9498,6 +10400,9 @@
             </a:r>
             <a:r>
               <a:rPr sz="2600" b="1" spc="5" dirty="0">
+                <a:highlight>
+                  <a:srgbClr val="FFFF00"/>
+                </a:highlight>
                 <a:latin typeface="Calibri"/>
                 <a:cs typeface="Calibri"/>
               </a:rPr>
@@ -9505,6 +10410,9 @@
             </a:r>
             <a:r>
               <a:rPr sz="2600" b="1" dirty="0">
+                <a:highlight>
+                  <a:srgbClr val="FFFF00"/>
+                </a:highlight>
                 <a:latin typeface="Calibri"/>
                 <a:cs typeface="Calibri"/>
               </a:rPr>
@@ -9512,6 +10420,9 @@
             </a:r>
             <a:r>
               <a:rPr sz="2600" b="1" spc="5" dirty="0">
+                <a:highlight>
+                  <a:srgbClr val="FFFF00"/>
+                </a:highlight>
                 <a:latin typeface="Calibri"/>
                 <a:cs typeface="Calibri"/>
               </a:rPr>
@@ -9519,12 +10430,18 @@
             </a:r>
             <a:r>
               <a:rPr sz="2600" b="1" spc="-15" dirty="0">
+                <a:highlight>
+                  <a:srgbClr val="FFFF00"/>
+                </a:highlight>
                 <a:latin typeface="Calibri"/>
                 <a:cs typeface="Calibri"/>
               </a:rPr>
               <a:t>data.</a:t>
             </a:r>
             <a:endParaRPr sz="2600" dirty="0">
+              <a:highlight>
+                <a:srgbClr val="FFFF00"/>
+              </a:highlight>
               <a:latin typeface="Calibri"/>
               <a:cs typeface="Calibri"/>
             </a:endParaRPr>
@@ -9893,6 +10810,9 @@
             </a:pPr>
             <a:r>
               <a:rPr sz="2000" spc="-5" dirty="0">
+                <a:highlight>
+                  <a:srgbClr val="FFFF00"/>
+                </a:highlight>
                 <a:latin typeface="Calibri"/>
                 <a:cs typeface="Calibri"/>
               </a:rPr>
@@ -9900,6 +10820,9 @@
             </a:r>
             <a:r>
               <a:rPr sz="2000" dirty="0">
+                <a:highlight>
+                  <a:srgbClr val="FFFF00"/>
+                </a:highlight>
                 <a:latin typeface="Calibri"/>
                 <a:cs typeface="Calibri"/>
               </a:rPr>
@@ -9907,6 +10830,9 @@
             </a:r>
             <a:r>
               <a:rPr sz="2000" spc="-5" dirty="0">
+                <a:highlight>
+                  <a:srgbClr val="FFFF00"/>
+                </a:highlight>
                 <a:latin typeface="Calibri"/>
                 <a:cs typeface="Calibri"/>
               </a:rPr>
@@ -9914,6 +10840,9 @@
             </a:r>
             <a:r>
               <a:rPr sz="2000" dirty="0">
+                <a:highlight>
+                  <a:srgbClr val="FFFF00"/>
+                </a:highlight>
                 <a:latin typeface="Calibri"/>
                 <a:cs typeface="Calibri"/>
               </a:rPr>
@@ -9921,6 +10850,9 @@
             </a:r>
             <a:r>
               <a:rPr sz="2000" spc="5" dirty="0">
+                <a:highlight>
+                  <a:srgbClr val="FFFF00"/>
+                </a:highlight>
                 <a:latin typeface="Calibri"/>
                 <a:cs typeface="Calibri"/>
               </a:rPr>
@@ -9928,6 +10860,9 @@
             </a:r>
             <a:r>
               <a:rPr sz="2000" dirty="0">
+                <a:highlight>
+                  <a:srgbClr val="FFFF00"/>
+                </a:highlight>
                 <a:latin typeface="Calibri"/>
                 <a:cs typeface="Calibri"/>
               </a:rPr>
@@ -9935,6 +10870,9 @@
             </a:r>
             <a:r>
               <a:rPr sz="2000" spc="-10" dirty="0">
+                <a:highlight>
+                  <a:srgbClr val="FFFF00"/>
+                </a:highlight>
                 <a:latin typeface="Calibri"/>
                 <a:cs typeface="Calibri"/>
               </a:rPr>
@@ -9942,6 +10880,9 @@
             </a:r>
             <a:r>
               <a:rPr sz="2000" spc="-5" dirty="0">
+                <a:highlight>
+                  <a:srgbClr val="FFFF00"/>
+                </a:highlight>
                 <a:latin typeface="Calibri"/>
                 <a:cs typeface="Calibri"/>
               </a:rPr>
@@ -9949,6 +10890,9 @@
             </a:r>
             <a:r>
               <a:rPr sz="2000" dirty="0">
+                <a:highlight>
+                  <a:srgbClr val="FFFF00"/>
+                </a:highlight>
                 <a:latin typeface="Calibri"/>
                 <a:cs typeface="Calibri"/>
               </a:rPr>
@@ -9956,6 +10900,9 @@
             </a:r>
             <a:r>
               <a:rPr sz="2000" spc="-5" dirty="0">
+                <a:highlight>
+                  <a:srgbClr val="FFFF00"/>
+                </a:highlight>
                 <a:latin typeface="Calibri"/>
                 <a:cs typeface="Calibri"/>
               </a:rPr>
@@ -9963,6 +10910,9 @@
             </a:r>
             <a:r>
               <a:rPr sz="2000" dirty="0">
+                <a:highlight>
+                  <a:srgbClr val="FFFF00"/>
+                </a:highlight>
                 <a:latin typeface="Calibri"/>
                 <a:cs typeface="Calibri"/>
               </a:rPr>
@@ -9970,6 +10920,9 @@
             </a:r>
             <a:r>
               <a:rPr sz="2000" spc="-5" dirty="0">
+                <a:highlight>
+                  <a:srgbClr val="FFFF00"/>
+                </a:highlight>
                 <a:latin typeface="Calibri"/>
                 <a:cs typeface="Calibri"/>
               </a:rPr>
@@ -9977,6 +10930,9 @@
             </a:r>
             <a:r>
               <a:rPr sz="2000" spc="-15" dirty="0">
+                <a:highlight>
+                  <a:srgbClr val="FFFF00"/>
+                </a:highlight>
                 <a:latin typeface="Calibri"/>
                 <a:cs typeface="Calibri"/>
               </a:rPr>
@@ -9984,6 +10940,9 @@
             </a:r>
             <a:r>
               <a:rPr sz="2000" dirty="0">
+                <a:highlight>
+                  <a:srgbClr val="FFFF00"/>
+                </a:highlight>
                 <a:latin typeface="Calibri"/>
                 <a:cs typeface="Calibri"/>
               </a:rPr>
@@ -9991,6 +10950,9 @@
             </a:r>
             <a:r>
               <a:rPr sz="2000" spc="-440" dirty="0">
+                <a:highlight>
+                  <a:srgbClr val="FFFF00"/>
+                </a:highlight>
                 <a:latin typeface="Calibri"/>
                 <a:cs typeface="Calibri"/>
               </a:rPr>
@@ -9998,6 +10960,9 @@
             </a:r>
             <a:r>
               <a:rPr sz="2000" spc="-10" dirty="0">
+                <a:highlight>
+                  <a:srgbClr val="FFFF00"/>
+                </a:highlight>
                 <a:latin typeface="Calibri"/>
                 <a:cs typeface="Calibri"/>
               </a:rPr>
@@ -10005,6 +10970,9 @@
             </a:r>
             <a:r>
               <a:rPr sz="2000" spc="-25" dirty="0">
+                <a:highlight>
+                  <a:srgbClr val="FFFF00"/>
+                </a:highlight>
                 <a:latin typeface="Calibri"/>
                 <a:cs typeface="Calibri"/>
               </a:rPr>
@@ -10012,6 +10980,9 @@
             </a:r>
             <a:r>
               <a:rPr sz="2000" dirty="0">
+                <a:highlight>
+                  <a:srgbClr val="FFFF00"/>
+                </a:highlight>
                 <a:latin typeface="Calibri"/>
                 <a:cs typeface="Calibri"/>
               </a:rPr>
@@ -10019,6 +10990,9 @@
             </a:r>
             <a:r>
               <a:rPr sz="2000" spc="-5" dirty="0">
+                <a:highlight>
+                  <a:srgbClr val="FFFF00"/>
+                </a:highlight>
                 <a:latin typeface="Calibri"/>
                 <a:cs typeface="Calibri"/>
               </a:rPr>
@@ -10026,6 +11000,9 @@
             </a:r>
             <a:r>
               <a:rPr sz="2000" dirty="0">
+                <a:highlight>
+                  <a:srgbClr val="FFFF00"/>
+                </a:highlight>
                 <a:latin typeface="Calibri"/>
                 <a:cs typeface="Calibri"/>
               </a:rPr>
@@ -10033,6 +11010,9 @@
             </a:r>
             <a:r>
               <a:rPr sz="2000" spc="-10" dirty="0">
+                <a:highlight>
+                  <a:srgbClr val="FFFF00"/>
+                </a:highlight>
                 <a:latin typeface="Calibri"/>
                 <a:cs typeface="Calibri"/>
               </a:rPr>
@@ -10040,6 +11020,9 @@
             </a:r>
             <a:r>
               <a:rPr sz="2000" dirty="0">
+                <a:highlight>
+                  <a:srgbClr val="FFFF00"/>
+                </a:highlight>
                 <a:latin typeface="Calibri"/>
                 <a:cs typeface="Calibri"/>
               </a:rPr>
@@ -10047,6 +11030,9 @@
             </a:r>
             <a:r>
               <a:rPr sz="2000" spc="-10" dirty="0">
+                <a:highlight>
+                  <a:srgbClr val="FFFF00"/>
+                </a:highlight>
                 <a:latin typeface="Calibri"/>
                 <a:cs typeface="Calibri"/>
               </a:rPr>
@@ -10054,6 +11040,9 @@
             </a:r>
             <a:r>
               <a:rPr sz="2000" dirty="0">
+                <a:highlight>
+                  <a:srgbClr val="FFFF00"/>
+                </a:highlight>
                 <a:latin typeface="Calibri"/>
                 <a:cs typeface="Calibri"/>
               </a:rPr>
@@ -10061,6 +11050,9 @@
             </a:r>
             <a:r>
               <a:rPr sz="2000" spc="-5" dirty="0">
+                <a:highlight>
+                  <a:srgbClr val="FFFF00"/>
+                </a:highlight>
                 <a:latin typeface="Calibri"/>
                 <a:cs typeface="Calibri"/>
               </a:rPr>
@@ -10068,6 +11060,9 @@
             </a:r>
             <a:r>
               <a:rPr sz="2000" dirty="0">
+                <a:highlight>
+                  <a:srgbClr val="FFFF00"/>
+                </a:highlight>
                 <a:latin typeface="Calibri"/>
                 <a:cs typeface="Calibri"/>
               </a:rPr>
@@ -10075,12 +11070,18 @@
             </a:r>
             <a:r>
               <a:rPr sz="2000" spc="-50" dirty="0">
+                <a:highlight>
+                  <a:srgbClr val="FFFF00"/>
+                </a:highlight>
                 <a:latin typeface="Calibri"/>
                 <a:cs typeface="Calibri"/>
               </a:rPr>
               <a:t>key.</a:t>
             </a:r>
-            <a:endParaRPr sz="2000">
+            <a:endParaRPr sz="2000" dirty="0">
+              <a:highlight>
+                <a:srgbClr val="FFFF00"/>
+              </a:highlight>
               <a:latin typeface="Calibri"/>
               <a:cs typeface="Calibri"/>
             </a:endParaRPr>
@@ -10102,6 +11103,9 @@
             </a:pPr>
             <a:r>
               <a:rPr sz="2000" dirty="0">
+                <a:highlight>
+                  <a:srgbClr val="FFFF00"/>
+                </a:highlight>
                 <a:latin typeface="Calibri"/>
                 <a:cs typeface="Calibri"/>
               </a:rPr>
@@ -10109,6 +11113,9 @@
             </a:r>
             <a:r>
               <a:rPr sz="2000" spc="-10" dirty="0">
+                <a:highlight>
+                  <a:srgbClr val="FFFF00"/>
+                </a:highlight>
                 <a:latin typeface="Calibri"/>
                 <a:cs typeface="Calibri"/>
               </a:rPr>
@@ -10116,6 +11123,9 @@
             </a:r>
             <a:r>
               <a:rPr sz="2000" dirty="0">
+                <a:highlight>
+                  <a:srgbClr val="FFFF00"/>
+                </a:highlight>
                 <a:latin typeface="Calibri"/>
                 <a:cs typeface="Calibri"/>
               </a:rPr>
@@ -10123,6 +11133,9 @@
             </a:r>
             <a:r>
               <a:rPr sz="2000" spc="5" dirty="0">
+                <a:highlight>
+                  <a:srgbClr val="FFFF00"/>
+                </a:highlight>
                 <a:latin typeface="Calibri"/>
                 <a:cs typeface="Calibri"/>
               </a:rPr>
@@ -10130,6 +11143,9 @@
             </a:r>
             <a:r>
               <a:rPr sz="2000" dirty="0">
+                <a:highlight>
+                  <a:srgbClr val="FFFF00"/>
+                </a:highlight>
                 <a:latin typeface="Calibri"/>
                 <a:cs typeface="Calibri"/>
               </a:rPr>
@@ -10137,6 +11153,9 @@
             </a:r>
             <a:r>
               <a:rPr sz="2000" spc="-10" dirty="0">
+                <a:highlight>
+                  <a:srgbClr val="FFFF00"/>
+                </a:highlight>
                 <a:latin typeface="Calibri"/>
                 <a:cs typeface="Calibri"/>
               </a:rPr>
@@ -10144,6 +11163,9 @@
             </a:r>
             <a:r>
               <a:rPr sz="2000" spc="-5" dirty="0">
+                <a:highlight>
+                  <a:srgbClr val="FFFF00"/>
+                </a:highlight>
                 <a:latin typeface="Calibri"/>
                 <a:cs typeface="Calibri"/>
               </a:rPr>
@@ -10151,12 +11173,18 @@
             </a:r>
             <a:r>
               <a:rPr sz="2000" spc="-10" dirty="0">
+                <a:highlight>
+                  <a:srgbClr val="FFFF00"/>
+                </a:highlight>
                 <a:latin typeface="Calibri"/>
                 <a:cs typeface="Calibri"/>
               </a:rPr>
               <a:t>index.</a:t>
             </a:r>
-            <a:endParaRPr sz="2000">
+            <a:endParaRPr sz="2000" dirty="0">
+              <a:highlight>
+                <a:srgbClr val="FFFF00"/>
+              </a:highlight>
               <a:latin typeface="Calibri"/>
               <a:cs typeface="Calibri"/>
             </a:endParaRPr>
@@ -10178,6 +11206,9 @@
             </a:pPr>
             <a:r>
               <a:rPr sz="2000" dirty="0">
+                <a:highlight>
+                  <a:srgbClr val="FFFF00"/>
+                </a:highlight>
                 <a:latin typeface="Calibri"/>
                 <a:cs typeface="Calibri"/>
               </a:rPr>
@@ -10185,6 +11216,9 @@
             </a:r>
             <a:r>
               <a:rPr sz="2000" spc="-5" dirty="0">
+                <a:highlight>
+                  <a:srgbClr val="FFFF00"/>
+                </a:highlight>
                 <a:latin typeface="Calibri"/>
                 <a:cs typeface="Calibri"/>
               </a:rPr>
@@ -10192,6 +11226,9 @@
             </a:r>
             <a:r>
               <a:rPr sz="2000" dirty="0">
+                <a:highlight>
+                  <a:srgbClr val="FFFF00"/>
+                </a:highlight>
                 <a:latin typeface="Calibri"/>
                 <a:cs typeface="Calibri"/>
               </a:rPr>
@@ -10199,6 +11236,9 @@
             </a:r>
             <a:r>
               <a:rPr sz="2000" spc="5" dirty="0">
+                <a:highlight>
+                  <a:srgbClr val="FFFF00"/>
+                </a:highlight>
                 <a:latin typeface="Calibri"/>
                 <a:cs typeface="Calibri"/>
               </a:rPr>
@@ -10206,6 +11246,9 @@
             </a:r>
             <a:r>
               <a:rPr sz="2000" dirty="0">
+                <a:highlight>
+                  <a:srgbClr val="FFFF00"/>
+                </a:highlight>
                 <a:latin typeface="Calibri"/>
                 <a:cs typeface="Calibri"/>
               </a:rPr>
@@ -10213,6 +11256,9 @@
             </a:r>
             <a:r>
               <a:rPr sz="2000" spc="-10" dirty="0">
+                <a:highlight>
+                  <a:srgbClr val="FFFF00"/>
+                </a:highlight>
                 <a:latin typeface="Calibri"/>
                 <a:cs typeface="Calibri"/>
               </a:rPr>
@@ -10220,6 +11266,9 @@
             </a:r>
             <a:r>
               <a:rPr sz="2000" spc="-15" dirty="0">
+                <a:highlight>
+                  <a:srgbClr val="FFFF00"/>
+                </a:highlight>
                 <a:latin typeface="Calibri"/>
                 <a:cs typeface="Calibri"/>
               </a:rPr>
@@ -10227,6 +11276,9 @@
             </a:r>
             <a:r>
               <a:rPr sz="2000" spc="20" dirty="0">
+                <a:highlight>
+                  <a:srgbClr val="FFFF00"/>
+                </a:highlight>
                 <a:latin typeface="Calibri"/>
                 <a:cs typeface="Calibri"/>
               </a:rPr>
@@ -10234,6 +11286,9 @@
             </a:r>
             <a:r>
               <a:rPr sz="2000" spc="-15" dirty="0">
+                <a:highlight>
+                  <a:srgbClr val="FFFF00"/>
+                </a:highlight>
                 <a:latin typeface="Calibri"/>
                 <a:cs typeface="Calibri"/>
               </a:rPr>
@@ -10241,6 +11296,9 @@
             </a:r>
             <a:r>
               <a:rPr sz="2000" spc="-10" dirty="0">
+                <a:highlight>
+                  <a:srgbClr val="FFFF00"/>
+                </a:highlight>
                 <a:latin typeface="Calibri"/>
                 <a:cs typeface="Calibri"/>
               </a:rPr>
@@ -10248,6 +11306,9 @@
             </a:r>
             <a:r>
               <a:rPr sz="2000" dirty="0">
+                <a:highlight>
+                  <a:srgbClr val="FFFF00"/>
+                </a:highlight>
                 <a:latin typeface="Calibri"/>
                 <a:cs typeface="Calibri"/>
               </a:rPr>
@@ -10255,6 +11316,9 @@
             </a:r>
             <a:r>
               <a:rPr sz="2000" spc="5" dirty="0">
+                <a:highlight>
+                  <a:srgbClr val="FFFF00"/>
+                </a:highlight>
                 <a:latin typeface="Calibri"/>
                 <a:cs typeface="Calibri"/>
               </a:rPr>
@@ -10262,6 +11326,9 @@
             </a:r>
             <a:r>
               <a:rPr sz="2000" spc="-10" dirty="0">
+                <a:highlight>
+                  <a:srgbClr val="FFFF00"/>
+                </a:highlight>
                 <a:latin typeface="Calibri"/>
                 <a:cs typeface="Calibri"/>
               </a:rPr>
@@ -10269,6 +11336,9 @@
             </a:r>
             <a:r>
               <a:rPr sz="2000" spc="5" dirty="0">
+                <a:highlight>
+                  <a:srgbClr val="FFFF00"/>
+                </a:highlight>
                 <a:latin typeface="Calibri"/>
                 <a:cs typeface="Calibri"/>
               </a:rPr>
@@ -10276,6 +11346,9 @@
             </a:r>
             <a:r>
               <a:rPr sz="2000" dirty="0">
+                <a:highlight>
+                  <a:srgbClr val="FFFF00"/>
+                </a:highlight>
                 <a:latin typeface="Calibri"/>
                 <a:cs typeface="Calibri"/>
               </a:rPr>
@@ -10283,6 +11356,9 @@
             </a:r>
             <a:r>
               <a:rPr sz="2000" spc="-5" dirty="0">
+                <a:highlight>
+                  <a:srgbClr val="FFFF00"/>
+                </a:highlight>
                 <a:latin typeface="Calibri"/>
                 <a:cs typeface="Calibri"/>
               </a:rPr>
@@ -10290,6 +11366,9 @@
             </a:r>
             <a:r>
               <a:rPr sz="2000" spc="15" dirty="0">
+                <a:highlight>
+                  <a:srgbClr val="FFFF00"/>
+                </a:highlight>
                 <a:latin typeface="Calibri"/>
                 <a:cs typeface="Calibri"/>
               </a:rPr>
@@ -10297,6 +11376,9 @@
             </a:r>
             <a:r>
               <a:rPr sz="2000" dirty="0">
+                <a:highlight>
+                  <a:srgbClr val="FFFF00"/>
+                </a:highlight>
                 <a:latin typeface="Calibri"/>
                 <a:cs typeface="Calibri"/>
               </a:rPr>
@@ -10304,6 +11386,9 @@
             </a:r>
             <a:r>
               <a:rPr sz="2000" spc="15" dirty="0">
+                <a:highlight>
+                  <a:srgbClr val="FFFF00"/>
+                </a:highlight>
                 <a:latin typeface="Calibri"/>
                 <a:cs typeface="Calibri"/>
               </a:rPr>
@@ -10311,6 +11396,9 @@
             </a:r>
             <a:r>
               <a:rPr sz="2000" spc="-5" dirty="0">
+                <a:highlight>
+                  <a:srgbClr val="FFFF00"/>
+                </a:highlight>
                 <a:latin typeface="Calibri"/>
                 <a:cs typeface="Calibri"/>
               </a:rPr>
@@ -10318,6 +11406,9 @@
             </a:r>
             <a:r>
               <a:rPr sz="2000" spc="5" dirty="0">
+                <a:highlight>
+                  <a:srgbClr val="FFFF00"/>
+                </a:highlight>
                 <a:latin typeface="Calibri"/>
                 <a:cs typeface="Calibri"/>
               </a:rPr>
@@ -10325,12 +11416,18 @@
             </a:r>
             <a:r>
               <a:rPr sz="2000" spc="-35" dirty="0">
+                <a:highlight>
+                  <a:srgbClr val="FFFF00"/>
+                </a:highlight>
                 <a:latin typeface="Calibri"/>
                 <a:cs typeface="Calibri"/>
               </a:rPr>
               <a:t>slower.</a:t>
             </a:r>
-            <a:endParaRPr sz="2000">
+            <a:endParaRPr sz="2000" dirty="0">
+              <a:highlight>
+                <a:srgbClr val="FFFF00"/>
+              </a:highlight>
               <a:latin typeface="Calibri"/>
               <a:cs typeface="Calibri"/>
             </a:endParaRPr>
@@ -10352,6 +11449,9 @@
             </a:pPr>
             <a:r>
               <a:rPr sz="2000" dirty="0">
+                <a:highlight>
+                  <a:srgbClr val="FFFF00"/>
+                </a:highlight>
                 <a:latin typeface="Calibri"/>
                 <a:cs typeface="Calibri"/>
               </a:rPr>
@@ -10359,6 +11459,9 @@
             </a:r>
             <a:r>
               <a:rPr sz="2000" spc="5" dirty="0">
+                <a:highlight>
+                  <a:srgbClr val="FFFF00"/>
+                </a:highlight>
                 <a:latin typeface="Calibri"/>
                 <a:cs typeface="Calibri"/>
               </a:rPr>
@@ -10366,6 +11469,9 @@
             </a:r>
             <a:r>
               <a:rPr sz="2000" dirty="0">
+                <a:highlight>
+                  <a:srgbClr val="FFFF00"/>
+                </a:highlight>
                 <a:latin typeface="Calibri"/>
                 <a:cs typeface="Calibri"/>
               </a:rPr>
@@ -10373,6 +11479,9 @@
             </a:r>
             <a:r>
               <a:rPr sz="2000" spc="5" dirty="0">
+                <a:highlight>
+                  <a:srgbClr val="FFFF00"/>
+                </a:highlight>
                 <a:latin typeface="Calibri"/>
                 <a:cs typeface="Calibri"/>
               </a:rPr>
@@ -10380,6 +11489,9 @@
             </a:r>
             <a:r>
               <a:rPr sz="2000" dirty="0">
+                <a:highlight>
+                  <a:srgbClr val="FFFF00"/>
+                </a:highlight>
                 <a:latin typeface="Calibri"/>
                 <a:cs typeface="Calibri"/>
               </a:rPr>
@@ -10387,6 +11499,9 @@
             </a:r>
             <a:r>
               <a:rPr sz="2000" spc="5" dirty="0">
+                <a:highlight>
+                  <a:srgbClr val="FFFF00"/>
+                </a:highlight>
                 <a:latin typeface="Calibri"/>
                 <a:cs typeface="Calibri"/>
               </a:rPr>
@@ -10394,6 +11509,9 @@
             </a:r>
             <a:r>
               <a:rPr sz="2000" dirty="0">
+                <a:highlight>
+                  <a:srgbClr val="FFFF00"/>
+                </a:highlight>
                 <a:latin typeface="Calibri"/>
                 <a:cs typeface="Calibri"/>
               </a:rPr>
@@ -10401,6 +11519,9 @@
             </a:r>
             <a:r>
               <a:rPr sz="2000" spc="-10" dirty="0">
+                <a:highlight>
+                  <a:srgbClr val="FFFF00"/>
+                </a:highlight>
                 <a:latin typeface="Calibri"/>
                 <a:cs typeface="Calibri"/>
               </a:rPr>
@@ -10408,6 +11529,9 @@
             </a:r>
             <a:r>
               <a:rPr sz="2000" spc="25" dirty="0">
+                <a:highlight>
+                  <a:srgbClr val="FFFF00"/>
+                </a:highlight>
                 <a:latin typeface="Calibri"/>
                 <a:cs typeface="Calibri"/>
               </a:rPr>
@@ -10415,6 +11539,9 @@
             </a:r>
             <a:r>
               <a:rPr sz="2000" spc="-10" dirty="0">
+                <a:highlight>
+                  <a:srgbClr val="FFFF00"/>
+                </a:highlight>
                 <a:latin typeface="Calibri"/>
                 <a:cs typeface="Calibri"/>
               </a:rPr>
@@ -10422,6 +11549,9 @@
             </a:r>
             <a:r>
               <a:rPr sz="2000" spc="-5" dirty="0">
+                <a:highlight>
+                  <a:srgbClr val="FFFF00"/>
+                </a:highlight>
                 <a:latin typeface="Calibri"/>
                 <a:cs typeface="Calibri"/>
               </a:rPr>
@@ -10429,6 +11559,9 @@
             </a:r>
             <a:r>
               <a:rPr sz="2000" spc="15" dirty="0">
+                <a:highlight>
+                  <a:srgbClr val="FFFF00"/>
+                </a:highlight>
                 <a:latin typeface="Calibri"/>
                 <a:cs typeface="Calibri"/>
               </a:rPr>
@@ -10436,6 +11569,9 @@
             </a:r>
             <a:r>
               <a:rPr sz="2000" dirty="0">
+                <a:highlight>
+                  <a:srgbClr val="FFFF00"/>
+                </a:highlight>
                 <a:latin typeface="Calibri"/>
                 <a:cs typeface="Calibri"/>
               </a:rPr>
@@ -10443,6 +11579,9 @@
             </a:r>
             <a:r>
               <a:rPr sz="2000" spc="-5" dirty="0">
+                <a:highlight>
+                  <a:srgbClr val="FFFF00"/>
+                </a:highlight>
                 <a:latin typeface="Calibri"/>
                 <a:cs typeface="Calibri"/>
               </a:rPr>
@@ -10450,6 +11589,9 @@
             </a:r>
             <a:r>
               <a:rPr sz="2000" dirty="0">
+                <a:highlight>
+                  <a:srgbClr val="FFFF00"/>
+                </a:highlight>
                 <a:latin typeface="Calibri"/>
                 <a:cs typeface="Calibri"/>
               </a:rPr>
@@ -10457,6 +11599,9 @@
             </a:r>
             <a:r>
               <a:rPr sz="2000" spc="-10" dirty="0">
+                <a:highlight>
+                  <a:srgbClr val="FFFF00"/>
+                </a:highlight>
                 <a:latin typeface="Calibri"/>
                 <a:cs typeface="Calibri"/>
               </a:rPr>
@@ -10464,6 +11609,9 @@
             </a:r>
             <a:r>
               <a:rPr sz="2000" spc="25" dirty="0">
+                <a:highlight>
+                  <a:srgbClr val="FFFF00"/>
+                </a:highlight>
                 <a:latin typeface="Calibri"/>
                 <a:cs typeface="Calibri"/>
               </a:rPr>
@@ -10471,6 +11619,9 @@
             </a:r>
             <a:r>
               <a:rPr sz="2000" spc="-95" dirty="0">
+                <a:highlight>
+                  <a:srgbClr val="FFFF00"/>
+                </a:highlight>
                 <a:latin typeface="Calibri"/>
                 <a:cs typeface="Calibri"/>
               </a:rPr>
@@ -10478,6 +11629,9 @@
             </a:r>
             <a:r>
               <a:rPr sz="2000" dirty="0">
+                <a:highlight>
+                  <a:srgbClr val="FFFF00"/>
+                </a:highlight>
                 <a:latin typeface="Calibri"/>
                 <a:cs typeface="Calibri"/>
               </a:rPr>
@@ -10485,6 +11639,9 @@
             </a:r>
             <a:r>
               <a:rPr sz="2000" spc="-10" dirty="0">
+                <a:highlight>
+                  <a:srgbClr val="FFFF00"/>
+                </a:highlight>
                 <a:latin typeface="Calibri"/>
                 <a:cs typeface="Calibri"/>
               </a:rPr>
@@ -10492,6 +11649,9 @@
             </a:r>
             <a:r>
               <a:rPr sz="2000" dirty="0">
+                <a:highlight>
+                  <a:srgbClr val="FFFF00"/>
+                </a:highlight>
                 <a:latin typeface="Calibri"/>
                 <a:cs typeface="Calibri"/>
               </a:rPr>
@@ -10499,6 +11659,9 @@
             </a:r>
             <a:r>
               <a:rPr sz="2000" spc="15" dirty="0">
+                <a:highlight>
+                  <a:srgbClr val="FFFF00"/>
+                </a:highlight>
                 <a:latin typeface="Calibri"/>
                 <a:cs typeface="Calibri"/>
               </a:rPr>
@@ -10506,6 +11669,9 @@
             </a:r>
             <a:r>
               <a:rPr sz="2000" spc="-5" dirty="0">
+                <a:highlight>
+                  <a:srgbClr val="FFFF00"/>
+                </a:highlight>
                 <a:latin typeface="Calibri"/>
                 <a:cs typeface="Calibri"/>
               </a:rPr>
@@ -10513,6 +11679,9 @@
             </a:r>
             <a:r>
               <a:rPr sz="2000" spc="5" dirty="0">
+                <a:highlight>
+                  <a:srgbClr val="FFFF00"/>
+                </a:highlight>
                 <a:latin typeface="Calibri"/>
                 <a:cs typeface="Calibri"/>
               </a:rPr>
@@ -10520,6 +11689,9 @@
             </a:r>
             <a:r>
               <a:rPr sz="2000" dirty="0">
+                <a:highlight>
+                  <a:srgbClr val="FFFF00"/>
+                </a:highlight>
                 <a:latin typeface="Calibri"/>
                 <a:cs typeface="Calibri"/>
               </a:rPr>
@@ -10527,6 +11699,9 @@
             </a:r>
             <a:r>
               <a:rPr sz="2000" spc="-440" dirty="0">
+                <a:highlight>
+                  <a:srgbClr val="FFFF00"/>
+                </a:highlight>
                 <a:latin typeface="Calibri"/>
                 <a:cs typeface="Calibri"/>
               </a:rPr>
@@ -10534,6 +11709,9 @@
             </a:r>
             <a:r>
               <a:rPr sz="2000" spc="-5" dirty="0">
+                <a:highlight>
+                  <a:srgbClr val="FFFF00"/>
+                </a:highlight>
                 <a:latin typeface="Calibri"/>
                 <a:cs typeface="Calibri"/>
               </a:rPr>
@@ -10541,6 +11719,9 @@
             </a:r>
             <a:r>
               <a:rPr sz="2000" spc="-10" dirty="0">
+                <a:highlight>
+                  <a:srgbClr val="FFFF00"/>
+                </a:highlight>
                 <a:latin typeface="Calibri"/>
                 <a:cs typeface="Calibri"/>
               </a:rPr>
@@ -10548,6 +11729,9 @@
             </a:r>
             <a:r>
               <a:rPr sz="2000" dirty="0">
+                <a:highlight>
+                  <a:srgbClr val="FFFF00"/>
+                </a:highlight>
                 <a:latin typeface="Calibri"/>
                 <a:cs typeface="Calibri"/>
               </a:rPr>
@@ -10555,6 +11739,9 @@
             </a:r>
             <a:r>
               <a:rPr sz="2000" spc="5" dirty="0">
+                <a:highlight>
+                  <a:srgbClr val="FFFF00"/>
+                </a:highlight>
                 <a:latin typeface="Calibri"/>
                 <a:cs typeface="Calibri"/>
               </a:rPr>
@@ -10562,12 +11749,18 @@
             </a:r>
             <a:r>
               <a:rPr sz="2000" spc="-5" dirty="0">
+                <a:highlight>
+                  <a:srgbClr val="FFFF00"/>
+                </a:highlight>
                 <a:latin typeface="Calibri"/>
                 <a:cs typeface="Calibri"/>
               </a:rPr>
               <a:t>introduced.</a:t>
             </a:r>
-            <a:endParaRPr sz="2000">
+            <a:endParaRPr sz="2000" dirty="0">
+              <a:highlight>
+                <a:srgbClr val="FFFF00"/>
+              </a:highlight>
               <a:latin typeface="Calibri"/>
               <a:cs typeface="Calibri"/>
             </a:endParaRPr>
@@ -10589,6 +11782,9 @@
             </a:pPr>
             <a:r>
               <a:rPr sz="2000" dirty="0">
+                <a:highlight>
+                  <a:srgbClr val="FFFF00"/>
+                </a:highlight>
                 <a:latin typeface="Calibri"/>
                 <a:cs typeface="Calibri"/>
               </a:rPr>
@@ -10596,6 +11792,9 @@
             </a:r>
             <a:r>
               <a:rPr sz="2000" spc="-25" dirty="0">
+                <a:highlight>
+                  <a:srgbClr val="FFFF00"/>
+                </a:highlight>
                 <a:latin typeface="Calibri"/>
                 <a:cs typeface="Calibri"/>
               </a:rPr>
@@ -10603,6 +11802,9 @@
             </a:r>
             <a:r>
               <a:rPr sz="2000" spc="-5" dirty="0">
+                <a:highlight>
+                  <a:srgbClr val="FFFF00"/>
+                </a:highlight>
                 <a:latin typeface="Calibri"/>
                 <a:cs typeface="Calibri"/>
               </a:rPr>
@@ -10610,6 +11812,9 @@
             </a:r>
             <a:r>
               <a:rPr sz="2000" spc="5" dirty="0">
+                <a:highlight>
+                  <a:srgbClr val="FFFF00"/>
+                </a:highlight>
                 <a:latin typeface="Calibri"/>
                 <a:cs typeface="Calibri"/>
               </a:rPr>
@@ -10617,6 +11822,9 @@
             </a:r>
             <a:r>
               <a:rPr sz="2000" spc="-15" dirty="0">
+                <a:highlight>
+                  <a:srgbClr val="FFFF00"/>
+                </a:highlight>
                 <a:latin typeface="Calibri"/>
                 <a:cs typeface="Calibri"/>
               </a:rPr>
@@ -10624,6 +11832,9 @@
             </a:r>
             <a:r>
               <a:rPr sz="2000" dirty="0">
+                <a:highlight>
+                  <a:srgbClr val="FFFF00"/>
+                </a:highlight>
                 <a:latin typeface="Calibri"/>
                 <a:cs typeface="Calibri"/>
               </a:rPr>
@@ -10631,6 +11842,9 @@
             </a:r>
             <a:r>
               <a:rPr sz="2000" spc="-5" dirty="0">
+                <a:highlight>
+                  <a:srgbClr val="FFFF00"/>
+                </a:highlight>
                 <a:latin typeface="Calibri"/>
                 <a:cs typeface="Calibri"/>
               </a:rPr>
@@ -10638,6 +11852,9 @@
             </a:r>
             <a:r>
               <a:rPr sz="2000" dirty="0">
+                <a:highlight>
+                  <a:srgbClr val="FFFF00"/>
+                </a:highlight>
                 <a:latin typeface="Calibri"/>
                 <a:cs typeface="Calibri"/>
               </a:rPr>
@@ -10645,6 +11862,9 @@
             </a:r>
             <a:r>
               <a:rPr sz="2000" spc="-10" dirty="0">
+                <a:highlight>
+                  <a:srgbClr val="FFFF00"/>
+                </a:highlight>
                 <a:latin typeface="Calibri"/>
                 <a:cs typeface="Calibri"/>
               </a:rPr>
@@ -10652,6 +11872,9 @@
             </a:r>
             <a:r>
               <a:rPr sz="2000" spc="-15" dirty="0">
+                <a:highlight>
+                  <a:srgbClr val="FFFF00"/>
+                </a:highlight>
                 <a:latin typeface="Calibri"/>
                 <a:cs typeface="Calibri"/>
               </a:rPr>
@@ -10659,6 +11882,9 @@
             </a:r>
             <a:r>
               <a:rPr sz="2000" spc="20" dirty="0">
+                <a:highlight>
+                  <a:srgbClr val="FFFF00"/>
+                </a:highlight>
                 <a:latin typeface="Calibri"/>
                 <a:cs typeface="Calibri"/>
               </a:rPr>
@@ -10666,6 +11892,9 @@
             </a:r>
             <a:r>
               <a:rPr sz="2000" spc="-5" dirty="0">
+                <a:highlight>
+                  <a:srgbClr val="FFFF00"/>
+                </a:highlight>
                 <a:latin typeface="Calibri"/>
                 <a:cs typeface="Calibri"/>
               </a:rPr>
@@ -10673,6 +11902,9 @@
             </a:r>
             <a:r>
               <a:rPr sz="2000" dirty="0">
+                <a:highlight>
+                  <a:srgbClr val="FFFF00"/>
+                </a:highlight>
                 <a:latin typeface="Calibri"/>
                 <a:cs typeface="Calibri"/>
               </a:rPr>
@@ -10680,6 +11912,9 @@
             </a:r>
             <a:r>
               <a:rPr sz="2000" spc="5" dirty="0">
+                <a:highlight>
+                  <a:srgbClr val="FFFF00"/>
+                </a:highlight>
                 <a:latin typeface="Calibri"/>
                 <a:cs typeface="Calibri"/>
               </a:rPr>
@@ -10687,6 +11922,9 @@
             </a:r>
             <a:r>
               <a:rPr sz="2000" spc="-15" dirty="0">
+                <a:highlight>
+                  <a:srgbClr val="FFFF00"/>
+                </a:highlight>
                 <a:latin typeface="Calibri"/>
                 <a:cs typeface="Calibri"/>
               </a:rPr>
@@ -10694,6 +11932,9 @@
             </a:r>
             <a:r>
               <a:rPr sz="2000" dirty="0">
+                <a:highlight>
+                  <a:srgbClr val="FFFF00"/>
+                </a:highlight>
                 <a:latin typeface="Calibri"/>
                 <a:cs typeface="Calibri"/>
               </a:rPr>
@@ -10701,6 +11942,9 @@
             </a:r>
             <a:r>
               <a:rPr sz="2000" spc="-5" dirty="0">
+                <a:highlight>
+                  <a:srgbClr val="FFFF00"/>
+                </a:highlight>
                 <a:latin typeface="Calibri"/>
                 <a:cs typeface="Calibri"/>
               </a:rPr>
@@ -10708,6 +11952,9 @@
             </a:r>
             <a:r>
               <a:rPr sz="2000" spc="-10" dirty="0">
+                <a:highlight>
+                  <a:srgbClr val="FFFF00"/>
+                </a:highlight>
                 <a:latin typeface="Calibri"/>
                 <a:cs typeface="Calibri"/>
               </a:rPr>
@@ -10715,6 +11962,9 @@
             </a:r>
             <a:r>
               <a:rPr sz="2000" spc="20" dirty="0">
+                <a:highlight>
+                  <a:srgbClr val="FFFF00"/>
+                </a:highlight>
                 <a:latin typeface="Calibri"/>
                 <a:cs typeface="Calibri"/>
               </a:rPr>
@@ -10722,6 +11972,9 @@
             </a:r>
             <a:r>
               <a:rPr sz="2000" spc="-5" dirty="0">
+                <a:highlight>
+                  <a:srgbClr val="FFFF00"/>
+                </a:highlight>
                 <a:latin typeface="Calibri"/>
                 <a:cs typeface="Calibri"/>
               </a:rPr>
@@ -10729,6 +11982,9 @@
             </a:r>
             <a:r>
               <a:rPr sz="2000" dirty="0">
+                <a:highlight>
+                  <a:srgbClr val="FFFF00"/>
+                </a:highlight>
                 <a:latin typeface="Calibri"/>
                 <a:cs typeface="Calibri"/>
               </a:rPr>
@@ -10736,6 +11992,9 @@
             </a:r>
             <a:r>
               <a:rPr sz="2000" spc="-10" dirty="0">
+                <a:highlight>
+                  <a:srgbClr val="FFFF00"/>
+                </a:highlight>
                 <a:latin typeface="Calibri"/>
                 <a:cs typeface="Calibri"/>
               </a:rPr>
@@ -10743,6 +12002,9 @@
             </a:r>
             <a:r>
               <a:rPr sz="2000" dirty="0">
+                <a:highlight>
+                  <a:srgbClr val="FFFF00"/>
+                </a:highlight>
                 <a:latin typeface="Calibri"/>
                 <a:cs typeface="Calibri"/>
               </a:rPr>
@@ -10750,12 +12012,18 @@
             </a:r>
             <a:r>
               <a:rPr sz="2000" spc="-5" dirty="0">
+                <a:highlight>
+                  <a:srgbClr val="FFFF00"/>
+                </a:highlight>
                 <a:latin typeface="Calibri"/>
                 <a:cs typeface="Calibri"/>
               </a:rPr>
               <a:t>introduced.</a:t>
             </a:r>
-            <a:endParaRPr sz="2000">
+            <a:endParaRPr sz="2000" dirty="0">
+              <a:highlight>
+                <a:srgbClr val="FFFF00"/>
+              </a:highlight>
               <a:latin typeface="Calibri"/>
               <a:cs typeface="Calibri"/>
             </a:endParaRPr>
@@ -10777,6 +12045,9 @@
             </a:pPr>
             <a:r>
               <a:rPr sz="2000" dirty="0">
+                <a:highlight>
+                  <a:srgbClr val="FFFF00"/>
+                </a:highlight>
                 <a:latin typeface="Calibri"/>
                 <a:cs typeface="Calibri"/>
               </a:rPr>
@@ -10784,6 +12055,9 @@
             </a:r>
             <a:r>
               <a:rPr sz="2000" spc="5" dirty="0">
+                <a:highlight>
+                  <a:srgbClr val="FFFF00"/>
+                </a:highlight>
                 <a:latin typeface="Calibri"/>
                 <a:cs typeface="Calibri"/>
               </a:rPr>
@@ -10791,6 +12065,9 @@
             </a:r>
             <a:r>
               <a:rPr sz="2000" dirty="0">
+                <a:highlight>
+                  <a:srgbClr val="FFFF00"/>
+                </a:highlight>
                 <a:latin typeface="Calibri"/>
                 <a:cs typeface="Calibri"/>
               </a:rPr>
@@ -10798,6 +12075,9 @@
             </a:r>
             <a:r>
               <a:rPr sz="2000" spc="-20" dirty="0">
+                <a:highlight>
+                  <a:srgbClr val="FFFF00"/>
+                </a:highlight>
                 <a:latin typeface="Calibri"/>
                 <a:cs typeface="Calibri"/>
               </a:rPr>
@@ -10805,6 +12085,9 @@
             </a:r>
             <a:r>
               <a:rPr sz="2000" spc="-10" dirty="0">
+                <a:highlight>
+                  <a:srgbClr val="FFFF00"/>
+                </a:highlight>
                 <a:latin typeface="Calibri"/>
                 <a:cs typeface="Calibri"/>
               </a:rPr>
@@ -10812,6 +12095,9 @@
             </a:r>
             <a:r>
               <a:rPr sz="2000" spc="-25" dirty="0">
+                <a:highlight>
+                  <a:srgbClr val="FFFF00"/>
+                </a:highlight>
                 <a:latin typeface="Calibri"/>
                 <a:cs typeface="Calibri"/>
               </a:rPr>
@@ -10819,6 +12105,9 @@
             </a:r>
             <a:r>
               <a:rPr sz="2000" spc="-15" dirty="0">
+                <a:highlight>
+                  <a:srgbClr val="FFFF00"/>
+                </a:highlight>
                 <a:latin typeface="Calibri"/>
                 <a:cs typeface="Calibri"/>
               </a:rPr>
@@ -10826,6 +12115,9 @@
             </a:r>
             <a:r>
               <a:rPr sz="2000" spc="-5" dirty="0">
+                <a:highlight>
+                  <a:srgbClr val="FFFF00"/>
+                </a:highlight>
                 <a:latin typeface="Calibri"/>
                 <a:cs typeface="Calibri"/>
               </a:rPr>
@@ -10833,6 +12125,9 @@
             </a:r>
             <a:r>
               <a:rPr sz="2000" dirty="0">
+                <a:highlight>
+                  <a:srgbClr val="FFFF00"/>
+                </a:highlight>
                 <a:latin typeface="Calibri"/>
                 <a:cs typeface="Calibri"/>
               </a:rPr>
@@ -10840,6 +12135,9 @@
             </a:r>
             <a:r>
               <a:rPr sz="2000" spc="5" dirty="0">
+                <a:highlight>
+                  <a:srgbClr val="FFFF00"/>
+                </a:highlight>
                 <a:latin typeface="Calibri"/>
                 <a:cs typeface="Calibri"/>
               </a:rPr>
@@ -10847,6 +12145,9 @@
             </a:r>
             <a:r>
               <a:rPr sz="2000" spc="-5" dirty="0">
+                <a:highlight>
+                  <a:srgbClr val="FFFF00"/>
+                </a:highlight>
                 <a:latin typeface="Calibri"/>
                 <a:cs typeface="Calibri"/>
               </a:rPr>
@@ -10854,6 +12155,9 @@
             </a:r>
             <a:r>
               <a:rPr sz="2000" dirty="0">
+                <a:highlight>
+                  <a:srgbClr val="FFFF00"/>
+                </a:highlight>
                 <a:latin typeface="Calibri"/>
                 <a:cs typeface="Calibri"/>
               </a:rPr>
@@ -10861,6 +12165,9 @@
             </a:r>
             <a:r>
               <a:rPr sz="2000" spc="-5" dirty="0">
+                <a:highlight>
+                  <a:srgbClr val="FFFF00"/>
+                </a:highlight>
                 <a:latin typeface="Calibri"/>
                 <a:cs typeface="Calibri"/>
               </a:rPr>
@@ -10868,6 +12175,9 @@
             </a:r>
             <a:r>
               <a:rPr sz="2000" spc="35" dirty="0">
+                <a:highlight>
+                  <a:srgbClr val="FFFF00"/>
+                </a:highlight>
                 <a:latin typeface="Calibri"/>
                 <a:cs typeface="Calibri"/>
               </a:rPr>
@@ -10875,6 +12185,9 @@
             </a:r>
             <a:r>
               <a:rPr sz="2000" dirty="0">
+                <a:highlight>
+                  <a:srgbClr val="FFFF00"/>
+                </a:highlight>
                 <a:latin typeface="Calibri"/>
                 <a:cs typeface="Calibri"/>
               </a:rPr>
@@ -10882,6 +12195,9 @@
             </a:r>
             <a:r>
               <a:rPr sz="2000" spc="15" dirty="0">
+                <a:highlight>
+                  <a:srgbClr val="FFFF00"/>
+                </a:highlight>
                 <a:latin typeface="Calibri"/>
                 <a:cs typeface="Calibri"/>
               </a:rPr>
@@ -10889,6 +12205,9 @@
             </a:r>
             <a:r>
               <a:rPr sz="2000" spc="-5" dirty="0">
+                <a:highlight>
+                  <a:srgbClr val="FFFF00"/>
+                </a:highlight>
                 <a:latin typeface="Calibri"/>
                 <a:cs typeface="Calibri"/>
               </a:rPr>
@@ -10896,6 +12215,9 @@
             </a:r>
             <a:r>
               <a:rPr sz="2000" spc="5" dirty="0">
+                <a:highlight>
+                  <a:srgbClr val="FFFF00"/>
+                </a:highlight>
                 <a:latin typeface="Calibri"/>
                 <a:cs typeface="Calibri"/>
               </a:rPr>
@@ -10903,6 +12225,9 @@
             </a:r>
             <a:r>
               <a:rPr sz="2000" spc="-5" dirty="0">
+                <a:highlight>
+                  <a:srgbClr val="FFFF00"/>
+                </a:highlight>
                 <a:latin typeface="Calibri"/>
                 <a:cs typeface="Calibri"/>
               </a:rPr>
@@ -10910,6 +12235,9 @@
             </a:r>
             <a:r>
               <a:rPr sz="2000" dirty="0">
+                <a:highlight>
+                  <a:srgbClr val="FFFF00"/>
+                </a:highlight>
                 <a:latin typeface="Calibri"/>
                 <a:cs typeface="Calibri"/>
               </a:rPr>
@@ -10917,6 +12245,9 @@
             </a:r>
             <a:r>
               <a:rPr sz="2000" spc="-5" dirty="0">
+                <a:highlight>
+                  <a:srgbClr val="FFFF00"/>
+                </a:highlight>
                 <a:latin typeface="Calibri"/>
                 <a:cs typeface="Calibri"/>
               </a:rPr>
@@ -10924,6 +12255,9 @@
             </a:r>
             <a:r>
               <a:rPr sz="2000" dirty="0">
+                <a:highlight>
+                  <a:srgbClr val="FFFF00"/>
+                </a:highlight>
                 <a:latin typeface="Calibri"/>
                 <a:cs typeface="Calibri"/>
               </a:rPr>
@@ -10931,6 +12265,9 @@
             </a:r>
             <a:r>
               <a:rPr sz="2000" spc="-15" dirty="0">
+                <a:highlight>
+                  <a:srgbClr val="FFFF00"/>
+                </a:highlight>
                 <a:latin typeface="Calibri"/>
                 <a:cs typeface="Calibri"/>
               </a:rPr>
@@ -10938,6 +12275,9 @@
             </a:r>
             <a:r>
               <a:rPr sz="2000" spc="20" dirty="0">
+                <a:highlight>
+                  <a:srgbClr val="FFFF00"/>
+                </a:highlight>
                 <a:latin typeface="Calibri"/>
                 <a:cs typeface="Calibri"/>
               </a:rPr>
@@ -10945,12 +12285,18 @@
             </a:r>
             <a:r>
               <a:rPr sz="2000" spc="-5" dirty="0">
+                <a:highlight>
+                  <a:srgbClr val="FFFF00"/>
+                </a:highlight>
                 <a:latin typeface="Calibri"/>
                 <a:cs typeface="Calibri"/>
               </a:rPr>
               <a:t>of</a:t>
             </a:r>
-            <a:endParaRPr sz="2000">
+            <a:endParaRPr sz="2000" dirty="0">
+              <a:highlight>
+                <a:srgbClr val="FFFF00"/>
+              </a:highlight>
               <a:latin typeface="Calibri"/>
               <a:cs typeface="Calibri"/>
             </a:endParaRPr>
@@ -10963,6 +12309,9 @@
             </a:pPr>
             <a:r>
               <a:rPr sz="2000" dirty="0">
+                <a:highlight>
+                  <a:srgbClr val="FFFF00"/>
+                </a:highlight>
                 <a:latin typeface="Calibri"/>
                 <a:cs typeface="Calibri"/>
               </a:rPr>
@@ -10970,6 +12319,9 @@
             </a:r>
             <a:r>
               <a:rPr sz="2000" spc="-10" dirty="0">
+                <a:highlight>
+                  <a:srgbClr val="FFFF00"/>
+                </a:highlight>
                 <a:latin typeface="Calibri"/>
                 <a:cs typeface="Calibri"/>
               </a:rPr>
@@ -10977,6 +12329,9 @@
             </a:r>
             <a:r>
               <a:rPr sz="2000" spc="-15" dirty="0">
+                <a:highlight>
+                  <a:srgbClr val="FFFF00"/>
+                </a:highlight>
                 <a:latin typeface="Calibri"/>
                 <a:cs typeface="Calibri"/>
               </a:rPr>
@@ -10984,6 +12339,9 @@
             </a:r>
             <a:r>
               <a:rPr sz="2000" spc="10" dirty="0">
+                <a:highlight>
+                  <a:srgbClr val="FFFF00"/>
+                </a:highlight>
                 <a:latin typeface="Calibri"/>
                 <a:cs typeface="Calibri"/>
               </a:rPr>
@@ -10991,6 +12349,9 @@
             </a:r>
             <a:r>
               <a:rPr sz="2000" spc="-10" dirty="0">
+                <a:highlight>
+                  <a:srgbClr val="FFFF00"/>
+                </a:highlight>
                 <a:latin typeface="Calibri"/>
                 <a:cs typeface="Calibri"/>
               </a:rPr>
@@ -10998,6 +12359,9 @@
             </a:r>
             <a:r>
               <a:rPr sz="2000" spc="15" dirty="0">
+                <a:highlight>
+                  <a:srgbClr val="FFFF00"/>
+                </a:highlight>
                 <a:latin typeface="Calibri"/>
                 <a:cs typeface="Calibri"/>
               </a:rPr>
@@ -11005,12 +12369,18 @@
             </a:r>
             <a:r>
               <a:rPr sz="2000" spc="-5" dirty="0">
+                <a:highlight>
+                  <a:srgbClr val="FFFF00"/>
+                </a:highlight>
                 <a:latin typeface="Calibri"/>
                 <a:cs typeface="Calibri"/>
               </a:rPr>
               <a:t>becomes small.</a:t>
             </a:r>
-            <a:endParaRPr sz="2000">
+            <a:endParaRPr sz="2000" dirty="0">
+              <a:highlight>
+                <a:srgbClr val="FFFF00"/>
+              </a:highlight>
               <a:latin typeface="Calibri"/>
               <a:cs typeface="Calibri"/>
             </a:endParaRPr>
@@ -11121,7 +12491,7 @@
               </a:rPr>
               <a:t>ranges.</a:t>
             </a:r>
-            <a:endParaRPr sz="2000">
+            <a:endParaRPr sz="2000" dirty="0">
               <a:latin typeface="Calibri"/>
               <a:cs typeface="Calibri"/>
             </a:endParaRPr>
@@ -11358,7 +12728,7 @@
               </a:rPr>
               <a:t>faster.</a:t>
             </a:r>
-            <a:endParaRPr sz="2000">
+            <a:endParaRPr sz="2000" dirty="0">
               <a:latin typeface="Calibri"/>
               <a:cs typeface="Calibri"/>
             </a:endParaRPr>
@@ -11380,6 +12750,9 @@
             </a:pPr>
             <a:r>
               <a:rPr sz="2000" spc="-5" dirty="0">
+                <a:highlight>
+                  <a:srgbClr val="FFFF00"/>
+                </a:highlight>
                 <a:latin typeface="Calibri"/>
                 <a:cs typeface="Calibri"/>
               </a:rPr>
@@ -11387,6 +12760,9 @@
             </a:r>
             <a:r>
               <a:rPr sz="2000" spc="10" dirty="0">
+                <a:highlight>
+                  <a:srgbClr val="FFFF00"/>
+                </a:highlight>
                 <a:latin typeface="Calibri"/>
                 <a:cs typeface="Calibri"/>
               </a:rPr>
@@ -11394,6 +12770,9 @@
             </a:r>
             <a:r>
               <a:rPr sz="2000" dirty="0">
+                <a:highlight>
+                  <a:srgbClr val="FFFF00"/>
+                </a:highlight>
                 <a:latin typeface="Calibri"/>
                 <a:cs typeface="Calibri"/>
               </a:rPr>
@@ -11401,6 +12780,9 @@
             </a:r>
             <a:r>
               <a:rPr sz="2000" spc="-15" dirty="0">
+                <a:highlight>
+                  <a:srgbClr val="FFFF00"/>
+                </a:highlight>
                 <a:latin typeface="Calibri"/>
                 <a:cs typeface="Calibri"/>
               </a:rPr>
@@ -11408,6 +12790,9 @@
             </a:r>
             <a:r>
               <a:rPr sz="2000" spc="-5" dirty="0">
+                <a:highlight>
+                  <a:srgbClr val="FFFF00"/>
+                </a:highlight>
                 <a:latin typeface="Calibri"/>
                 <a:cs typeface="Calibri"/>
               </a:rPr>
@@ -11415,6 +12800,9 @@
             </a:r>
             <a:r>
               <a:rPr sz="2000" dirty="0">
+                <a:highlight>
+                  <a:srgbClr val="FFFF00"/>
+                </a:highlight>
                 <a:latin typeface="Calibri"/>
                 <a:cs typeface="Calibri"/>
               </a:rPr>
@@ -11422,6 +12810,9 @@
             </a:r>
             <a:r>
               <a:rPr sz="2000" spc="5" dirty="0">
+                <a:highlight>
+                  <a:srgbClr val="FFFF00"/>
+                </a:highlight>
                 <a:latin typeface="Calibri"/>
                 <a:cs typeface="Calibri"/>
               </a:rPr>
@@ -11429,6 +12820,9 @@
             </a:r>
             <a:r>
               <a:rPr sz="2000" dirty="0">
+                <a:highlight>
+                  <a:srgbClr val="FFFF00"/>
+                </a:highlight>
                 <a:latin typeface="Calibri"/>
                 <a:cs typeface="Calibri"/>
               </a:rPr>
@@ -11436,6 +12830,9 @@
             </a:r>
             <a:r>
               <a:rPr sz="2000" spc="5" dirty="0">
+                <a:highlight>
+                  <a:srgbClr val="FFFF00"/>
+                </a:highlight>
                 <a:latin typeface="Calibri"/>
                 <a:cs typeface="Calibri"/>
               </a:rPr>
@@ -11443,6 +12840,9 @@
             </a:r>
             <a:r>
               <a:rPr sz="2000" spc="-10" dirty="0">
+                <a:highlight>
+                  <a:srgbClr val="FFFF00"/>
+                </a:highlight>
                 <a:latin typeface="Calibri"/>
                 <a:cs typeface="Calibri"/>
               </a:rPr>
@@ -11450,6 +12850,9 @@
             </a:r>
             <a:r>
               <a:rPr sz="2000" spc="25" dirty="0">
+                <a:highlight>
+                  <a:srgbClr val="FFFF00"/>
+                </a:highlight>
                 <a:latin typeface="Calibri"/>
                 <a:cs typeface="Calibri"/>
               </a:rPr>
@@ -11457,6 +12860,9 @@
             </a:r>
             <a:r>
               <a:rPr sz="2000" dirty="0">
+                <a:highlight>
+                  <a:srgbClr val="FFFF00"/>
+                </a:highlight>
                 <a:latin typeface="Calibri"/>
                 <a:cs typeface="Calibri"/>
               </a:rPr>
@@ -11464,6 +12870,9 @@
             </a:r>
             <a:r>
               <a:rPr sz="2000" spc="-15" dirty="0">
+                <a:highlight>
+                  <a:srgbClr val="FFFF00"/>
+                </a:highlight>
                 <a:latin typeface="Calibri"/>
                 <a:cs typeface="Calibri"/>
               </a:rPr>
@@ -11471,6 +12880,9 @@
             </a:r>
             <a:r>
               <a:rPr sz="2000" dirty="0">
+                <a:highlight>
+                  <a:srgbClr val="FFFF00"/>
+                </a:highlight>
                 <a:latin typeface="Calibri"/>
                 <a:cs typeface="Calibri"/>
               </a:rPr>
@@ -11478,6 +12890,9 @@
             </a:r>
             <a:r>
               <a:rPr sz="2000" spc="5" dirty="0">
+                <a:highlight>
+                  <a:srgbClr val="FFFF00"/>
+                </a:highlight>
                 <a:latin typeface="Calibri"/>
                 <a:cs typeface="Calibri"/>
               </a:rPr>
@@ -11485,6 +12900,9 @@
             </a:r>
             <a:r>
               <a:rPr sz="2000" spc="-15" dirty="0">
+                <a:highlight>
+                  <a:srgbClr val="FFFF00"/>
+                </a:highlight>
                 <a:latin typeface="Calibri"/>
                 <a:cs typeface="Calibri"/>
               </a:rPr>
@@ -11492,6 +12910,9 @@
             </a:r>
             <a:r>
               <a:rPr sz="2000" spc="5" dirty="0">
+                <a:highlight>
+                  <a:srgbClr val="FFFF00"/>
+                </a:highlight>
                 <a:latin typeface="Calibri"/>
                 <a:cs typeface="Calibri"/>
               </a:rPr>
@@ -11499,6 +12920,9 @@
             </a:r>
             <a:r>
               <a:rPr sz="2000" spc="-5" dirty="0">
+                <a:highlight>
+                  <a:srgbClr val="FFFF00"/>
+                </a:highlight>
                 <a:latin typeface="Calibri"/>
                 <a:cs typeface="Calibri"/>
               </a:rPr>
@@ -11506,6 +12930,9 @@
             </a:r>
             <a:r>
               <a:rPr sz="2000" spc="20" dirty="0">
+                <a:highlight>
+                  <a:srgbClr val="FFFF00"/>
+                </a:highlight>
                 <a:latin typeface="Calibri"/>
                 <a:cs typeface="Calibri"/>
               </a:rPr>
@@ -11513,6 +12940,9 @@
             </a:r>
             <a:r>
               <a:rPr sz="2000" spc="-15" dirty="0">
+                <a:highlight>
+                  <a:srgbClr val="FFFF00"/>
+                </a:highlight>
                 <a:latin typeface="Calibri"/>
                 <a:cs typeface="Calibri"/>
               </a:rPr>
@@ -11520,6 +12950,9 @@
             </a:r>
             <a:r>
               <a:rPr sz="2000" spc="10" dirty="0">
+                <a:highlight>
+                  <a:srgbClr val="FFFF00"/>
+                </a:highlight>
                 <a:latin typeface="Calibri"/>
                 <a:cs typeface="Calibri"/>
               </a:rPr>
@@ -11527,6 +12960,9 @@
             </a:r>
             <a:r>
               <a:rPr sz="2000" dirty="0">
+                <a:highlight>
+                  <a:srgbClr val="FFFF00"/>
+                </a:highlight>
                 <a:latin typeface="Calibri"/>
                 <a:cs typeface="Calibri"/>
               </a:rPr>
@@ -11534,6 +12970,9 @@
             </a:r>
             <a:r>
               <a:rPr sz="2000" spc="10" dirty="0">
+                <a:highlight>
+                  <a:srgbClr val="FFFF00"/>
+                </a:highlight>
                 <a:latin typeface="Calibri"/>
                 <a:cs typeface="Calibri"/>
               </a:rPr>
@@ -11541,6 +12980,9 @@
             </a:r>
             <a:r>
               <a:rPr sz="2000" dirty="0">
+                <a:highlight>
+                  <a:srgbClr val="FFFF00"/>
+                </a:highlight>
                 <a:latin typeface="Calibri"/>
                 <a:cs typeface="Calibri"/>
               </a:rPr>
@@ -11548,6 +12990,9 @@
             </a:r>
             <a:r>
               <a:rPr sz="2000" spc="-5" dirty="0">
+                <a:highlight>
+                  <a:srgbClr val="FFFF00"/>
+                </a:highlight>
                 <a:latin typeface="Calibri"/>
                 <a:cs typeface="Calibri"/>
               </a:rPr>
@@ -11555,6 +13000,9 @@
             </a:r>
             <a:r>
               <a:rPr sz="2000" dirty="0">
+                <a:highlight>
+                  <a:srgbClr val="FFFF00"/>
+                </a:highlight>
                 <a:latin typeface="Calibri"/>
                 <a:cs typeface="Calibri"/>
               </a:rPr>
@@ -11562,6 +13010,9 @@
             </a:r>
             <a:r>
               <a:rPr sz="2000" spc="-10" dirty="0">
+                <a:highlight>
+                  <a:srgbClr val="FFFF00"/>
+                </a:highlight>
                 <a:latin typeface="Calibri"/>
                 <a:cs typeface="Calibri"/>
               </a:rPr>
@@ -11569,6 +13020,9 @@
             </a:r>
             <a:r>
               <a:rPr sz="2000" dirty="0">
+                <a:highlight>
+                  <a:srgbClr val="FFFF00"/>
+                </a:highlight>
                 <a:latin typeface="Calibri"/>
                 <a:cs typeface="Calibri"/>
               </a:rPr>
@@ -11576,6 +13030,9 @@
             </a:r>
             <a:r>
               <a:rPr sz="2000" spc="-5" dirty="0">
+                <a:highlight>
+                  <a:srgbClr val="FFFF00"/>
+                </a:highlight>
                 <a:latin typeface="Calibri"/>
                 <a:cs typeface="Calibri"/>
               </a:rPr>
@@ -11583,6 +13040,9 @@
             </a:r>
             <a:r>
               <a:rPr sz="2000" spc="-434" dirty="0">
+                <a:highlight>
+                  <a:srgbClr val="FFFF00"/>
+                </a:highlight>
                 <a:latin typeface="Calibri"/>
                 <a:cs typeface="Calibri"/>
               </a:rPr>
@@ -11590,15 +13050,14 @@
             </a:r>
             <a:r>
               <a:rPr sz="2000" dirty="0">
+                <a:highlight>
+                  <a:srgbClr val="FFFF00"/>
+                </a:highlight>
                 <a:latin typeface="Calibri"/>
                 <a:cs typeface="Calibri"/>
               </a:rPr>
               <a:t>disk).</a:t>
             </a:r>
-            <a:endParaRPr sz="2000">
-              <a:latin typeface="Calibri"/>
-              <a:cs typeface="Calibri"/>
-            </a:endParaRPr>
           </a:p>
         </p:txBody>
       </p:sp>
@@ -13069,25 +14528,41 @@
           </a:p>
           <a:p>
             <a:r>
-              <a:rPr lang="en-US" dirty="0"/>
+              <a:rPr lang="en-US" dirty="0">
+                <a:highlight>
+                  <a:srgbClr val="FFFF00"/>
+                </a:highlight>
+              </a:rPr>
               <a:t>As the size of the database grows, so does the size of the indices. </a:t>
             </a:r>
           </a:p>
           <a:p>
             <a:r>
-              <a:rPr lang="en-US" dirty="0"/>
+              <a:rPr lang="en-US" dirty="0">
+                <a:highlight>
+                  <a:srgbClr val="FFFF00"/>
+                </a:highlight>
+              </a:rPr>
               <a:t>There is an immense need to keep the index records in the main memory so as to speed up the search operations. </a:t>
             </a:r>
           </a:p>
           <a:p>
             <a:r>
-              <a:rPr lang="en-US" dirty="0"/>
+              <a:rPr lang="en-US" dirty="0">
+                <a:highlight>
+                  <a:srgbClr val="FFFF00"/>
+                </a:highlight>
+              </a:rPr>
               <a:t>If single-level index is used, then a large size index cannot be kept in memory which leads to multiple disk accesses.</a:t>
             </a:r>
           </a:p>
           <a:p>
             <a:r>
-              <a:rPr lang="en-US" dirty="0"/>
+              <a:rPr lang="en-US" dirty="0">
+                <a:highlight>
+                  <a:srgbClr val="FFFF00"/>
+                </a:highlight>
+              </a:rPr>
               <a:t>Multi-level Index helps in breaking down the index into several smaller indices in order to make the outermost level so small that it can be saved in a single disk block, which can easily be accommodated anywhere in the main memory.</a:t>
             </a:r>
             <a:br>
@@ -13107,13 +14582,6 @@
   <p:clrMapOvr>
     <a:masterClrMapping/>
   </p:clrMapOvr>
-  <p:timing>
-    <p:tnLst>
-      <p:par>
-        <p:cTn id="1" dur="indefinite" restart="never" nodeType="tmRoot"/>
-      </p:par>
-    </p:tnLst>
-  </p:timing>
 </p:sld>
 </file>
 
@@ -13227,13 +14695,6 @@
   <p:clrMapOvr>
     <a:masterClrMapping/>
   </p:clrMapOvr>
-  <p:timing>
-    <p:tnLst>
-      <p:par>
-        <p:cTn id="1" dur="indefinite" restart="never" nodeType="tmRoot"/>
-      </p:par>
-    </p:tnLst>
-  </p:timing>
 </p:sld>
 </file>
 
@@ -13347,13 +14808,6 @@
   <p:clrMapOvr>
     <a:masterClrMapping/>
   </p:clrMapOvr>
-  <p:timing>
-    <p:tnLst>
-      <p:par>
-        <p:cTn id="1" dur="indefinite" restart="never" nodeType="tmRoot"/>
-      </p:par>
-    </p:tnLst>
-  </p:timing>
 </p:sld>
 </file>
 
@@ -14161,6 +15615,9 @@
                   <a:srgbClr val="242424"/>
                 </a:solidFill>
                 <a:effectLst/>
+                <a:highlight>
+                  <a:srgbClr val="FFFF00"/>
+                </a:highlight>
                 <a:latin typeface="source-serif-pro"/>
               </a:rPr>
               <a:t>A B-tree is a data structure that provides sorted data and allows searches, sequential access, attachments and removals in sorted order.</a:t>
@@ -14171,12 +15628,19 @@
                   <a:srgbClr val="242424"/>
                 </a:solidFill>
                 <a:effectLst/>
+                <a:highlight>
+                  <a:srgbClr val="FFFF00"/>
+                </a:highlight>
                 <a:latin typeface="source-serif-pro"/>
               </a:rPr>
               <a:t> </a:t>
             </a:r>
             <a:r>
-              <a:rPr lang="en-US" dirty="0"/>
+              <a:rPr lang="en-US" dirty="0">
+                <a:highlight>
+                  <a:srgbClr val="FFFF00"/>
+                </a:highlight>
+              </a:rPr>
               <a:t>. </a:t>
             </a:r>
           </a:p>
@@ -14193,6 +15657,9 @@
                   <a:srgbClr val="242424"/>
                 </a:solidFill>
                 <a:effectLst/>
+                <a:highlight>
+                  <a:srgbClr val="FFFF00"/>
+                </a:highlight>
                 <a:latin typeface="source-serif-pro"/>
               </a:rPr>
               <a:t>They are </a:t>
@@ -14203,6 +15670,9 @@
                   <a:srgbClr val="242424"/>
                 </a:solidFill>
                 <a:effectLst/>
+                <a:highlight>
+                  <a:srgbClr val="FFFF00"/>
+                </a:highlight>
                 <a:latin typeface="source-serif-pro"/>
               </a:rPr>
               <a:t>self-balancing</a:t>
@@ -14213,22 +15683,45 @@
                   <a:srgbClr val="242424"/>
                 </a:solidFill>
                 <a:effectLst/>
+                <a:highlight>
+                  <a:srgbClr val="FFFF00"/>
+                </a:highlight>
                 <a:latin typeface="source-serif-pro"/>
               </a:rPr>
               <a:t>, meaning all leaf nodes (nodes at the bottom level) are at the same depth.</a:t>
             </a:r>
-            <a:endParaRPr lang="en-US" dirty="0"/>
+            <a:endParaRPr lang="en-US" dirty="0">
+              <a:highlight>
+                <a:srgbClr val="FFFF00"/>
+              </a:highlight>
+            </a:endParaRPr>
+          </a:p>
+          <a:p>
+            <a:r>
+              <a:rPr lang="en-US" dirty="0">
+                <a:highlight>
+                  <a:srgbClr val="FFFF00"/>
+                </a:highlight>
+              </a:rPr>
+              <a:t>In the B-tree data is sorted in a specific order, with the lowest value on the left and the highest value on the right.</a:t>
+            </a:r>
           </a:p>
           <a:p>
             <a:r>
               <a:rPr lang="en-US" dirty="0"/>
-              <a:t>In the B-tree data is sorted in a specific order, with the lowest value on the left and the highest value on the right.</a:t>
-            </a:r>
-          </a:p>
-          <a:p>
+              <a:t>If a single node has </a:t>
+            </a:r>
+            <a:r>
+              <a:rPr lang="en-US" dirty="0">
+                <a:highlight>
+                  <a:srgbClr val="FFFF00"/>
+                </a:highlight>
+              </a:rPr>
+              <a:t>“n” number of keys, then it can have maximum “n+1”</a:t>
+            </a:r>
             <a:r>
               <a:rPr lang="en-US" dirty="0"/>
-              <a:t>If a single node has “n” number of keys, then it can have maximum “n+1” child nodes.</a:t>
+              <a:t> child nodes.</a:t>
             </a:r>
             <a:endParaRPr lang="en-IN" dirty="0"/>
           </a:p>
@@ -14239,7 +15732,7 @@
           <p:cNvPr id="1026" name="Picture 2" descr="Illustration of a b-tree">
             <a:extLst>
               <a:ext uri="{FF2B5EF4-FFF2-40B4-BE49-F238E27FC236}">
-                <a16:creationId xmlns:a16="http://schemas.microsoft.com/office/drawing/2014/main" xmlns="" id="{FA52C72A-E145-81DD-1E8E-027C9C05D979}"/>
+                <a16:creationId xmlns:a16="http://schemas.microsoft.com/office/drawing/2014/main" id="{FA52C72A-E145-81DD-1E8E-027C9C05D979}"/>
               </a:ext>
             </a:extLst>
           </p:cNvPr>
@@ -14291,13 +15784,6 @@
   <p:clrMapOvr>
     <a:masterClrMapping/>
   </p:clrMapOvr>
-  <p:timing>
-    <p:tnLst>
-      <p:par>
-        <p:cTn id="1" dur="indefinite" restart="never" nodeType="tmRoot"/>
-      </p:par>
-    </p:tnLst>
-  </p:timing>
 </p:sld>
 </file>
 
@@ -14323,7 +15809,7 @@
           <p:cNvPr id="2" name="Title 1">
             <a:extLst>
               <a:ext uri="{FF2B5EF4-FFF2-40B4-BE49-F238E27FC236}">
-                <a16:creationId xmlns:a16="http://schemas.microsoft.com/office/drawing/2014/main" xmlns="" id="{8467B2FC-56B3-45F3-2E10-D074B6A31B93}"/>
+                <a16:creationId xmlns:a16="http://schemas.microsoft.com/office/drawing/2014/main" id="{8467B2FC-56B3-45F3-2E10-D074B6A31B93}"/>
               </a:ext>
             </a:extLst>
           </p:cNvPr>
@@ -14348,7 +15834,7 @@
           <p:cNvPr id="3" name="Content Placeholder 2">
             <a:extLst>
               <a:ext uri="{FF2B5EF4-FFF2-40B4-BE49-F238E27FC236}">
-                <a16:creationId xmlns:a16="http://schemas.microsoft.com/office/drawing/2014/main" xmlns="" id="{CC61F77D-E99B-C763-CCE6-E677ABCA1900}"/>
+                <a16:creationId xmlns:a16="http://schemas.microsoft.com/office/drawing/2014/main" id="{CC61F77D-E99B-C763-CCE6-E677ABCA1900}"/>
               </a:ext>
             </a:extLst>
           </p:cNvPr>
@@ -14370,6 +15856,9 @@
                   <a:srgbClr val="3A3B41"/>
                 </a:solidFill>
                 <a:effectLst/>
+                <a:highlight>
+                  <a:srgbClr val="FFFF00"/>
+                </a:highlight>
                 <a:latin typeface="Georgia" panose="02040502050405020303" pitchFamily="18" charset="0"/>
               </a:rPr>
               <a:t>The concept of Binary tree can be extended into a more generalized form, which is known as B-tree. </a:t>
@@ -14382,6 +15871,9 @@
                   <a:srgbClr val="3A3B41"/>
                 </a:solidFill>
                 <a:effectLst/>
+                <a:highlight>
+                  <a:srgbClr val="FFFF00"/>
+                </a:highlight>
                 <a:latin typeface="Georgia" panose="02040502050405020303" pitchFamily="18" charset="0"/>
               </a:rPr>
               <a:t>Instead of having a single entry for a single node, B-tree uses an array of entries for a single node and has references to a child node for each of these entries.</a:t>
@@ -14493,7 +15985,7 @@
           <p:cNvPr id="2050" name="Picture 2" descr="Illustration of a binary search">
             <a:extLst>
               <a:ext uri="{FF2B5EF4-FFF2-40B4-BE49-F238E27FC236}">
-                <a16:creationId xmlns:a16="http://schemas.microsoft.com/office/drawing/2014/main" xmlns="" id="{2C05636F-8240-B0D2-5989-722DB8EFE485}"/>
+                <a16:creationId xmlns:a16="http://schemas.microsoft.com/office/drawing/2014/main" id="{2C05636F-8240-B0D2-5989-722DB8EFE485}"/>
               </a:ext>
             </a:extLst>
           </p:cNvPr>
@@ -14545,13 +16037,6 @@
   <p:clrMapOvr>
     <a:masterClrMapping/>
   </p:clrMapOvr>
-  <p:timing>
-    <p:tnLst>
-      <p:par>
-        <p:cTn id="1" dur="indefinite" restart="never" nodeType="tmRoot"/>
-      </p:par>
-    </p:tnLst>
-  </p:timing>
 </p:sld>
 </file>
 
@@ -14607,46 +16092,82 @@
           <a:lstStyle/>
           <a:p>
             <a:r>
-              <a:rPr lang="en-US" dirty="0"/>
+              <a:rPr lang="en-US" dirty="0">
+                <a:highlight>
+                  <a:srgbClr val="FFFF00"/>
+                </a:highlight>
+              </a:rPr>
               <a:t>The structure of node in </a:t>
             </a:r>
             <a:r>
-              <a:rPr lang="en-US" dirty="0" err="1"/>
+              <a:rPr lang="en-US" dirty="0" err="1">
+                <a:highlight>
+                  <a:srgbClr val="FFFF00"/>
+                </a:highlight>
+              </a:rPr>
               <a:t>Btree</a:t>
             </a:r>
             <a:r>
-              <a:rPr lang="en-US" dirty="0"/>
+              <a:rPr lang="en-US" dirty="0">
+                <a:highlight>
+                  <a:srgbClr val="FFFF00"/>
+                </a:highlight>
+              </a:rPr>
               <a:t> is same at all level. (</a:t>
             </a:r>
             <a:r>
-              <a:rPr lang="en-US" dirty="0" err="1"/>
+              <a:rPr lang="en-US" dirty="0" err="1">
+                <a:highlight>
+                  <a:srgbClr val="FFFF00"/>
+                </a:highlight>
+              </a:rPr>
               <a:t>root,intemediate,leaf</a:t>
             </a:r>
             <a:r>
-              <a:rPr lang="en-US" dirty="0"/>
+              <a:rPr lang="en-US" dirty="0">
+                <a:highlight>
+                  <a:srgbClr val="FFFF00"/>
+                </a:highlight>
+              </a:rPr>
               <a:t>)</a:t>
             </a:r>
           </a:p>
           <a:p>
             <a:r>
-              <a:rPr lang="en-US" dirty="0"/>
+              <a:rPr lang="en-US" dirty="0">
+                <a:highlight>
+                  <a:srgbClr val="FFFF00"/>
+                </a:highlight>
+              </a:rPr>
               <a:t>BP-Block Pointer</a:t>
             </a:r>
           </a:p>
           <a:p>
             <a:r>
-              <a:rPr lang="en-US" dirty="0"/>
+              <a:rPr lang="en-US" dirty="0">
+                <a:highlight>
+                  <a:srgbClr val="FFFF00"/>
+                </a:highlight>
+              </a:rPr>
               <a:t>K-key</a:t>
             </a:r>
           </a:p>
           <a:p>
             <a:r>
-              <a:rPr lang="en-US" dirty="0"/>
+              <a:rPr lang="en-US" dirty="0">
+                <a:highlight>
+                  <a:srgbClr val="FFFF00"/>
+                </a:highlight>
+              </a:rPr>
               <a:t>DP-Data Pointer</a:t>
             </a:r>
           </a:p>
           <a:p>
-            <a:endParaRPr lang="en-IN" dirty="0"/>
+            <a:endParaRPr lang="en-IN" dirty="0">
+              <a:highlight>
+                <a:srgbClr val="FFFF00"/>
+              </a:highlight>
+            </a:endParaRPr>
           </a:p>
         </p:txBody>
       </p:sp>
@@ -14666,66 +16187,118 @@
           <a:lstStyle/>
           <a:p>
             <a:r>
-              <a:rPr lang="en-US" dirty="0"/>
+              <a:rPr lang="en-US" dirty="0">
+                <a:highlight>
+                  <a:srgbClr val="FFFF00"/>
+                </a:highlight>
+              </a:rPr>
               <a:t>Properties:</a:t>
             </a:r>
           </a:p>
           <a:p>
             <a:r>
-              <a:rPr lang="en-US" dirty="0"/>
+              <a:rPr lang="en-US" dirty="0">
+                <a:highlight>
+                  <a:srgbClr val="FFFF00"/>
+                </a:highlight>
+              </a:rPr>
               <a:t>If order/degree of tree=m</a:t>
             </a:r>
           </a:p>
           <a:p>
             <a:r>
-              <a:rPr lang="en-US" dirty="0"/>
+              <a:rPr lang="en-US" dirty="0">
+                <a:highlight>
+                  <a:srgbClr val="FFFF00"/>
+                </a:highlight>
+              </a:rPr>
               <a:t>Max </a:t>
             </a:r>
             <a:r>
-              <a:rPr lang="en-US" dirty="0" err="1"/>
+              <a:rPr lang="en-US" dirty="0" err="1">
+                <a:highlight>
+                  <a:srgbClr val="FFFF00"/>
+                </a:highlight>
+              </a:rPr>
               <a:t>no.of</a:t>
             </a:r>
             <a:r>
-              <a:rPr lang="en-US" dirty="0"/>
+              <a:rPr lang="en-US" dirty="0">
+                <a:highlight>
+                  <a:srgbClr val="FFFF00"/>
+                </a:highlight>
+              </a:rPr>
               <a:t>  children =m</a:t>
             </a:r>
           </a:p>
           <a:p>
             <a:r>
-              <a:rPr lang="en-US" dirty="0"/>
+              <a:rPr lang="en-US" dirty="0">
+                <a:highlight>
+                  <a:srgbClr val="FFFF00"/>
+                </a:highlight>
+              </a:rPr>
               <a:t>Min </a:t>
             </a:r>
             <a:r>
-              <a:rPr lang="en-US" dirty="0" err="1"/>
+              <a:rPr lang="en-US" dirty="0" err="1">
+                <a:highlight>
+                  <a:srgbClr val="FFFF00"/>
+                </a:highlight>
+              </a:rPr>
               <a:t>no.of</a:t>
             </a:r>
             <a:r>
-              <a:rPr lang="en-US" dirty="0"/>
+              <a:rPr lang="en-US" dirty="0">
+                <a:highlight>
+                  <a:srgbClr val="FFFF00"/>
+                </a:highlight>
+              </a:rPr>
               <a:t> keys=m-1</a:t>
             </a:r>
           </a:p>
           <a:p>
             <a:r>
-              <a:rPr lang="en-US" dirty="0"/>
+              <a:rPr lang="en-US" dirty="0">
+                <a:highlight>
+                  <a:srgbClr val="FFFF00"/>
+                </a:highlight>
+              </a:rPr>
               <a:t>Min </a:t>
             </a:r>
             <a:r>
-              <a:rPr lang="en-US" dirty="0" err="1"/>
+              <a:rPr lang="en-US" dirty="0" err="1">
+                <a:highlight>
+                  <a:srgbClr val="FFFF00"/>
+                </a:highlight>
+              </a:rPr>
               <a:t>no.of</a:t>
             </a:r>
             <a:r>
-              <a:rPr lang="en-US" dirty="0"/>
+              <a:rPr lang="en-US" dirty="0">
+                <a:highlight>
+                  <a:srgbClr val="FFFF00"/>
+                </a:highlight>
+              </a:rPr>
               <a:t>  children = </a:t>
             </a:r>
           </a:p>
           <a:p>
             <a:r>
-              <a:rPr lang="en-US" dirty="0"/>
+              <a:rPr lang="en-US" dirty="0">
+                <a:highlight>
+                  <a:srgbClr val="FFFF00"/>
+                </a:highlight>
+              </a:rPr>
               <a:t>Min No. of keys=       - 1</a:t>
             </a:r>
           </a:p>
           <a:p>
-            <a:endParaRPr lang="en-IN" dirty="0"/>
+            <a:endParaRPr lang="en-IN" dirty="0">
+              <a:highlight>
+                <a:srgbClr val="FFFF00"/>
+              </a:highlight>
+            </a:endParaRPr>
           </a:p>
         </p:txBody>
       </p:sp>
@@ -14752,7 +16325,7 @@
         </p:blipFill>
         <p:spPr bwMode="auto">
           <a:xfrm>
-            <a:off x="762000" y="3810000"/>
+            <a:off x="457200" y="4612005"/>
             <a:ext cx="4086225" cy="1514475"/>
           </a:xfrm>
           <a:prstGeom prst="rect">
@@ -14901,13 +16474,6 @@
   <p:clrMapOvr>
     <a:masterClrMapping/>
   </p:clrMapOvr>
-  <p:timing>
-    <p:tnLst>
-      <p:par>
-        <p:cTn id="1" dur="indefinite" restart="never" nodeType="tmRoot"/>
-      </p:par>
-    </p:tnLst>
-  </p:timing>
 </p:sld>
 </file>
 
@@ -14933,7 +16499,7 @@
           <p:cNvPr id="2" name="Title 1">
             <a:extLst>
               <a:ext uri="{FF2B5EF4-FFF2-40B4-BE49-F238E27FC236}">
-                <a16:creationId xmlns:a16="http://schemas.microsoft.com/office/drawing/2014/main" xmlns="" id="{67E4EAD4-128A-275E-1C74-0DBBE0E6541B}"/>
+                <a16:creationId xmlns:a16="http://schemas.microsoft.com/office/drawing/2014/main" id="{67E4EAD4-128A-275E-1C74-0DBBE0E6541B}"/>
               </a:ext>
             </a:extLst>
           </p:cNvPr>
@@ -14967,7 +16533,7 @@
           <p:cNvPr id="3" name="Content Placeholder 2">
             <a:extLst>
               <a:ext uri="{FF2B5EF4-FFF2-40B4-BE49-F238E27FC236}">
-                <a16:creationId xmlns:a16="http://schemas.microsoft.com/office/drawing/2014/main" xmlns="" id="{ED0404DB-7FF9-578E-DC52-0FD24884BB3E}"/>
+                <a16:creationId xmlns:a16="http://schemas.microsoft.com/office/drawing/2014/main" id="{ED0404DB-7FF9-578E-DC52-0FD24884BB3E}"/>
               </a:ext>
             </a:extLst>
           </p:cNvPr>
@@ -14997,15 +16563,7 @@
             </a:r>
             <a:r>
               <a:rPr lang="en-IN" b="1" dirty="0"/>
-              <a:t>B-tree of order 3 (m = </a:t>
-            </a:r>
-            <a:r>
-              <a:rPr lang="en-IN" b="1" dirty="0" smtClean="0"/>
-              <a:t>4) </a:t>
-            </a:r>
-            <a:r>
-              <a:rPr lang="en-IN" b="1" dirty="0"/>
-              <a:t>for </a:t>
+              <a:t>B-tree of order 3 (m = 4) for </a:t>
             </a:r>
             <a:r>
               <a:rPr lang="en-IN" dirty="0"/>
@@ -15026,25 +16584,17 @@
             </a:r>
             <a:r>
               <a:rPr lang="en-US" dirty="0"/>
-              <a:t>  children =</a:t>
-            </a:r>
-            <a:r>
-              <a:rPr lang="en-US" dirty="0" smtClean="0"/>
-              <a:t>m=4</a:t>
-            </a:r>
-            <a:endParaRPr lang="en-IN" dirty="0" smtClean="0"/>
+              <a:t>  children =m=4</a:t>
+            </a:r>
+            <a:endParaRPr lang="en-IN" dirty="0"/>
           </a:p>
           <a:p>
             <a:pPr>
               <a:buNone/>
             </a:pPr>
             <a:r>
-              <a:rPr lang="en-IN" dirty="0" smtClean="0"/>
-              <a:t>Max </a:t>
-            </a:r>
-            <a:r>
               <a:rPr lang="en-IN" dirty="0"/>
-              <a:t>keys per node = 𝑚−1=4−1=3</a:t>
+              <a:t>Max keys per node = 𝑚−1=4−1=3</a:t>
             </a:r>
           </a:p>
           <a:p>
@@ -15061,12 +16611,8 @@
               <a:buNone/>
             </a:pPr>
             <a:r>
-              <a:rPr lang="en-IN" dirty="0" smtClean="0"/>
-              <a:t>Min </a:t>
-            </a:r>
-            <a:r>
               <a:rPr lang="en-IN" dirty="0"/>
-              <a:t>children per node (except root) = ⌈𝑚/2⌉=2</a:t>
+              <a:t>Min children per node (except root) = ⌈𝑚/2⌉=2</a:t>
             </a:r>
           </a:p>
         </p:txBody>
@@ -15076,7 +16622,7 @@
           <p:cNvPr id="7" name="Picture 6">
             <a:extLst>
               <a:ext uri="{FF2B5EF4-FFF2-40B4-BE49-F238E27FC236}">
-                <a16:creationId xmlns:a16="http://schemas.microsoft.com/office/drawing/2014/main" xmlns="" id="{F9798E39-AB98-FAFC-9313-1AD7470740BE}"/>
+                <a16:creationId xmlns:a16="http://schemas.microsoft.com/office/drawing/2014/main" id="{F9798E39-AB98-FAFC-9313-1AD7470740BE}"/>
               </a:ext>
             </a:extLst>
           </p:cNvPr>
@@ -15106,7 +16652,7 @@
           <p:cNvPr id="9" name="Picture 8">
             <a:extLst>
               <a:ext uri="{FF2B5EF4-FFF2-40B4-BE49-F238E27FC236}">
-                <a16:creationId xmlns:a16="http://schemas.microsoft.com/office/drawing/2014/main" xmlns="" id="{79A949B0-CAF4-0B0B-DCC7-783AB0B877D2}"/>
+                <a16:creationId xmlns:a16="http://schemas.microsoft.com/office/drawing/2014/main" id="{79A949B0-CAF4-0B0B-DCC7-783AB0B877D2}"/>
               </a:ext>
             </a:extLst>
           </p:cNvPr>
@@ -15136,7 +16682,7 @@
           <p:cNvPr id="11" name="Picture 10">
             <a:extLst>
               <a:ext uri="{FF2B5EF4-FFF2-40B4-BE49-F238E27FC236}">
-                <a16:creationId xmlns:a16="http://schemas.microsoft.com/office/drawing/2014/main" xmlns="" id="{E5B20605-C64C-DC1D-BE28-8D89348593F2}"/>
+                <a16:creationId xmlns:a16="http://schemas.microsoft.com/office/drawing/2014/main" id="{E5B20605-C64C-DC1D-BE28-8D89348593F2}"/>
               </a:ext>
             </a:extLst>
           </p:cNvPr>
@@ -15166,7 +16712,7 @@
           <p:cNvPr id="13" name="Picture 12">
             <a:extLst>
               <a:ext uri="{FF2B5EF4-FFF2-40B4-BE49-F238E27FC236}">
-                <a16:creationId xmlns:a16="http://schemas.microsoft.com/office/drawing/2014/main" xmlns="" id="{53610313-EF02-9753-EB78-6F58E646ED19}"/>
+                <a16:creationId xmlns:a16="http://schemas.microsoft.com/office/drawing/2014/main" id="{53610313-EF02-9753-EB78-6F58E646ED19}"/>
               </a:ext>
             </a:extLst>
           </p:cNvPr>
@@ -15196,7 +16742,7 @@
           <p:cNvPr id="15" name="Picture 14">
             <a:extLst>
               <a:ext uri="{FF2B5EF4-FFF2-40B4-BE49-F238E27FC236}">
-                <a16:creationId xmlns:a16="http://schemas.microsoft.com/office/drawing/2014/main" xmlns="" id="{CD2EA2C0-0616-25CA-B05F-6D410F0369D2}"/>
+                <a16:creationId xmlns:a16="http://schemas.microsoft.com/office/drawing/2014/main" id="{CD2EA2C0-0616-25CA-B05F-6D410F0369D2}"/>
               </a:ext>
             </a:extLst>
           </p:cNvPr>
@@ -15231,13 +16777,6 @@
   <p:clrMapOvr>
     <a:masterClrMapping/>
   </p:clrMapOvr>
-  <p:timing>
-    <p:tnLst>
-      <p:par>
-        <p:cTn id="1" dur="indefinite" restart="never" nodeType="tmRoot"/>
-      </p:par>
-    </p:tnLst>
-  </p:timing>
 </p:sld>
 </file>
 
@@ -15301,7 +16840,7 @@
         <p:spPr/>
         <p:txBody>
           <a:bodyPr>
-            <a:normAutofit fontScale="92500"/>
+            <a:normAutofit lnSpcReduction="10000"/>
           </a:bodyPr>
           <a:lstStyle/>
           <a:p>
@@ -15342,6 +16881,9 @@
                   <a:srgbClr val="242424"/>
                 </a:solidFill>
                 <a:effectLst/>
+                <a:highlight>
+                  <a:srgbClr val="FFFF00"/>
+                </a:highlight>
                 <a:latin typeface="source-serif-pro"/>
               </a:rPr>
               <a:t>The difference in B+ tree and B tree is that</a:t>
@@ -15352,6 +16894,9 @@
                   <a:srgbClr val="242424"/>
                 </a:solidFill>
                 <a:effectLst/>
+                <a:highlight>
+                  <a:srgbClr val="FFFF00"/>
+                </a:highlight>
                 <a:latin typeface="source-serif-pro"/>
               </a:rPr>
               <a:t> in B tree the keys and records can be stored as internal as well as leaf nodes whereas in B+ trees, the records are stored as leaf nodes and the keys are stored only in internal nodes. </a:t>
@@ -15383,15 +16928,27 @@
           </a:p>
           <a:p>
             <a:r>
-              <a:rPr lang="en-US" dirty="0"/>
+              <a:rPr lang="en-US" dirty="0">
+                <a:highlight>
+                  <a:srgbClr val="FFFF00"/>
+                </a:highlight>
+              </a:rPr>
               <a:t>A B</a:t>
             </a:r>
             <a:r>
-              <a:rPr lang="en-US" baseline="30000" dirty="0"/>
+              <a:rPr lang="en-US" baseline="30000" dirty="0">
+                <a:highlight>
+                  <a:srgbClr val="FFFF00"/>
+                </a:highlight>
+              </a:rPr>
               <a:t>+</a:t>
             </a:r>
             <a:r>
-              <a:rPr lang="en-US" dirty="0"/>
+              <a:rPr lang="en-US" dirty="0">
+                <a:highlight>
+                  <a:srgbClr val="FFFF00"/>
+                </a:highlight>
+              </a:rPr>
               <a:t> tree is a balanced binary search tree that follows a multi-level index format. </a:t>
             </a:r>
           </a:p>
@@ -15428,13 +16985,6 @@
   <p:clrMapOvr>
     <a:masterClrMapping/>
   </p:clrMapOvr>
-  <p:timing>
-    <p:tnLst>
-      <p:par>
-        <p:cTn id="1" dur="indefinite" restart="never" nodeType="tmRoot"/>
-      </p:par>
-    </p:tnLst>
-  </p:timing>
 </p:sld>
 </file>
 
@@ -15460,7 +17010,7 @@
           <p:cNvPr id="2" name="Title 1">
             <a:extLst>
               <a:ext uri="{FF2B5EF4-FFF2-40B4-BE49-F238E27FC236}">
-                <a16:creationId xmlns:a16="http://schemas.microsoft.com/office/drawing/2014/main" xmlns="" id="{4A2BBEDD-E647-D0CC-587C-2ABECFF9D047}"/>
+                <a16:creationId xmlns:a16="http://schemas.microsoft.com/office/drawing/2014/main" id="{4A2BBEDD-E647-D0CC-587C-2ABECFF9D047}"/>
               </a:ext>
             </a:extLst>
           </p:cNvPr>
@@ -15485,7 +17035,7 @@
           <p:cNvPr id="3" name="Content Placeholder 2">
             <a:extLst>
               <a:ext uri="{FF2B5EF4-FFF2-40B4-BE49-F238E27FC236}">
-                <a16:creationId xmlns:a16="http://schemas.microsoft.com/office/drawing/2014/main" xmlns="" id="{9E56D0CF-7239-8ADB-0C26-51225BFFA401}"/>
+                <a16:creationId xmlns:a16="http://schemas.microsoft.com/office/drawing/2014/main" id="{9E56D0CF-7239-8ADB-0C26-51225BFFA401}"/>
               </a:ext>
             </a:extLst>
           </p:cNvPr>
@@ -15502,32 +17052,60 @@
           <a:lstStyle/>
           <a:p>
             <a:r>
-              <a:rPr lang="en-US" dirty="0"/>
+              <a:rPr lang="en-US" dirty="0">
+                <a:highlight>
+                  <a:srgbClr val="FFFF00"/>
+                </a:highlight>
+              </a:rPr>
               <a:t>B</a:t>
             </a:r>
             <a:r>
-              <a:rPr lang="en-US" baseline="30000" dirty="0"/>
+              <a:rPr lang="en-US" baseline="30000" dirty="0">
+                <a:highlight>
+                  <a:srgbClr val="FFFF00"/>
+                </a:highlight>
+              </a:rPr>
               <a:t>+</a:t>
             </a:r>
             <a:r>
-              <a:rPr lang="en-US" dirty="0"/>
+              <a:rPr lang="en-US" dirty="0">
+                <a:highlight>
+                  <a:srgbClr val="FFFF00"/>
+                </a:highlight>
+              </a:rPr>
               <a:t> tree ensures that all leaf nodes remain at the same height, thus balanced. </a:t>
             </a:r>
           </a:p>
           <a:p>
-            <a:endParaRPr lang="en-US" dirty="0"/>
-          </a:p>
-          <a:p>
-            <a:r>
-              <a:rPr lang="en-US" dirty="0"/>
+            <a:endParaRPr lang="en-US" dirty="0">
+              <a:highlight>
+                <a:srgbClr val="FFFF00"/>
+              </a:highlight>
+            </a:endParaRPr>
+          </a:p>
+          <a:p>
+            <a:r>
+              <a:rPr lang="en-US" dirty="0">
+                <a:highlight>
+                  <a:srgbClr val="FFFF00"/>
+                </a:highlight>
+              </a:rPr>
               <a:t>Additionally, the leaf nodes are linked using a link list; therefore, a B</a:t>
             </a:r>
             <a:r>
-              <a:rPr lang="en-US" baseline="30000" dirty="0"/>
+              <a:rPr lang="en-US" baseline="30000" dirty="0">
+                <a:highlight>
+                  <a:srgbClr val="FFFF00"/>
+                </a:highlight>
+              </a:rPr>
               <a:t>+</a:t>
             </a:r>
             <a:r>
-              <a:rPr lang="en-US" dirty="0"/>
+              <a:rPr lang="en-US" dirty="0">
+                <a:highlight>
+                  <a:srgbClr val="FFFF00"/>
+                </a:highlight>
+              </a:rPr>
               <a:t> tree can support random access as well as sequential access.</a:t>
             </a:r>
           </a:p>
@@ -15600,13 +17178,6 @@
   <p:clrMapOvr>
     <a:masterClrMapping/>
   </p:clrMapOvr>
-  <p:timing>
-    <p:tnLst>
-      <p:par>
-        <p:cTn id="1" dur="indefinite" restart="never" nodeType="tmRoot"/>
-      </p:par>
-    </p:tnLst>
-  </p:timing>
 </p:sld>
 </file>
 
@@ -15725,12 +17296,18 @@
             </a:pPr>
             <a:r>
               <a:rPr sz="2000" spc="-15" dirty="0">
+                <a:highlight>
+                  <a:srgbClr val="FFFF00"/>
+                </a:highlight>
                 <a:latin typeface="Calibri"/>
                 <a:cs typeface="Calibri"/>
               </a:rPr>
               <a:t>Syntax:</a:t>
             </a:r>
             <a:endParaRPr sz="2000" dirty="0">
+              <a:highlight>
+                <a:srgbClr val="FFFF00"/>
+              </a:highlight>
               <a:latin typeface="Calibri"/>
               <a:cs typeface="Calibri"/>
             </a:endParaRPr>
@@ -15746,6 +17323,9 @@
             </a:pPr>
             <a:r>
               <a:rPr sz="2000" spc="-30" dirty="0">
+                <a:highlight>
+                  <a:srgbClr val="FFFF00"/>
+                </a:highlight>
                 <a:latin typeface="Calibri"/>
                 <a:cs typeface="Calibri"/>
               </a:rPr>
@@ -15753,6 +17333,9 @@
             </a:r>
             <a:r>
               <a:rPr sz="2000" spc="-60" dirty="0">
+                <a:highlight>
+                  <a:srgbClr val="FFFF00"/>
+                </a:highlight>
                 <a:latin typeface="Calibri"/>
                 <a:cs typeface="Calibri"/>
               </a:rPr>
@@ -15760,6 +17343,9 @@
             </a:r>
             <a:r>
               <a:rPr sz="2000" dirty="0">
+                <a:highlight>
+                  <a:srgbClr val="FFFF00"/>
+                </a:highlight>
                 <a:latin typeface="Calibri"/>
                 <a:cs typeface="Calibri"/>
               </a:rPr>
@@ -15767,6 +17353,9 @@
             </a:r>
             <a:r>
               <a:rPr sz="2000" spc="-50" dirty="0">
+                <a:highlight>
+                  <a:srgbClr val="FFFF00"/>
+                </a:highlight>
                 <a:latin typeface="Calibri"/>
                 <a:cs typeface="Calibri"/>
               </a:rPr>
@@ -15774,12 +17363,18 @@
             </a:r>
             <a:r>
               <a:rPr sz="2000" i="1" spc="-5" dirty="0">
+                <a:highlight>
+                  <a:srgbClr val="FFFF00"/>
+                </a:highlight>
                 <a:latin typeface="Calibri"/>
                 <a:cs typeface="Calibri"/>
               </a:rPr>
               <a:t>index_name</a:t>
             </a:r>
             <a:endParaRPr sz="2000" dirty="0">
+              <a:highlight>
+                <a:srgbClr val="FFFF00"/>
+              </a:highlight>
               <a:latin typeface="Calibri"/>
               <a:cs typeface="Calibri"/>
             </a:endParaRPr>
@@ -15792,6 +17387,9 @@
             </a:pPr>
             <a:r>
               <a:rPr sz="2000" spc="5" dirty="0">
+                <a:highlight>
+                  <a:srgbClr val="FFFF00"/>
+                </a:highlight>
                 <a:latin typeface="Calibri"/>
                 <a:cs typeface="Calibri"/>
               </a:rPr>
@@ -15799,6 +17397,9 @@
             </a:r>
             <a:r>
               <a:rPr sz="2000" spc="-30" dirty="0">
+                <a:highlight>
+                  <a:srgbClr val="FFFF00"/>
+                </a:highlight>
                 <a:latin typeface="Calibri"/>
                 <a:cs typeface="Calibri"/>
               </a:rPr>
@@ -15806,6 +17407,9 @@
             </a:r>
             <a:r>
               <a:rPr sz="2000" i="1" spc="-5" dirty="0">
+                <a:highlight>
+                  <a:srgbClr val="FFFF00"/>
+                </a:highlight>
                 <a:latin typeface="Calibri"/>
                 <a:cs typeface="Calibri"/>
               </a:rPr>
@@ -15813,6 +17417,9 @@
             </a:r>
             <a:r>
               <a:rPr sz="2000" i="1" spc="-35" dirty="0">
+                <a:highlight>
+                  <a:srgbClr val="FFFF00"/>
+                </a:highlight>
                 <a:latin typeface="Calibri"/>
                 <a:cs typeface="Calibri"/>
               </a:rPr>
@@ -15820,6 +17427,9 @@
             </a:r>
             <a:r>
               <a:rPr sz="2000" spc="-5" dirty="0">
+                <a:highlight>
+                  <a:srgbClr val="FFFF00"/>
+                </a:highlight>
                 <a:latin typeface="Calibri"/>
                 <a:cs typeface="Calibri"/>
               </a:rPr>
@@ -15827,6 +17437,9 @@
             </a:r>
             <a:r>
               <a:rPr sz="2000" i="1" spc="-5" dirty="0">
+                <a:highlight>
+                  <a:srgbClr val="FFFF00"/>
+                </a:highlight>
                 <a:latin typeface="Calibri"/>
                 <a:cs typeface="Calibri"/>
               </a:rPr>
@@ -15834,6 +17447,9 @@
             </a:r>
             <a:r>
               <a:rPr sz="2000" spc="-5" dirty="0">
+                <a:highlight>
+                  <a:srgbClr val="FFFF00"/>
+                </a:highlight>
                 <a:latin typeface="Calibri"/>
                 <a:cs typeface="Calibri"/>
               </a:rPr>
@@ -15841,6 +17457,9 @@
             </a:r>
             <a:r>
               <a:rPr sz="2000" spc="-30" dirty="0">
+                <a:highlight>
+                  <a:srgbClr val="FFFF00"/>
+                </a:highlight>
                 <a:latin typeface="Calibri"/>
                 <a:cs typeface="Calibri"/>
               </a:rPr>
@@ -15848,6 +17467,9 @@
             </a:r>
             <a:r>
               <a:rPr sz="2000" i="1" spc="-5" dirty="0">
+                <a:highlight>
+                  <a:srgbClr val="FFFF00"/>
+                </a:highlight>
                 <a:latin typeface="Calibri"/>
                 <a:cs typeface="Calibri"/>
               </a:rPr>
@@ -15855,6 +17477,9 @@
             </a:r>
             <a:r>
               <a:rPr sz="2000" spc="-5" dirty="0">
+                <a:highlight>
+                  <a:srgbClr val="FFFF00"/>
+                </a:highlight>
                 <a:latin typeface="Calibri"/>
                 <a:cs typeface="Calibri"/>
               </a:rPr>
@@ -15862,6 +17487,9 @@
             </a:r>
             <a:r>
               <a:rPr sz="2000" spc="-30" dirty="0">
+                <a:highlight>
+                  <a:srgbClr val="FFFF00"/>
+                </a:highlight>
                 <a:latin typeface="Calibri"/>
                 <a:cs typeface="Calibri"/>
               </a:rPr>
@@ -15869,12 +17497,18 @@
             </a:r>
             <a:r>
               <a:rPr sz="2000" spc="-5" dirty="0">
+                <a:highlight>
+                  <a:srgbClr val="FFFF00"/>
+                </a:highlight>
                 <a:latin typeface="Calibri"/>
                 <a:cs typeface="Calibri"/>
               </a:rPr>
               <a:t>...);</a:t>
             </a:r>
             <a:endParaRPr sz="2000" dirty="0">
+              <a:highlight>
+                <a:srgbClr val="FFFF00"/>
+              </a:highlight>
               <a:latin typeface="Calibri"/>
               <a:cs typeface="Calibri"/>
             </a:endParaRPr>
@@ -15889,6 +17523,9 @@
               </a:spcBef>
             </a:pPr>
             <a:endParaRPr sz="2400" dirty="0">
+              <a:highlight>
+                <a:srgbClr val="FFFF00"/>
+              </a:highlight>
               <a:latin typeface="Calibri"/>
               <a:cs typeface="Calibri"/>
             </a:endParaRPr>
@@ -15907,6 +17544,9 @@
             </a:pPr>
             <a:r>
               <a:rPr sz="2000" spc="-30" dirty="0">
+                <a:highlight>
+                  <a:srgbClr val="FFFF00"/>
+                </a:highlight>
                 <a:latin typeface="Calibri"/>
                 <a:cs typeface="Calibri"/>
               </a:rPr>
@@ -15914,6 +17554,9 @@
             </a:r>
             <a:r>
               <a:rPr sz="2000" spc="-45" dirty="0">
+                <a:highlight>
+                  <a:srgbClr val="FFFF00"/>
+                </a:highlight>
                 <a:latin typeface="Calibri"/>
                 <a:cs typeface="Calibri"/>
               </a:rPr>
@@ -15921,6 +17564,9 @@
             </a:r>
             <a:r>
               <a:rPr sz="2000" dirty="0">
+                <a:highlight>
+                  <a:srgbClr val="FFFF00"/>
+                </a:highlight>
                 <a:latin typeface="Calibri"/>
                 <a:cs typeface="Calibri"/>
               </a:rPr>
@@ -15928,6 +17574,9 @@
             </a:r>
             <a:r>
               <a:rPr sz="2000" spc="-20" dirty="0">
+                <a:highlight>
+                  <a:srgbClr val="FFFF00"/>
+                </a:highlight>
                 <a:latin typeface="Calibri"/>
                 <a:cs typeface="Calibri"/>
               </a:rPr>
@@ -15935,6 +17584,9 @@
             </a:r>
             <a:r>
               <a:rPr sz="2000" dirty="0">
+                <a:highlight>
+                  <a:srgbClr val="FFFF00"/>
+                </a:highlight>
                 <a:latin typeface="Calibri"/>
                 <a:cs typeface="Calibri"/>
               </a:rPr>
@@ -15958,6 +17610,9 @@
             </a:pPr>
             <a:r>
               <a:rPr sz="2000" spc="-10" dirty="0">
+                <a:highlight>
+                  <a:srgbClr val="FFFF00"/>
+                </a:highlight>
                 <a:latin typeface="Calibri"/>
                 <a:cs typeface="Calibri"/>
               </a:rPr>
@@ -15965,6 +17620,9 @@
             </a:r>
             <a:r>
               <a:rPr sz="2000" spc="-5" dirty="0">
+                <a:highlight>
+                  <a:srgbClr val="FFFF00"/>
+                </a:highlight>
                 <a:latin typeface="Calibri"/>
                 <a:cs typeface="Calibri"/>
               </a:rPr>
@@ -15972,6 +17630,9 @@
             </a:r>
             <a:r>
               <a:rPr sz="2000" spc="-10" dirty="0">
+                <a:highlight>
+                  <a:srgbClr val="FFFF00"/>
+                </a:highlight>
                 <a:latin typeface="Calibri"/>
                 <a:cs typeface="Calibri"/>
               </a:rPr>
@@ -15979,6 +17640,9 @@
             </a:r>
             <a:r>
               <a:rPr sz="2000" dirty="0">
+                <a:highlight>
+                  <a:srgbClr val="FFFF00"/>
+                </a:highlight>
                 <a:latin typeface="Calibri"/>
                 <a:cs typeface="Calibri"/>
               </a:rPr>
@@ -15986,6 +17650,9 @@
             </a:r>
             <a:r>
               <a:rPr sz="2000" spc="-10" dirty="0">
+                <a:highlight>
+                  <a:srgbClr val="FFFF00"/>
+                </a:highlight>
                 <a:latin typeface="Calibri"/>
                 <a:cs typeface="Calibri"/>
               </a:rPr>
@@ -15993,12 +17660,18 @@
             </a:r>
             <a:r>
               <a:rPr sz="2000" spc="-5" dirty="0">
+                <a:highlight>
+                  <a:srgbClr val="FFFF00"/>
+                </a:highlight>
                 <a:latin typeface="Calibri"/>
                 <a:cs typeface="Calibri"/>
               </a:rPr>
               <a:t>allowed.</a:t>
             </a:r>
             <a:endParaRPr sz="2000" dirty="0">
+              <a:highlight>
+                <a:srgbClr val="FFFF00"/>
+              </a:highlight>
               <a:latin typeface="Calibri"/>
               <a:cs typeface="Calibri"/>
             </a:endParaRPr>
@@ -16020,12 +17693,18 @@
             </a:pPr>
             <a:r>
               <a:rPr sz="2000" spc="-15" dirty="0">
+                <a:highlight>
+                  <a:srgbClr val="FFFF00"/>
+                </a:highlight>
                 <a:latin typeface="Calibri"/>
                 <a:cs typeface="Calibri"/>
               </a:rPr>
               <a:t>Syntax:</a:t>
             </a:r>
             <a:endParaRPr sz="2000" dirty="0">
+              <a:highlight>
+                <a:srgbClr val="FFFF00"/>
+              </a:highlight>
               <a:latin typeface="Calibri"/>
               <a:cs typeface="Calibri"/>
             </a:endParaRPr>
@@ -16041,6 +17720,9 @@
             </a:pPr>
             <a:r>
               <a:rPr sz="2000" spc="-30" dirty="0">
+                <a:highlight>
+                  <a:srgbClr val="FFFF00"/>
+                </a:highlight>
                 <a:latin typeface="Calibri"/>
                 <a:cs typeface="Calibri"/>
               </a:rPr>
@@ -16048,6 +17730,9 @@
             </a:r>
             <a:r>
               <a:rPr sz="2000" spc="-50" dirty="0">
+                <a:highlight>
+                  <a:srgbClr val="FFFF00"/>
+                </a:highlight>
                 <a:latin typeface="Calibri"/>
                 <a:cs typeface="Calibri"/>
               </a:rPr>
@@ -16055,6 +17740,9 @@
             </a:r>
             <a:r>
               <a:rPr sz="2000" dirty="0">
+                <a:highlight>
+                  <a:srgbClr val="FFFF00"/>
+                </a:highlight>
                 <a:latin typeface="Calibri"/>
                 <a:cs typeface="Calibri"/>
               </a:rPr>
@@ -16062,6 +17750,9 @@
             </a:r>
             <a:r>
               <a:rPr sz="2000" spc="-25" dirty="0">
+                <a:highlight>
+                  <a:srgbClr val="FFFF00"/>
+                </a:highlight>
                 <a:latin typeface="Calibri"/>
                 <a:cs typeface="Calibri"/>
               </a:rPr>
@@ -16069,6 +17760,9 @@
             </a:r>
             <a:r>
               <a:rPr sz="2000" dirty="0">
+                <a:highlight>
+                  <a:srgbClr val="FFFF00"/>
+                </a:highlight>
                 <a:latin typeface="Calibri"/>
                 <a:cs typeface="Calibri"/>
               </a:rPr>
@@ -16076,6 +17770,9 @@
             </a:r>
             <a:r>
               <a:rPr sz="2000" spc="-35" dirty="0">
+                <a:highlight>
+                  <a:srgbClr val="FFFF00"/>
+                </a:highlight>
                 <a:latin typeface="Calibri"/>
                 <a:cs typeface="Calibri"/>
               </a:rPr>
@@ -16083,12 +17780,18 @@
             </a:r>
             <a:r>
               <a:rPr sz="2000" i="1" spc="-5" dirty="0">
+                <a:highlight>
+                  <a:srgbClr val="FFFF00"/>
+                </a:highlight>
                 <a:latin typeface="Calibri"/>
                 <a:cs typeface="Calibri"/>
               </a:rPr>
               <a:t>index_name</a:t>
             </a:r>
             <a:endParaRPr sz="2000" dirty="0">
+              <a:highlight>
+                <a:srgbClr val="FFFF00"/>
+              </a:highlight>
               <a:latin typeface="Calibri"/>
               <a:cs typeface="Calibri"/>
             </a:endParaRPr>
@@ -16101,6 +17804,9 @@
             </a:pPr>
             <a:r>
               <a:rPr sz="2000" spc="5" dirty="0">
+                <a:highlight>
+                  <a:srgbClr val="FFFF00"/>
+                </a:highlight>
                 <a:latin typeface="Calibri"/>
                 <a:cs typeface="Calibri"/>
               </a:rPr>
@@ -16108,6 +17814,9 @@
             </a:r>
             <a:r>
               <a:rPr sz="2000" spc="-30" dirty="0">
+                <a:highlight>
+                  <a:srgbClr val="FFFF00"/>
+                </a:highlight>
                 <a:latin typeface="Calibri"/>
                 <a:cs typeface="Calibri"/>
               </a:rPr>
@@ -16115,6 +17824,9 @@
             </a:r>
             <a:r>
               <a:rPr sz="2000" i="1" spc="-5" dirty="0">
+                <a:highlight>
+                  <a:srgbClr val="FFFF00"/>
+                </a:highlight>
                 <a:latin typeface="Calibri"/>
                 <a:cs typeface="Calibri"/>
               </a:rPr>
@@ -16122,6 +17834,9 @@
             </a:r>
             <a:r>
               <a:rPr sz="2000" i="1" spc="-35" dirty="0">
+                <a:highlight>
+                  <a:srgbClr val="FFFF00"/>
+                </a:highlight>
                 <a:latin typeface="Calibri"/>
                 <a:cs typeface="Calibri"/>
               </a:rPr>
@@ -16129,6 +17844,9 @@
             </a:r>
             <a:r>
               <a:rPr sz="2000" spc="-5" dirty="0">
+                <a:highlight>
+                  <a:srgbClr val="FFFF00"/>
+                </a:highlight>
                 <a:latin typeface="Calibri"/>
                 <a:cs typeface="Calibri"/>
               </a:rPr>
@@ -16136,6 +17854,9 @@
             </a:r>
             <a:r>
               <a:rPr sz="2000" i="1" spc="-5" dirty="0">
+                <a:highlight>
+                  <a:srgbClr val="FFFF00"/>
+                </a:highlight>
                 <a:latin typeface="Calibri"/>
                 <a:cs typeface="Calibri"/>
               </a:rPr>
@@ -16143,6 +17864,9 @@
             </a:r>
             <a:r>
               <a:rPr sz="2000" spc="-5" dirty="0">
+                <a:highlight>
+                  <a:srgbClr val="FFFF00"/>
+                </a:highlight>
                 <a:latin typeface="Calibri"/>
                 <a:cs typeface="Calibri"/>
               </a:rPr>
@@ -16150,6 +17874,9 @@
             </a:r>
             <a:r>
               <a:rPr sz="2000" spc="-30" dirty="0">
+                <a:highlight>
+                  <a:srgbClr val="FFFF00"/>
+                </a:highlight>
                 <a:latin typeface="Calibri"/>
                 <a:cs typeface="Calibri"/>
               </a:rPr>
@@ -16157,6 +17884,9 @@
             </a:r>
             <a:r>
               <a:rPr sz="2000" i="1" spc="-5" dirty="0">
+                <a:highlight>
+                  <a:srgbClr val="FFFF00"/>
+                </a:highlight>
                 <a:latin typeface="Calibri"/>
                 <a:cs typeface="Calibri"/>
               </a:rPr>
@@ -16164,6 +17894,9 @@
             </a:r>
             <a:r>
               <a:rPr sz="2000" spc="-5" dirty="0">
+                <a:highlight>
+                  <a:srgbClr val="FFFF00"/>
+                </a:highlight>
                 <a:latin typeface="Calibri"/>
                 <a:cs typeface="Calibri"/>
               </a:rPr>
@@ -16171,6 +17904,9 @@
             </a:r>
             <a:r>
               <a:rPr sz="2000" spc="-30" dirty="0">
+                <a:highlight>
+                  <a:srgbClr val="FFFF00"/>
+                </a:highlight>
                 <a:latin typeface="Calibri"/>
                 <a:cs typeface="Calibri"/>
               </a:rPr>
@@ -16178,12 +17914,18 @@
             </a:r>
             <a:r>
               <a:rPr sz="2000" spc="-5" dirty="0">
+                <a:highlight>
+                  <a:srgbClr val="FFFF00"/>
+                </a:highlight>
                 <a:latin typeface="Calibri"/>
                 <a:cs typeface="Calibri"/>
               </a:rPr>
               <a:t>...);</a:t>
             </a:r>
             <a:endParaRPr sz="2000" dirty="0">
+              <a:highlight>
+                <a:srgbClr val="FFFF00"/>
+              </a:highlight>
               <a:latin typeface="Calibri"/>
               <a:cs typeface="Calibri"/>
             </a:endParaRPr>
@@ -16198,6 +17940,9 @@
               </a:spcBef>
             </a:pPr>
             <a:endParaRPr sz="2400" dirty="0">
+              <a:highlight>
+                <a:srgbClr val="FFFF00"/>
+              </a:highlight>
               <a:latin typeface="Calibri"/>
               <a:cs typeface="Calibri"/>
             </a:endParaRPr>
@@ -16216,6 +17961,9 @@
             </a:pPr>
             <a:r>
               <a:rPr sz="2000" spc="-5" dirty="0">
+                <a:highlight>
+                  <a:srgbClr val="FFFF00"/>
+                </a:highlight>
                 <a:latin typeface="Calibri"/>
                 <a:cs typeface="Calibri"/>
               </a:rPr>
@@ -16223,6 +17971,9 @@
             </a:r>
             <a:r>
               <a:rPr sz="2000" spc="-50" dirty="0">
+                <a:highlight>
+                  <a:srgbClr val="FFFF00"/>
+                </a:highlight>
                 <a:latin typeface="Calibri"/>
                 <a:cs typeface="Calibri"/>
               </a:rPr>
@@ -16230,6 +17981,9 @@
             </a:r>
             <a:r>
               <a:rPr sz="2000" dirty="0">
+                <a:highlight>
+                  <a:srgbClr val="FFFF00"/>
+                </a:highlight>
                 <a:latin typeface="Calibri"/>
                 <a:cs typeface="Calibri"/>
               </a:rPr>
@@ -16253,6 +18007,9 @@
             </a:pPr>
             <a:r>
               <a:rPr sz="2000" spc="-5" dirty="0">
+                <a:highlight>
+                  <a:srgbClr val="FFFF00"/>
+                </a:highlight>
                 <a:latin typeface="Calibri"/>
                 <a:cs typeface="Calibri"/>
               </a:rPr>
@@ -16260,6 +18017,9 @@
             </a:r>
             <a:r>
               <a:rPr sz="2000" spc="5" dirty="0">
+                <a:highlight>
+                  <a:srgbClr val="FFFF00"/>
+                </a:highlight>
                 <a:latin typeface="Calibri"/>
                 <a:cs typeface="Calibri"/>
               </a:rPr>
@@ -16267,6 +18027,9 @@
             </a:r>
             <a:r>
               <a:rPr sz="2000" spc="-5" dirty="0">
+                <a:highlight>
+                  <a:srgbClr val="FFFF00"/>
+                </a:highlight>
                 <a:latin typeface="Calibri"/>
                 <a:cs typeface="Calibri"/>
               </a:rPr>
@@ -16274,6 +18037,9 @@
             </a:r>
             <a:r>
               <a:rPr sz="2000" spc="-15" dirty="0">
+                <a:highlight>
+                  <a:srgbClr val="FFFF00"/>
+                </a:highlight>
                 <a:latin typeface="Calibri"/>
                 <a:cs typeface="Calibri"/>
               </a:rPr>
@@ -16281,6 +18047,9 @@
             </a:r>
             <a:r>
               <a:rPr sz="2000" dirty="0">
+                <a:highlight>
+                  <a:srgbClr val="FFFF00"/>
+                </a:highlight>
                 <a:latin typeface="Calibri"/>
                 <a:cs typeface="Calibri"/>
               </a:rPr>
@@ -16288,6 +18057,9 @@
             </a:r>
             <a:r>
               <a:rPr sz="2000" spc="-35" dirty="0">
+                <a:highlight>
+                  <a:srgbClr val="FFFF00"/>
+                </a:highlight>
                 <a:latin typeface="Calibri"/>
                 <a:cs typeface="Calibri"/>
               </a:rPr>
@@ -16295,6 +18067,9 @@
             </a:r>
             <a:r>
               <a:rPr sz="2000" spc="-15" dirty="0">
+                <a:highlight>
+                  <a:srgbClr val="FFFF00"/>
+                </a:highlight>
                 <a:latin typeface="Calibri"/>
                 <a:cs typeface="Calibri"/>
               </a:rPr>
@@ -16302,6 +18077,9 @@
             </a:r>
             <a:r>
               <a:rPr sz="2000" spc="45" dirty="0">
+                <a:highlight>
+                  <a:srgbClr val="FFFF00"/>
+                </a:highlight>
                 <a:latin typeface="Calibri"/>
                 <a:cs typeface="Calibri"/>
               </a:rPr>
@@ -16309,6 +18087,9 @@
             </a:r>
             <a:r>
               <a:rPr sz="2000" dirty="0">
+                <a:highlight>
+                  <a:srgbClr val="FFFF00"/>
+                </a:highlight>
                 <a:latin typeface="Calibri"/>
                 <a:cs typeface="Calibri"/>
               </a:rPr>
@@ -16316,6 +18097,9 @@
             </a:r>
             <a:r>
               <a:rPr sz="2000" spc="5" dirty="0">
+                <a:highlight>
+                  <a:srgbClr val="FFFF00"/>
+                </a:highlight>
                 <a:latin typeface="Calibri"/>
                 <a:cs typeface="Calibri"/>
               </a:rPr>
@@ -16323,6 +18107,9 @@
             </a:r>
             <a:r>
               <a:rPr sz="2000" spc="-5" dirty="0">
+                <a:highlight>
+                  <a:srgbClr val="FFFF00"/>
+                </a:highlight>
                 <a:latin typeface="Calibri"/>
                 <a:cs typeface="Calibri"/>
               </a:rPr>
@@ -16330,6 +18117,9 @@
             </a:r>
             <a:r>
               <a:rPr sz="2000" spc="5" dirty="0">
+                <a:highlight>
+                  <a:srgbClr val="FFFF00"/>
+                </a:highlight>
                 <a:latin typeface="Calibri"/>
                 <a:cs typeface="Calibri"/>
               </a:rPr>
@@ -16337,6 +18127,9 @@
             </a:r>
             <a:r>
               <a:rPr sz="2000" spc="-15" dirty="0">
+                <a:highlight>
+                  <a:srgbClr val="FFFF00"/>
+                </a:highlight>
                 <a:latin typeface="Calibri"/>
                 <a:cs typeface="Calibri"/>
               </a:rPr>
@@ -16344,6 +18137,9 @@
             </a:r>
             <a:r>
               <a:rPr sz="2000" dirty="0">
+                <a:highlight>
+                  <a:srgbClr val="FFFF00"/>
+                </a:highlight>
                 <a:latin typeface="Calibri"/>
                 <a:cs typeface="Calibri"/>
               </a:rPr>
@@ -16351,6 +18147,9 @@
             </a:r>
             <a:r>
               <a:rPr sz="2000" spc="-5" dirty="0">
+                <a:highlight>
+                  <a:srgbClr val="FFFF00"/>
+                </a:highlight>
                 <a:latin typeface="Calibri"/>
                 <a:cs typeface="Calibri"/>
               </a:rPr>
@@ -16358,6 +18157,9 @@
             </a:r>
             <a:r>
               <a:rPr sz="2000" spc="20" dirty="0">
+                <a:highlight>
+                  <a:srgbClr val="FFFF00"/>
+                </a:highlight>
                 <a:latin typeface="Calibri"/>
                 <a:cs typeface="Calibri"/>
               </a:rPr>
@@ -16365,6 +18167,9 @@
             </a:r>
             <a:r>
               <a:rPr sz="2000" dirty="0">
+                <a:highlight>
+                  <a:srgbClr val="FFFF00"/>
+                </a:highlight>
                 <a:latin typeface="Calibri"/>
                 <a:cs typeface="Calibri"/>
               </a:rPr>
@@ -16372,6 +18177,9 @@
             </a:r>
             <a:r>
               <a:rPr sz="2000" spc="-10" dirty="0">
+                <a:highlight>
+                  <a:srgbClr val="FFFF00"/>
+                </a:highlight>
                 <a:latin typeface="Calibri"/>
                 <a:cs typeface="Calibri"/>
               </a:rPr>
@@ -16379,6 +18187,9 @@
             </a:r>
             <a:r>
               <a:rPr sz="2000" dirty="0">
+                <a:highlight>
+                  <a:srgbClr val="FFFF00"/>
+                </a:highlight>
                 <a:latin typeface="Calibri"/>
                 <a:cs typeface="Calibri"/>
               </a:rPr>
@@ -16386,6 +18197,9 @@
             </a:r>
             <a:r>
               <a:rPr sz="2000" spc="5" dirty="0">
+                <a:highlight>
+                  <a:srgbClr val="FFFF00"/>
+                </a:highlight>
                 <a:latin typeface="Calibri"/>
                 <a:cs typeface="Calibri"/>
               </a:rPr>
@@ -16393,6 +18207,9 @@
             </a:r>
             <a:r>
               <a:rPr sz="2000" dirty="0">
+                <a:highlight>
+                  <a:srgbClr val="FFFF00"/>
+                </a:highlight>
                 <a:latin typeface="Calibri"/>
                 <a:cs typeface="Calibri"/>
               </a:rPr>
@@ -16400,6 +18217,9 @@
             </a:r>
             <a:r>
               <a:rPr sz="2000" spc="5" dirty="0">
+                <a:highlight>
+                  <a:srgbClr val="FFFF00"/>
+                </a:highlight>
                 <a:latin typeface="Calibri"/>
                 <a:cs typeface="Calibri"/>
               </a:rPr>
@@ -16407,12 +18227,18 @@
             </a:r>
             <a:r>
               <a:rPr sz="2000" spc="-5" dirty="0">
+                <a:highlight>
+                  <a:srgbClr val="FFFF00"/>
+                </a:highlight>
                 <a:latin typeface="Calibri"/>
                 <a:cs typeface="Calibri"/>
               </a:rPr>
               <a:t>table.</a:t>
             </a:r>
             <a:endParaRPr sz="2000" dirty="0">
+              <a:highlight>
+                <a:srgbClr val="FFFF00"/>
+              </a:highlight>
               <a:latin typeface="Calibri"/>
               <a:cs typeface="Calibri"/>
             </a:endParaRPr>
@@ -16428,6 +18254,9 @@
             </a:pPr>
             <a:r>
               <a:rPr sz="2000" spc="-30" dirty="0">
+                <a:highlight>
+                  <a:srgbClr val="FFFF00"/>
+                </a:highlight>
                 <a:latin typeface="Calibri"/>
                 <a:cs typeface="Calibri"/>
               </a:rPr>
@@ -16435,6 +18264,9 @@
             </a:r>
             <a:r>
               <a:rPr sz="2000" i="1" spc="-5" dirty="0">
+                <a:highlight>
+                  <a:srgbClr val="FFFF00"/>
+                </a:highlight>
                 <a:latin typeface="Calibri"/>
                 <a:cs typeface="Calibri"/>
               </a:rPr>
@@ -16442,6 +18274,9 @@
             </a:r>
             <a:r>
               <a:rPr sz="2000" i="1" spc="-40" dirty="0">
+                <a:highlight>
+                  <a:srgbClr val="FFFF00"/>
+                </a:highlight>
                 <a:latin typeface="Calibri"/>
                 <a:cs typeface="Calibri"/>
               </a:rPr>
@@ -16449,6 +18284,9 @@
             </a:r>
             <a:r>
               <a:rPr sz="2000" spc="-5" dirty="0">
+                <a:highlight>
+                  <a:srgbClr val="FFFF00"/>
+                </a:highlight>
                 <a:latin typeface="Calibri"/>
                 <a:cs typeface="Calibri"/>
               </a:rPr>
@@ -16456,6 +18294,9 @@
             </a:r>
             <a:r>
               <a:rPr sz="2000" spc="-25" dirty="0">
+                <a:highlight>
+                  <a:srgbClr val="FFFF00"/>
+                </a:highlight>
                 <a:latin typeface="Calibri"/>
                 <a:cs typeface="Calibri"/>
               </a:rPr>
@@ -16463,6 +18304,9 @@
             </a:r>
             <a:r>
               <a:rPr sz="2000" dirty="0">
+                <a:highlight>
+                  <a:srgbClr val="FFFF00"/>
+                </a:highlight>
                 <a:latin typeface="Calibri"/>
                 <a:cs typeface="Calibri"/>
               </a:rPr>
@@ -16470,6 +18314,9 @@
             </a:r>
             <a:r>
               <a:rPr sz="2000" spc="-35" dirty="0">
+                <a:highlight>
+                  <a:srgbClr val="FFFF00"/>
+                </a:highlight>
                 <a:latin typeface="Calibri"/>
                 <a:cs typeface="Calibri"/>
               </a:rPr>
@@ -16477,6 +18324,9 @@
             </a:r>
             <a:r>
               <a:rPr sz="2000" i="1" spc="-5" dirty="0">
+                <a:highlight>
+                  <a:srgbClr val="FFFF00"/>
+                </a:highlight>
                 <a:latin typeface="Calibri"/>
                 <a:cs typeface="Calibri"/>
               </a:rPr>
@@ -16484,12 +18334,18 @@
             </a:r>
             <a:r>
               <a:rPr sz="2000" spc="-5" dirty="0">
+                <a:highlight>
+                  <a:srgbClr val="FFFF00"/>
+                </a:highlight>
                 <a:latin typeface="Calibri"/>
                 <a:cs typeface="Calibri"/>
               </a:rPr>
               <a:t>;</a:t>
             </a:r>
             <a:endParaRPr sz="2000" dirty="0">
+              <a:highlight>
+                <a:srgbClr val="FFFF00"/>
+              </a:highlight>
               <a:latin typeface="Calibri"/>
               <a:cs typeface="Calibri"/>
             </a:endParaRPr>
@@ -16501,13 +18357,6 @@
   <p:clrMapOvr>
     <a:masterClrMapping/>
   </p:clrMapOvr>
-  <p:timing>
-    <p:tnLst>
-      <p:par>
-        <p:cTn id="1" dur="indefinite" restart="never" nodeType="tmRoot"/>
-      </p:par>
-    </p:tnLst>
-  </p:timing>
 </p:sld>
 </file>
 
@@ -16624,6 +18473,108 @@
           </a:extLst>
         </p:spPr>
       </p:pic>
+      <mc:AlternateContent xmlns:mc="http://schemas.openxmlformats.org/markup-compatibility/2006">
+        <mc:Choice xmlns:p14="http://schemas.microsoft.com/office/powerpoint/2010/main" Requires="p14">
+          <p:contentPart p14:bwMode="auto" r:id="rId3">
+            <p14:nvContentPartPr>
+              <p14:cNvPr id="4" name="Ink 3">
+                <a:extLst>
+                  <a:ext uri="{FF2B5EF4-FFF2-40B4-BE49-F238E27FC236}">
+                    <a16:creationId xmlns:a16="http://schemas.microsoft.com/office/drawing/2014/main" id="{AC2FB767-A8B7-92EC-B03F-A598FF128540}"/>
+                  </a:ext>
+                </a:extLst>
+              </p14:cNvPr>
+              <p14:cNvContentPartPr/>
+              <p14:nvPr/>
+            </p14:nvContentPartPr>
+            <p14:xfrm>
+              <a:off x="358141" y="1723935"/>
+              <a:ext cx="8230320" cy="1009800"/>
+            </p14:xfrm>
+          </p:contentPart>
+        </mc:Choice>
+        <mc:Fallback>
+          <p:pic>
+            <p:nvPicPr>
+              <p:cNvPr id="4" name="Ink 3">
+                <a:extLst>
+                  <a:ext uri="{FF2B5EF4-FFF2-40B4-BE49-F238E27FC236}">
+                    <a16:creationId xmlns:a16="http://schemas.microsoft.com/office/drawing/2014/main" id="{AC2FB767-A8B7-92EC-B03F-A598FF128540}"/>
+                  </a:ext>
+                </a:extLst>
+              </p:cNvPr>
+              <p:cNvPicPr/>
+              <p:nvPr/>
+            </p:nvPicPr>
+            <p:blipFill>
+              <a:blip r:embed="rId4"/>
+              <a:stretch>
+                <a:fillRect/>
+              </a:stretch>
+            </p:blipFill>
+            <p:spPr>
+              <a:xfrm>
+                <a:off x="304141" y="1616295"/>
+                <a:ext cx="8337960" cy="1225440"/>
+              </a:xfrm>
+              <a:prstGeom prst="rect">
+                <a:avLst/>
+              </a:prstGeom>
+            </p:spPr>
+          </p:pic>
+        </mc:Fallback>
+      </mc:AlternateContent>
+      <mc:AlternateContent xmlns:mc="http://schemas.openxmlformats.org/markup-compatibility/2006">
+        <mc:Choice xmlns:p14="http://schemas.microsoft.com/office/powerpoint/2010/main" Requires="p14">
+          <p:contentPart p14:bwMode="auto" r:id="rId5">
+            <p14:nvContentPartPr>
+              <p14:cNvPr id="5" name="Ink 4">
+                <a:extLst>
+                  <a:ext uri="{FF2B5EF4-FFF2-40B4-BE49-F238E27FC236}">
+                    <a16:creationId xmlns:a16="http://schemas.microsoft.com/office/drawing/2014/main" id="{492954B5-D961-401D-D125-FF64958D5559}"/>
+                  </a:ext>
+                </a:extLst>
+              </p14:cNvPr>
+              <p14:cNvContentPartPr/>
+              <p14:nvPr/>
+            </p14:nvContentPartPr>
+            <p14:xfrm>
+              <a:off x="610501" y="4048815"/>
+              <a:ext cx="8399160" cy="824760"/>
+            </p14:xfrm>
+          </p:contentPart>
+        </mc:Choice>
+        <mc:Fallback>
+          <p:pic>
+            <p:nvPicPr>
+              <p:cNvPr id="5" name="Ink 4">
+                <a:extLst>
+                  <a:ext uri="{FF2B5EF4-FFF2-40B4-BE49-F238E27FC236}">
+                    <a16:creationId xmlns:a16="http://schemas.microsoft.com/office/drawing/2014/main" id="{492954B5-D961-401D-D125-FF64958D5559}"/>
+                  </a:ext>
+                </a:extLst>
+              </p:cNvPr>
+              <p:cNvPicPr/>
+              <p:nvPr/>
+            </p:nvPicPr>
+            <p:blipFill>
+              <a:blip r:embed="rId6"/>
+              <a:stretch>
+                <a:fillRect/>
+              </a:stretch>
+            </p:blipFill>
+            <p:spPr>
+              <a:xfrm>
+                <a:off x="556501" y="3940815"/>
+                <a:ext cx="8506800" cy="1040400"/>
+              </a:xfrm>
+              <a:prstGeom prst="rect">
+                <a:avLst/>
+              </a:prstGeom>
+            </p:spPr>
+          </p:pic>
+        </mc:Fallback>
+      </mc:AlternateContent>
     </p:spTree>
     <p:extLst>
       <p:ext uri="{BB962C8B-B14F-4D97-AF65-F5344CB8AC3E}">
@@ -16634,13 +18585,6 @@
   <p:clrMapOvr>
     <a:masterClrMapping/>
   </p:clrMapOvr>
-  <p:timing>
-    <p:tnLst>
-      <p:par>
-        <p:cTn id="1" dur="indefinite" restart="never" nodeType="tmRoot"/>
-      </p:par>
-    </p:tnLst>
-  </p:timing>
 </p:sld>
 </file>
 
@@ -16779,13 +18723,6 @@
   <p:clrMapOvr>
     <a:masterClrMapping/>
   </p:clrMapOvr>
-  <p:timing>
-    <p:tnLst>
-      <p:par>
-        <p:cTn id="1" dur="indefinite" restart="never" nodeType="tmRoot"/>
-      </p:par>
-    </p:tnLst>
-  </p:timing>
 </p:sld>
 </file>
 
@@ -17677,6 +19614,9 @@
             </a:pPr>
             <a:r>
               <a:rPr sz="2000" spc="-10" dirty="0">
+                <a:highlight>
+                  <a:srgbClr val="FFFF00"/>
+                </a:highlight>
                 <a:latin typeface="Calibri"/>
                 <a:cs typeface="Calibri"/>
               </a:rPr>
@@ -17684,6 +19624,9 @@
             </a:r>
             <a:r>
               <a:rPr sz="2000" dirty="0">
+                <a:highlight>
+                  <a:srgbClr val="FFFF00"/>
+                </a:highlight>
                 <a:latin typeface="Calibri"/>
                 <a:cs typeface="Calibri"/>
               </a:rPr>
@@ -17691,6 +19634,9 @@
             </a:r>
             <a:r>
               <a:rPr sz="2000" spc="-25" dirty="0">
+                <a:highlight>
+                  <a:srgbClr val="FFFF00"/>
+                </a:highlight>
                 <a:latin typeface="Calibri"/>
                 <a:cs typeface="Calibri"/>
               </a:rPr>
@@ -17698,6 +19644,9 @@
             </a:r>
             <a:r>
               <a:rPr sz="2000" spc="-15" dirty="0">
+                <a:highlight>
+                  <a:srgbClr val="FFFF00"/>
+                </a:highlight>
                 <a:latin typeface="Calibri"/>
                 <a:cs typeface="Calibri"/>
               </a:rPr>
@@ -17705,6 +19654,9 @@
             </a:r>
             <a:r>
               <a:rPr sz="2000" spc="-10" dirty="0">
+                <a:highlight>
+                  <a:srgbClr val="FFFF00"/>
+                </a:highlight>
                 <a:latin typeface="Calibri"/>
                 <a:cs typeface="Calibri"/>
               </a:rPr>
@@ -17712,6 +19664,9 @@
             </a:r>
             <a:r>
               <a:rPr sz="2000" spc="-440" dirty="0">
+                <a:highlight>
+                  <a:srgbClr val="FFFF00"/>
+                </a:highlight>
                 <a:latin typeface="Calibri"/>
                 <a:cs typeface="Calibri"/>
               </a:rPr>
@@ -17719,6 +19674,9 @@
             </a:r>
             <a:r>
               <a:rPr sz="2000" dirty="0">
+                <a:highlight>
+                  <a:srgbClr val="FFFF00"/>
+                </a:highlight>
                 <a:latin typeface="Calibri"/>
                 <a:cs typeface="Calibri"/>
               </a:rPr>
@@ -17726,6 +19684,9 @@
             </a:r>
             <a:r>
               <a:rPr sz="2000" spc="-5" dirty="0">
+                <a:highlight>
+                  <a:srgbClr val="FFFF00"/>
+                </a:highlight>
                 <a:latin typeface="Calibri"/>
                 <a:cs typeface="Calibri"/>
               </a:rPr>
@@ -17733,6 +19694,9 @@
             </a:r>
             <a:r>
               <a:rPr sz="2000" dirty="0">
+                <a:highlight>
+                  <a:srgbClr val="FFFF00"/>
+                </a:highlight>
                 <a:latin typeface="Calibri"/>
                 <a:cs typeface="Calibri"/>
               </a:rPr>
@@ -17740,6 +19704,9 @@
             </a:r>
             <a:r>
               <a:rPr sz="2000" spc="5" dirty="0">
+                <a:highlight>
+                  <a:srgbClr val="FFFF00"/>
+                </a:highlight>
                 <a:latin typeface="Calibri"/>
                 <a:cs typeface="Calibri"/>
               </a:rPr>
@@ -17747,6 +19714,9 @@
             </a:r>
             <a:r>
               <a:rPr sz="2000" spc="-5" dirty="0">
+                <a:highlight>
+                  <a:srgbClr val="FFFF00"/>
+                </a:highlight>
                 <a:latin typeface="Calibri"/>
                 <a:cs typeface="Calibri"/>
               </a:rPr>
@@ -17754,6 +19724,9 @@
             </a:r>
             <a:r>
               <a:rPr sz="2000" dirty="0">
+                <a:highlight>
+                  <a:srgbClr val="FFFF00"/>
+                </a:highlight>
                 <a:latin typeface="Calibri"/>
                 <a:cs typeface="Calibri"/>
               </a:rPr>
@@ -17761,6 +19734,9 @@
             </a:r>
             <a:r>
               <a:rPr sz="2000" spc="5" dirty="0">
+                <a:highlight>
+                  <a:srgbClr val="FFFF00"/>
+                </a:highlight>
                 <a:latin typeface="Calibri"/>
                 <a:cs typeface="Calibri"/>
               </a:rPr>
@@ -17768,6 +19744,9 @@
             </a:r>
             <a:r>
               <a:rPr sz="2000" dirty="0">
+                <a:highlight>
+                  <a:srgbClr val="FFFF00"/>
+                </a:highlight>
                 <a:latin typeface="Calibri"/>
                 <a:cs typeface="Calibri"/>
               </a:rPr>
@@ -17775,6 +19754,9 @@
             </a:r>
             <a:r>
               <a:rPr sz="2000" spc="-5" dirty="0">
+                <a:highlight>
+                  <a:srgbClr val="FFFF00"/>
+                </a:highlight>
                 <a:latin typeface="Calibri"/>
                 <a:cs typeface="Calibri"/>
               </a:rPr>
@@ -17782,6 +19764,9 @@
             </a:r>
             <a:r>
               <a:rPr sz="2000" dirty="0">
+                <a:highlight>
+                  <a:srgbClr val="FFFF00"/>
+                </a:highlight>
                 <a:latin typeface="Calibri"/>
                 <a:cs typeface="Calibri"/>
               </a:rPr>
@@ -17789,6 +19774,9 @@
             </a:r>
             <a:r>
               <a:rPr sz="2000" spc="5" dirty="0">
+                <a:highlight>
+                  <a:srgbClr val="FFFF00"/>
+                </a:highlight>
                 <a:latin typeface="Calibri"/>
                 <a:cs typeface="Calibri"/>
               </a:rPr>
@@ -17796,6 +19784,9 @@
             </a:r>
             <a:r>
               <a:rPr sz="2000" spc="-10" dirty="0">
+                <a:highlight>
+                  <a:srgbClr val="FFFF00"/>
+                </a:highlight>
                 <a:latin typeface="Calibri"/>
                 <a:cs typeface="Calibri"/>
               </a:rPr>
@@ -17803,6 +19794,9 @@
             </a:r>
             <a:r>
               <a:rPr sz="2000" spc="-5" dirty="0">
+                <a:highlight>
+                  <a:srgbClr val="FFFF00"/>
+                </a:highlight>
                 <a:latin typeface="Calibri"/>
                 <a:cs typeface="Calibri"/>
               </a:rPr>
@@ -17810,6 +19804,9 @@
             </a:r>
             <a:r>
               <a:rPr sz="2000" dirty="0">
+                <a:highlight>
+                  <a:srgbClr val="FFFF00"/>
+                </a:highlight>
                 <a:latin typeface="Calibri"/>
                 <a:cs typeface="Calibri"/>
               </a:rPr>
@@ -17817,6 +19814,9 @@
             </a:r>
             <a:r>
               <a:rPr sz="2000" spc="5" dirty="0">
+                <a:highlight>
+                  <a:srgbClr val="FFFF00"/>
+                </a:highlight>
                 <a:latin typeface="Calibri"/>
                 <a:cs typeface="Calibri"/>
               </a:rPr>
@@ -17824,12 +19824,18 @@
             </a:r>
             <a:r>
               <a:rPr sz="2000" spc="-10" dirty="0">
+                <a:highlight>
+                  <a:srgbClr val="FFFF00"/>
+                </a:highlight>
                 <a:latin typeface="Calibri"/>
                 <a:cs typeface="Calibri"/>
               </a:rPr>
               <a:t>processed.</a:t>
             </a:r>
-            <a:endParaRPr sz="2000">
+            <a:endParaRPr sz="2000" dirty="0">
+              <a:highlight>
+                <a:srgbClr val="FFFF00"/>
+              </a:highlight>
               <a:latin typeface="Calibri"/>
               <a:cs typeface="Calibri"/>
             </a:endParaRPr>
@@ -17851,6 +19857,9 @@
             </a:pPr>
             <a:r>
               <a:rPr sz="2000" dirty="0">
+                <a:highlight>
+                  <a:srgbClr val="FFFF00"/>
+                </a:highlight>
                 <a:latin typeface="Calibri"/>
                 <a:cs typeface="Calibri"/>
               </a:rPr>
@@ -17858,6 +19867,9 @@
             </a:r>
             <a:r>
               <a:rPr sz="2000" spc="-10" dirty="0">
+                <a:highlight>
+                  <a:srgbClr val="FFFF00"/>
+                </a:highlight>
                 <a:latin typeface="Calibri"/>
                 <a:cs typeface="Calibri"/>
               </a:rPr>
@@ -17865,6 +19877,9 @@
             </a:r>
             <a:r>
               <a:rPr sz="2000" spc="-5" dirty="0">
+                <a:highlight>
+                  <a:srgbClr val="FFFF00"/>
+                </a:highlight>
                 <a:latin typeface="Calibri"/>
                 <a:cs typeface="Calibri"/>
               </a:rPr>
@@ -17872,6 +19887,9 @@
             </a:r>
             <a:r>
               <a:rPr sz="2000" dirty="0">
+                <a:highlight>
+                  <a:srgbClr val="FFFF00"/>
+                </a:highlight>
                 <a:latin typeface="Calibri"/>
                 <a:cs typeface="Calibri"/>
               </a:rPr>
@@ -17879,6 +19897,9 @@
             </a:r>
             <a:r>
               <a:rPr sz="2000" spc="-5" dirty="0">
+                <a:highlight>
+                  <a:srgbClr val="FFFF00"/>
+                </a:highlight>
                 <a:latin typeface="Calibri"/>
                 <a:cs typeface="Calibri"/>
               </a:rPr>
@@ -17886,6 +19907,9 @@
             </a:r>
             <a:r>
               <a:rPr sz="2000" dirty="0">
+                <a:highlight>
+                  <a:srgbClr val="FFFF00"/>
+                </a:highlight>
                 <a:latin typeface="Calibri"/>
                 <a:cs typeface="Calibri"/>
               </a:rPr>
@@ -17893,6 +19917,9 @@
             </a:r>
             <a:r>
               <a:rPr sz="2000" spc="-5" dirty="0">
+                <a:highlight>
+                  <a:srgbClr val="FFFF00"/>
+                </a:highlight>
                 <a:latin typeface="Calibri"/>
                 <a:cs typeface="Calibri"/>
               </a:rPr>
@@ -17900,6 +19927,9 @@
             </a:r>
             <a:r>
               <a:rPr sz="2000" spc="-15" dirty="0">
+                <a:highlight>
+                  <a:srgbClr val="FFFF00"/>
+                </a:highlight>
                 <a:latin typeface="Calibri"/>
                 <a:cs typeface="Calibri"/>
               </a:rPr>
@@ -17907,6 +19937,9 @@
             </a:r>
             <a:r>
               <a:rPr sz="2000" spc="-10" dirty="0">
+                <a:highlight>
+                  <a:srgbClr val="FFFF00"/>
+                </a:highlight>
                 <a:latin typeface="Calibri"/>
                 <a:cs typeface="Calibri"/>
               </a:rPr>
@@ -17914,6 +19947,9 @@
             </a:r>
             <a:r>
               <a:rPr sz="2000" dirty="0">
+                <a:highlight>
+                  <a:srgbClr val="FFFF00"/>
+                </a:highlight>
                 <a:latin typeface="Calibri"/>
                 <a:cs typeface="Calibri"/>
               </a:rPr>
@@ -17921,6 +19957,9 @@
             </a:r>
             <a:r>
               <a:rPr sz="2000" spc="-35" dirty="0">
+                <a:highlight>
+                  <a:srgbClr val="FFFF00"/>
+                </a:highlight>
                 <a:latin typeface="Calibri"/>
                 <a:cs typeface="Calibri"/>
               </a:rPr>
@@ -17928,6 +19967,9 @@
             </a:r>
             <a:r>
               <a:rPr sz="2000" spc="-10" dirty="0">
+                <a:highlight>
+                  <a:srgbClr val="FFFF00"/>
+                </a:highlight>
                 <a:latin typeface="Calibri"/>
                 <a:cs typeface="Calibri"/>
               </a:rPr>
@@ -17935,6 +19977,9 @@
             </a:r>
             <a:r>
               <a:rPr sz="2000" spc="-5" dirty="0">
+                <a:highlight>
+                  <a:srgbClr val="FFFF00"/>
+                </a:highlight>
                 <a:latin typeface="Calibri"/>
                 <a:cs typeface="Calibri"/>
               </a:rPr>
@@ -17942,6 +19987,9 @@
             </a:r>
             <a:r>
               <a:rPr sz="2000" dirty="0">
+                <a:highlight>
+                  <a:srgbClr val="FFFF00"/>
+                </a:highlight>
                 <a:latin typeface="Calibri"/>
                 <a:cs typeface="Calibri"/>
               </a:rPr>
@@ -17949,6 +19997,9 @@
             </a:r>
             <a:r>
               <a:rPr sz="2000" spc="-20" dirty="0">
+                <a:highlight>
+                  <a:srgbClr val="FFFF00"/>
+                </a:highlight>
                 <a:latin typeface="Calibri"/>
                 <a:cs typeface="Calibri"/>
               </a:rPr>
@@ -17956,6 +20007,9 @@
             </a:r>
             <a:r>
               <a:rPr sz="2000" dirty="0">
+                <a:highlight>
+                  <a:srgbClr val="FFFF00"/>
+                </a:highlight>
                 <a:latin typeface="Calibri"/>
                 <a:cs typeface="Calibri"/>
               </a:rPr>
@@ -17963,6 +20017,9 @@
             </a:r>
             <a:r>
               <a:rPr sz="2000" spc="-10" dirty="0">
+                <a:highlight>
+                  <a:srgbClr val="FFFF00"/>
+                </a:highlight>
                 <a:latin typeface="Calibri"/>
                 <a:cs typeface="Calibri"/>
               </a:rPr>
@@ -17970,6 +20027,9 @@
             </a:r>
             <a:r>
               <a:rPr sz="2000" dirty="0">
+                <a:highlight>
+                  <a:srgbClr val="FFFF00"/>
+                </a:highlight>
                 <a:latin typeface="Calibri"/>
                 <a:cs typeface="Calibri"/>
               </a:rPr>
@@ -17977,6 +20037,9 @@
             </a:r>
             <a:r>
               <a:rPr sz="2000" spc="-434" dirty="0">
+                <a:highlight>
+                  <a:srgbClr val="FFFF00"/>
+                </a:highlight>
                 <a:latin typeface="Calibri"/>
                 <a:cs typeface="Calibri"/>
               </a:rPr>
@@ -17984,6 +20047,9 @@
             </a:r>
             <a:r>
               <a:rPr sz="2000" spc="-15" dirty="0">
+                <a:highlight>
+                  <a:srgbClr val="FFFF00"/>
+                </a:highlight>
                 <a:latin typeface="Calibri"/>
                 <a:cs typeface="Calibri"/>
               </a:rPr>
@@ -17991,6 +20057,9 @@
             </a:r>
             <a:r>
               <a:rPr sz="2000" spc="-5" dirty="0">
+                <a:highlight>
+                  <a:srgbClr val="FFFF00"/>
+                </a:highlight>
                 <a:latin typeface="Calibri"/>
                 <a:cs typeface="Calibri"/>
               </a:rPr>
@@ -17998,6 +20067,9 @@
             </a:r>
             <a:r>
               <a:rPr sz="2000" dirty="0">
+                <a:highlight>
+                  <a:srgbClr val="FFFF00"/>
+                </a:highlight>
                 <a:latin typeface="Calibri"/>
                 <a:cs typeface="Calibri"/>
               </a:rPr>
@@ -18005,6 +20077,9 @@
             </a:r>
             <a:r>
               <a:rPr sz="2000" spc="-5" dirty="0">
+                <a:highlight>
+                  <a:srgbClr val="FFFF00"/>
+                </a:highlight>
                 <a:latin typeface="Calibri"/>
                 <a:cs typeface="Calibri"/>
               </a:rPr>
@@ -18012,6 +20087,9 @@
             </a:r>
             <a:r>
               <a:rPr sz="2000" dirty="0">
+                <a:highlight>
+                  <a:srgbClr val="FFFF00"/>
+                </a:highlight>
                 <a:latin typeface="Calibri"/>
                 <a:cs typeface="Calibri"/>
               </a:rPr>
@@ -18019,6 +20097,9 @@
             </a:r>
             <a:r>
               <a:rPr sz="2000" spc="-10" dirty="0">
+                <a:highlight>
+                  <a:srgbClr val="FFFF00"/>
+                </a:highlight>
                 <a:latin typeface="Calibri"/>
                 <a:cs typeface="Calibri"/>
               </a:rPr>
@@ -18026,12 +20107,18 @@
             </a:r>
             <a:r>
               <a:rPr sz="2000" spc="-5" dirty="0">
+                <a:highlight>
+                  <a:srgbClr val="FFFF00"/>
+                </a:highlight>
                 <a:latin typeface="Calibri"/>
                 <a:cs typeface="Calibri"/>
               </a:rPr>
               <a:t>database.</a:t>
             </a:r>
-            <a:endParaRPr sz="2000">
+            <a:endParaRPr sz="2000" dirty="0">
+              <a:highlight>
+                <a:srgbClr val="FFFF00"/>
+              </a:highlight>
               <a:latin typeface="Calibri"/>
               <a:cs typeface="Calibri"/>
             </a:endParaRPr>
@@ -18403,6 +20490,9 @@
             </a:pPr>
             <a:r>
               <a:rPr sz="2800" b="1" spc="-5" dirty="0">
+                <a:highlight>
+                  <a:srgbClr val="FFFF00"/>
+                </a:highlight>
                 <a:latin typeface="Calibri"/>
                 <a:cs typeface="Calibri"/>
               </a:rPr>
@@ -18410,6 +20500,9 @@
             </a:r>
             <a:r>
               <a:rPr sz="2800" b="1" spc="15" dirty="0">
+                <a:highlight>
+                  <a:srgbClr val="FFFF00"/>
+                </a:highlight>
                 <a:latin typeface="Calibri"/>
                 <a:cs typeface="Calibri"/>
               </a:rPr>
@@ -18417,6 +20510,9 @@
             </a:r>
             <a:r>
               <a:rPr sz="2800" b="1" spc="-20" dirty="0">
+                <a:highlight>
+                  <a:srgbClr val="FFFF00"/>
+                </a:highlight>
                 <a:latin typeface="Calibri"/>
                 <a:cs typeface="Calibri"/>
               </a:rPr>
@@ -18424,6 +20520,9 @@
             </a:r>
             <a:r>
               <a:rPr sz="2800" spc="-20" dirty="0">
+                <a:highlight>
+                  <a:srgbClr val="FFFF00"/>
+                </a:highlight>
                 <a:latin typeface="Calibri"/>
                 <a:cs typeface="Calibri"/>
               </a:rPr>
@@ -18431,6 +20530,9 @@
             </a:r>
             <a:r>
               <a:rPr sz="2800" spc="25" dirty="0">
+                <a:highlight>
+                  <a:srgbClr val="FFFF00"/>
+                </a:highlight>
                 <a:latin typeface="Calibri"/>
                 <a:cs typeface="Calibri"/>
               </a:rPr>
@@ -18438,6 +20540,9 @@
             </a:r>
             <a:r>
               <a:rPr sz="2800" spc="-10" dirty="0">
+                <a:highlight>
+                  <a:srgbClr val="FFFF00"/>
+                </a:highlight>
                 <a:latin typeface="Calibri"/>
                 <a:cs typeface="Calibri"/>
               </a:rPr>
@@ -18445,6 +20550,9 @@
             </a:r>
             <a:r>
               <a:rPr sz="2800" spc="10" dirty="0">
+                <a:highlight>
+                  <a:srgbClr val="FFFF00"/>
+                </a:highlight>
                 <a:latin typeface="Calibri"/>
                 <a:cs typeface="Calibri"/>
               </a:rPr>
@@ -18452,6 +20560,9 @@
             </a:r>
             <a:r>
               <a:rPr sz="2800" spc="-35" dirty="0">
+                <a:highlight>
+                  <a:srgbClr val="FFFF00"/>
+                </a:highlight>
                 <a:latin typeface="Calibri"/>
                 <a:cs typeface="Calibri"/>
               </a:rPr>
@@ -18459,6 +20570,9 @@
             </a:r>
             <a:r>
               <a:rPr sz="2800" dirty="0">
+                <a:highlight>
+                  <a:srgbClr val="FFFF00"/>
+                </a:highlight>
                 <a:latin typeface="Calibri"/>
                 <a:cs typeface="Calibri"/>
               </a:rPr>
@@ -18466,6 +20580,9 @@
             </a:r>
             <a:r>
               <a:rPr sz="2800" spc="-15" dirty="0">
+                <a:highlight>
+                  <a:srgbClr val="FFFF00"/>
+                </a:highlight>
                 <a:latin typeface="Calibri"/>
                 <a:cs typeface="Calibri"/>
               </a:rPr>
@@ -18473,6 +20590,9 @@
             </a:r>
             <a:r>
               <a:rPr sz="2800" dirty="0">
+                <a:highlight>
+                  <a:srgbClr val="FFFF00"/>
+                </a:highlight>
                 <a:latin typeface="Calibri"/>
                 <a:cs typeface="Calibri"/>
               </a:rPr>
@@ -18480,6 +20600,9 @@
             </a:r>
             <a:r>
               <a:rPr sz="2800" spc="-5" dirty="0">
+                <a:highlight>
+                  <a:srgbClr val="FFFF00"/>
+                </a:highlight>
                 <a:latin typeface="Calibri"/>
                 <a:cs typeface="Calibri"/>
               </a:rPr>
@@ -18487,6 +20610,9 @@
             </a:r>
             <a:r>
               <a:rPr sz="2800" spc="15" dirty="0">
+                <a:highlight>
+                  <a:srgbClr val="FFFF00"/>
+                </a:highlight>
                 <a:latin typeface="Calibri"/>
                 <a:cs typeface="Calibri"/>
               </a:rPr>
@@ -18494,6 +20620,9 @@
             </a:r>
             <a:r>
               <a:rPr sz="2800" spc="-10" dirty="0">
+                <a:highlight>
+                  <a:srgbClr val="FFFF00"/>
+                </a:highlight>
                 <a:latin typeface="Calibri"/>
                 <a:cs typeface="Calibri"/>
               </a:rPr>
@@ -18501,6 +20630,9 @@
             </a:r>
             <a:r>
               <a:rPr sz="2800" spc="20" dirty="0">
+                <a:highlight>
+                  <a:srgbClr val="FFFF00"/>
+                </a:highlight>
                 <a:latin typeface="Calibri"/>
                 <a:cs typeface="Calibri"/>
               </a:rPr>
@@ -18508,6 +20640,9 @@
             </a:r>
             <a:r>
               <a:rPr sz="2800" spc="-5" dirty="0">
+                <a:highlight>
+                  <a:srgbClr val="FFFF00"/>
+                </a:highlight>
                 <a:latin typeface="Calibri"/>
                 <a:cs typeface="Calibri"/>
               </a:rPr>
@@ -18515,6 +20650,9 @@
             </a:r>
             <a:r>
               <a:rPr sz="2800" spc="5" dirty="0">
+                <a:highlight>
+                  <a:srgbClr val="FFFF00"/>
+                </a:highlight>
                 <a:latin typeface="Calibri"/>
                 <a:cs typeface="Calibri"/>
               </a:rPr>
@@ -18522,6 +20660,9 @@
             </a:r>
             <a:r>
               <a:rPr sz="2800" spc="-10" dirty="0">
+                <a:highlight>
+                  <a:srgbClr val="FFFF00"/>
+                </a:highlight>
                 <a:latin typeface="Calibri"/>
                 <a:cs typeface="Calibri"/>
               </a:rPr>
@@ -18529,6 +20670,9 @@
             </a:r>
             <a:r>
               <a:rPr sz="2800" spc="35" dirty="0">
+                <a:highlight>
+                  <a:srgbClr val="FFFF00"/>
+                </a:highlight>
                 <a:latin typeface="Calibri"/>
                 <a:cs typeface="Calibri"/>
               </a:rPr>
@@ -18536,6 +20680,9 @@
             </a:r>
             <a:r>
               <a:rPr sz="2800" spc="-5" dirty="0">
+                <a:highlight>
+                  <a:srgbClr val="FFFF00"/>
+                </a:highlight>
                 <a:latin typeface="Calibri"/>
                 <a:cs typeface="Calibri"/>
               </a:rPr>
@@ -18543,6 +20690,9 @@
             </a:r>
             <a:r>
               <a:rPr sz="2800" dirty="0">
+                <a:highlight>
+                  <a:srgbClr val="FFFF00"/>
+                </a:highlight>
                 <a:latin typeface="Calibri"/>
                 <a:cs typeface="Calibri"/>
               </a:rPr>
@@ -18550,6 +20700,9 @@
             </a:r>
             <a:r>
               <a:rPr sz="2800" spc="-10" dirty="0">
+                <a:highlight>
+                  <a:srgbClr val="FFFF00"/>
+                </a:highlight>
                 <a:latin typeface="Calibri"/>
                 <a:cs typeface="Calibri"/>
               </a:rPr>
@@ -18557,6 +20710,9 @@
             </a:r>
             <a:r>
               <a:rPr sz="2800" dirty="0">
+                <a:highlight>
+                  <a:srgbClr val="FFFF00"/>
+                </a:highlight>
                 <a:latin typeface="Calibri"/>
                 <a:cs typeface="Calibri"/>
               </a:rPr>
@@ -18564,6 +20720,9 @@
             </a:r>
             <a:r>
               <a:rPr sz="2800" spc="-10" dirty="0">
+                <a:highlight>
+                  <a:srgbClr val="FFFF00"/>
+                </a:highlight>
                 <a:latin typeface="Calibri"/>
                 <a:cs typeface="Calibri"/>
               </a:rPr>
@@ -18571,6 +20730,9 @@
             </a:r>
             <a:r>
               <a:rPr sz="2800" spc="-620" dirty="0">
+                <a:highlight>
+                  <a:srgbClr val="FFFF00"/>
+                </a:highlight>
                 <a:latin typeface="Calibri"/>
                 <a:cs typeface="Calibri"/>
               </a:rPr>
@@ -18578,6 +20740,9 @@
             </a:r>
             <a:r>
               <a:rPr sz="2800" spc="-10" dirty="0">
+                <a:highlight>
+                  <a:srgbClr val="FFFF00"/>
+                </a:highlight>
                 <a:latin typeface="Calibri"/>
                 <a:cs typeface="Calibri"/>
               </a:rPr>
@@ -18585,6 +20750,9 @@
             </a:r>
             <a:r>
               <a:rPr sz="2800" spc="10" dirty="0">
+                <a:highlight>
+                  <a:srgbClr val="FFFF00"/>
+                </a:highlight>
                 <a:latin typeface="Calibri"/>
                 <a:cs typeface="Calibri"/>
               </a:rPr>
@@ -18592,6 +20760,9 @@
             </a:r>
             <a:r>
               <a:rPr sz="2800" spc="-20" dirty="0">
+                <a:highlight>
+                  <a:srgbClr val="FFFF00"/>
+                </a:highlight>
                 <a:latin typeface="Calibri"/>
                 <a:cs typeface="Calibri"/>
               </a:rPr>
@@ -18599,6 +20770,9 @@
             </a:r>
             <a:r>
               <a:rPr sz="2800" dirty="0">
+                <a:highlight>
+                  <a:srgbClr val="FFFF00"/>
+                </a:highlight>
                 <a:latin typeface="Calibri"/>
                 <a:cs typeface="Calibri"/>
               </a:rPr>
@@ -18606,6 +20780,9 @@
             </a:r>
             <a:r>
               <a:rPr sz="2800" spc="15" dirty="0">
+                <a:highlight>
+                  <a:srgbClr val="FFFF00"/>
+                </a:highlight>
                 <a:latin typeface="Calibri"/>
                 <a:cs typeface="Calibri"/>
               </a:rPr>
@@ -18613,12 +20790,18 @@
             </a:r>
             <a:r>
               <a:rPr sz="2800" spc="-15" dirty="0">
+                <a:highlight>
+                  <a:srgbClr val="FFFF00"/>
+                </a:highlight>
                 <a:latin typeface="Calibri"/>
                 <a:cs typeface="Calibri"/>
               </a:rPr>
               <a:t>etc.</a:t>
             </a:r>
-            <a:endParaRPr sz="2800">
+            <a:endParaRPr sz="2800" dirty="0">
+              <a:highlight>
+                <a:srgbClr val="FFFF00"/>
+              </a:highlight>
               <a:latin typeface="Calibri"/>
               <a:cs typeface="Calibri"/>
             </a:endParaRPr>
@@ -18639,6 +20822,9 @@
             </a:pPr>
             <a:r>
               <a:rPr sz="2800" b="1" spc="-5" dirty="0">
+                <a:highlight>
+                  <a:srgbClr val="FFFF00"/>
+                </a:highlight>
                 <a:latin typeface="Calibri"/>
                 <a:cs typeface="Calibri"/>
               </a:rPr>
@@ -18646,6 +20832,9 @@
             </a:r>
             <a:r>
               <a:rPr sz="2800" b="1" spc="20" dirty="0">
+                <a:highlight>
+                  <a:srgbClr val="FFFF00"/>
+                </a:highlight>
                 <a:latin typeface="Calibri"/>
                 <a:cs typeface="Calibri"/>
               </a:rPr>
@@ -18653,6 +20842,9 @@
             </a:r>
             <a:r>
               <a:rPr sz="2800" b="1" spc="-10" dirty="0">
+                <a:highlight>
+                  <a:srgbClr val="FFFF00"/>
+                </a:highlight>
                 <a:latin typeface="Calibri"/>
                 <a:cs typeface="Calibri"/>
               </a:rPr>
@@ -18660,6 +20852,9 @@
             </a:r>
             <a:r>
               <a:rPr sz="2800" spc="-10" dirty="0">
+                <a:highlight>
+                  <a:srgbClr val="FFFF00"/>
+                </a:highlight>
                 <a:latin typeface="Calibri"/>
                 <a:cs typeface="Calibri"/>
               </a:rPr>
@@ -18667,6 +20862,9 @@
             </a:r>
             <a:r>
               <a:rPr sz="2800" spc="25" dirty="0">
+                <a:highlight>
+                  <a:srgbClr val="FFFF00"/>
+                </a:highlight>
                 <a:latin typeface="Calibri"/>
                 <a:cs typeface="Calibri"/>
               </a:rPr>
@@ -18674,6 +20872,9 @@
             </a:r>
             <a:r>
               <a:rPr sz="2800" spc="-5" dirty="0">
+                <a:highlight>
+                  <a:srgbClr val="FFFF00"/>
+                </a:highlight>
                 <a:latin typeface="Calibri"/>
                 <a:cs typeface="Calibri"/>
               </a:rPr>
@@ -18681,6 +20882,9 @@
             </a:r>
             <a:r>
               <a:rPr sz="2800" dirty="0">
+                <a:highlight>
+                  <a:srgbClr val="FFFF00"/>
+                </a:highlight>
                 <a:latin typeface="Calibri"/>
                 <a:cs typeface="Calibri"/>
               </a:rPr>
@@ -18688,6 +20892,9 @@
             </a:r>
             <a:r>
               <a:rPr sz="2800" spc="-35" dirty="0">
+                <a:highlight>
+                  <a:srgbClr val="FFFF00"/>
+                </a:highlight>
                 <a:latin typeface="Calibri"/>
                 <a:cs typeface="Calibri"/>
               </a:rPr>
@@ -18695,6 +20902,9 @@
             </a:r>
             <a:r>
               <a:rPr sz="2800" spc="10" dirty="0">
+                <a:highlight>
+                  <a:srgbClr val="FFFF00"/>
+                </a:highlight>
                 <a:latin typeface="Calibri"/>
                 <a:cs typeface="Calibri"/>
               </a:rPr>
@@ -18702,6 +20912,9 @@
             </a:r>
             <a:r>
               <a:rPr sz="2800" spc="-20" dirty="0">
+                <a:highlight>
+                  <a:srgbClr val="FFFF00"/>
+                </a:highlight>
                 <a:latin typeface="Calibri"/>
                 <a:cs typeface="Calibri"/>
               </a:rPr>
@@ -18709,6 +20922,9 @@
             </a:r>
             <a:r>
               <a:rPr sz="2800" dirty="0">
+                <a:highlight>
+                  <a:srgbClr val="FFFF00"/>
+                </a:highlight>
                 <a:latin typeface="Calibri"/>
                 <a:cs typeface="Calibri"/>
               </a:rPr>
@@ -18716,6 +20932,9 @@
             </a:r>
             <a:r>
               <a:rPr sz="2800" spc="-5" dirty="0">
+                <a:highlight>
+                  <a:srgbClr val="FFFF00"/>
+                </a:highlight>
                 <a:latin typeface="Calibri"/>
                 <a:cs typeface="Calibri"/>
               </a:rPr>
@@ -18723,6 +20942,9 @@
             </a:r>
             <a:r>
               <a:rPr sz="2800" dirty="0">
+                <a:highlight>
+                  <a:srgbClr val="FFFF00"/>
+                </a:highlight>
                 <a:latin typeface="Calibri"/>
                 <a:cs typeface="Calibri"/>
               </a:rPr>
@@ -18730,6 +20952,9 @@
             </a:r>
             <a:r>
               <a:rPr sz="2800" spc="-5" dirty="0">
+                <a:highlight>
+                  <a:srgbClr val="FFFF00"/>
+                </a:highlight>
                 <a:latin typeface="Calibri"/>
                 <a:cs typeface="Calibri"/>
               </a:rPr>
@@ -18737,6 +20962,9 @@
             </a:r>
             <a:r>
               <a:rPr sz="2800" spc="10" dirty="0">
+                <a:highlight>
+                  <a:srgbClr val="FFFF00"/>
+                </a:highlight>
                 <a:latin typeface="Calibri"/>
                 <a:cs typeface="Calibri"/>
               </a:rPr>
@@ -18744,6 +20972,9 @@
             </a:r>
             <a:r>
               <a:rPr sz="2800" spc="-10" dirty="0">
+                <a:highlight>
+                  <a:srgbClr val="FFFF00"/>
+                </a:highlight>
                 <a:latin typeface="Calibri"/>
                 <a:cs typeface="Calibri"/>
               </a:rPr>
@@ -18751,6 +20982,9 @@
             </a:r>
             <a:r>
               <a:rPr sz="2800" spc="25" dirty="0">
+                <a:highlight>
+                  <a:srgbClr val="FFFF00"/>
+                </a:highlight>
                 <a:latin typeface="Calibri"/>
                 <a:cs typeface="Calibri"/>
               </a:rPr>
@@ -18758,6 +20992,9 @@
             </a:r>
             <a:r>
               <a:rPr sz="2800" spc="-20" dirty="0">
+                <a:highlight>
+                  <a:srgbClr val="FFFF00"/>
+                </a:highlight>
                 <a:latin typeface="Calibri"/>
                 <a:cs typeface="Calibri"/>
               </a:rPr>
@@ -18765,6 +21002,9 @@
             </a:r>
             <a:r>
               <a:rPr sz="2800" dirty="0">
+                <a:highlight>
+                  <a:srgbClr val="FFFF00"/>
+                </a:highlight>
                 <a:latin typeface="Calibri"/>
                 <a:cs typeface="Calibri"/>
               </a:rPr>
@@ -18772,6 +21012,9 @@
             </a:r>
             <a:r>
               <a:rPr sz="2800" spc="-10" dirty="0">
+                <a:highlight>
+                  <a:srgbClr val="FFFF00"/>
+                </a:highlight>
                 <a:latin typeface="Calibri"/>
                 <a:cs typeface="Calibri"/>
               </a:rPr>
@@ -18779,6 +21022,9 @@
             </a:r>
             <a:r>
               <a:rPr sz="2800" spc="15" dirty="0">
+                <a:highlight>
+                  <a:srgbClr val="FFFF00"/>
+                </a:highlight>
                 <a:latin typeface="Calibri"/>
                 <a:cs typeface="Calibri"/>
               </a:rPr>
@@ -18786,6 +21032,9 @@
             </a:r>
             <a:r>
               <a:rPr sz="2800" spc="-10" dirty="0">
+                <a:highlight>
+                  <a:srgbClr val="FFFF00"/>
+                </a:highlight>
                 <a:latin typeface="Calibri"/>
                 <a:cs typeface="Calibri"/>
               </a:rPr>
@@ -18793,6 +21042,9 @@
             </a:r>
             <a:r>
               <a:rPr sz="2800" spc="25" dirty="0">
+                <a:highlight>
+                  <a:srgbClr val="FFFF00"/>
+                </a:highlight>
                 <a:latin typeface="Calibri"/>
                 <a:cs typeface="Calibri"/>
               </a:rPr>
@@ -18800,6 +21052,9 @@
             </a:r>
             <a:r>
               <a:rPr sz="2800" spc="-20" dirty="0">
+                <a:highlight>
+                  <a:srgbClr val="FFFF00"/>
+                </a:highlight>
                 <a:latin typeface="Calibri"/>
                 <a:cs typeface="Calibri"/>
               </a:rPr>
@@ -18807,6 +21062,9 @@
             </a:r>
             <a:r>
               <a:rPr sz="2800" spc="-620" dirty="0">
+                <a:highlight>
+                  <a:srgbClr val="FFFF00"/>
+                </a:highlight>
                 <a:latin typeface="Calibri"/>
                 <a:cs typeface="Calibri"/>
               </a:rPr>
@@ -18814,6 +21072,9 @@
             </a:r>
             <a:r>
               <a:rPr sz="2800" spc="-10" dirty="0">
+                <a:highlight>
+                  <a:srgbClr val="FFFF00"/>
+                </a:highlight>
                 <a:latin typeface="Calibri"/>
                 <a:cs typeface="Calibri"/>
               </a:rPr>
@@ -18821,6 +21082,9 @@
             </a:r>
             <a:r>
               <a:rPr sz="2800" dirty="0">
+                <a:highlight>
+                  <a:srgbClr val="FFFF00"/>
+                </a:highlight>
                 <a:latin typeface="Calibri"/>
                 <a:cs typeface="Calibri"/>
               </a:rPr>
@@ -18828,6 +21092,9 @@
             </a:r>
             <a:r>
               <a:rPr sz="2800" spc="10" dirty="0">
+                <a:highlight>
+                  <a:srgbClr val="FFFF00"/>
+                </a:highlight>
                 <a:latin typeface="Calibri"/>
                 <a:cs typeface="Calibri"/>
               </a:rPr>
@@ -18835,6 +21102,9 @@
             </a:r>
             <a:r>
               <a:rPr sz="2800" spc="-10" dirty="0">
+                <a:highlight>
+                  <a:srgbClr val="FFFF00"/>
+                </a:highlight>
                 <a:latin typeface="Calibri"/>
                 <a:cs typeface="Calibri"/>
               </a:rPr>
@@ -18842,6 +21112,9 @@
             </a:r>
             <a:r>
               <a:rPr sz="2800" spc="-5" dirty="0">
+                <a:highlight>
+                  <a:srgbClr val="FFFF00"/>
+                </a:highlight>
                 <a:latin typeface="Calibri"/>
                 <a:cs typeface="Calibri"/>
               </a:rPr>
@@ -18849,6 +21122,9 @@
             </a:r>
             <a:r>
               <a:rPr sz="2800" dirty="0">
+                <a:highlight>
+                  <a:srgbClr val="FFFF00"/>
+                </a:highlight>
                 <a:latin typeface="Calibri"/>
                 <a:cs typeface="Calibri"/>
               </a:rPr>
@@ -18856,12 +21132,18 @@
             </a:r>
             <a:r>
               <a:rPr sz="2800" spc="-5" dirty="0">
+                <a:highlight>
+                  <a:srgbClr val="FFFF00"/>
+                </a:highlight>
                 <a:latin typeface="Calibri"/>
                 <a:cs typeface="Calibri"/>
               </a:rPr>
               <a:t> elements.</a:t>
             </a:r>
-            <a:endParaRPr sz="2800">
+            <a:endParaRPr sz="2800" dirty="0">
+              <a:highlight>
+                <a:srgbClr val="FFFF00"/>
+              </a:highlight>
               <a:latin typeface="Calibri"/>
               <a:cs typeface="Calibri"/>
             </a:endParaRPr>
@@ -18882,6 +21164,9 @@
             </a:pPr>
             <a:r>
               <a:rPr sz="2800" b="1" spc="-5" dirty="0">
+                <a:highlight>
+                  <a:srgbClr val="FFFF00"/>
+                </a:highlight>
                 <a:latin typeface="Calibri"/>
                 <a:cs typeface="Calibri"/>
               </a:rPr>
@@ -18889,6 +21174,9 @@
             </a:r>
             <a:r>
               <a:rPr sz="2800" b="1" spc="25" dirty="0">
+                <a:highlight>
+                  <a:srgbClr val="FFFF00"/>
+                </a:highlight>
                 <a:latin typeface="Calibri"/>
                 <a:cs typeface="Calibri"/>
               </a:rPr>
@@ -18896,6 +21184,9 @@
             </a:r>
             <a:r>
               <a:rPr sz="2800" b="1" spc="-15" dirty="0">
+                <a:highlight>
+                  <a:srgbClr val="FFFF00"/>
+                </a:highlight>
                 <a:latin typeface="Calibri"/>
                 <a:cs typeface="Calibri"/>
               </a:rPr>
@@ -18903,6 +21194,9 @@
             </a:r>
             <a:r>
               <a:rPr sz="2800" spc="-15" dirty="0">
+                <a:highlight>
+                  <a:srgbClr val="FFFF00"/>
+                </a:highlight>
                 <a:latin typeface="Calibri"/>
                 <a:cs typeface="Calibri"/>
               </a:rPr>
@@ -18910,6 +21204,9 @@
             </a:r>
             <a:r>
               <a:rPr sz="2800" spc="25" dirty="0">
+                <a:highlight>
+                  <a:srgbClr val="FFFF00"/>
+                </a:highlight>
                 <a:latin typeface="Calibri"/>
                 <a:cs typeface="Calibri"/>
               </a:rPr>
@@ -18917,6 +21214,9 @@
             </a:r>
             <a:r>
               <a:rPr sz="2800" spc="-5" dirty="0">
+                <a:highlight>
+                  <a:srgbClr val="FFFF00"/>
+                </a:highlight>
                 <a:latin typeface="Calibri"/>
                 <a:cs typeface="Calibri"/>
               </a:rPr>
@@ -18924,6 +21224,9 @@
             </a:r>
             <a:r>
               <a:rPr sz="2800" dirty="0">
+                <a:highlight>
+                  <a:srgbClr val="FFFF00"/>
+                </a:highlight>
                 <a:latin typeface="Calibri"/>
                 <a:cs typeface="Calibri"/>
               </a:rPr>
@@ -18931,6 +21234,9 @@
             </a:r>
             <a:r>
               <a:rPr sz="2800" spc="-35" dirty="0">
+                <a:highlight>
+                  <a:srgbClr val="FFFF00"/>
+                </a:highlight>
                 <a:latin typeface="Calibri"/>
                 <a:cs typeface="Calibri"/>
               </a:rPr>
@@ -18938,6 +21244,9 @@
             </a:r>
             <a:r>
               <a:rPr sz="2800" spc="10" dirty="0">
+                <a:highlight>
+                  <a:srgbClr val="FFFF00"/>
+                </a:highlight>
                 <a:latin typeface="Calibri"/>
                 <a:cs typeface="Calibri"/>
               </a:rPr>
@@ -18945,6 +21254,9 @@
             </a:r>
             <a:r>
               <a:rPr sz="2800" spc="-20" dirty="0">
+                <a:highlight>
+                  <a:srgbClr val="FFFF00"/>
+                </a:highlight>
                 <a:latin typeface="Calibri"/>
                 <a:cs typeface="Calibri"/>
               </a:rPr>
@@ -18952,6 +21264,9 @@
             </a:r>
             <a:r>
               <a:rPr sz="2800" dirty="0">
+                <a:highlight>
+                  <a:srgbClr val="FFFF00"/>
+                </a:highlight>
                 <a:latin typeface="Calibri"/>
                 <a:cs typeface="Calibri"/>
               </a:rPr>
@@ -18959,6 +21274,9 @@
             </a:r>
             <a:r>
               <a:rPr sz="2800" spc="-5" dirty="0">
+                <a:highlight>
+                  <a:srgbClr val="FFFF00"/>
+                </a:highlight>
                 <a:latin typeface="Calibri"/>
                 <a:cs typeface="Calibri"/>
               </a:rPr>
@@ -18966,6 +21284,9 @@
             </a:r>
             <a:r>
               <a:rPr sz="2800" dirty="0">
+                <a:highlight>
+                  <a:srgbClr val="FFFF00"/>
+                </a:highlight>
                 <a:latin typeface="Calibri"/>
                 <a:cs typeface="Calibri"/>
               </a:rPr>
@@ -18973,6 +21294,9 @@
             </a:r>
             <a:r>
               <a:rPr sz="2800" spc="-5" dirty="0">
+                <a:highlight>
+                  <a:srgbClr val="FFFF00"/>
+                </a:highlight>
                 <a:latin typeface="Calibri"/>
                 <a:cs typeface="Calibri"/>
               </a:rPr>
@@ -18980,6 +21304,9 @@
             </a:r>
             <a:r>
               <a:rPr sz="2800" spc="10" dirty="0">
+                <a:highlight>
+                  <a:srgbClr val="FFFF00"/>
+                </a:highlight>
                 <a:latin typeface="Calibri"/>
                 <a:cs typeface="Calibri"/>
               </a:rPr>
@@ -18987,6 +21314,9 @@
             </a:r>
             <a:r>
               <a:rPr sz="2800" spc="-30" dirty="0">
+                <a:highlight>
+                  <a:srgbClr val="FFFF00"/>
+                </a:highlight>
                 <a:latin typeface="Calibri"/>
                 <a:cs typeface="Calibri"/>
               </a:rPr>
@@ -18994,6 +21324,9 @@
             </a:r>
             <a:r>
               <a:rPr sz="2800" spc="5" dirty="0">
+                <a:highlight>
+                  <a:srgbClr val="FFFF00"/>
+                </a:highlight>
                 <a:latin typeface="Calibri"/>
                 <a:cs typeface="Calibri"/>
               </a:rPr>
@@ -19001,6 +21334,9 @@
             </a:r>
             <a:r>
               <a:rPr sz="2800" spc="-20" dirty="0">
+                <a:highlight>
+                  <a:srgbClr val="FFFF00"/>
+                </a:highlight>
                 <a:latin typeface="Calibri"/>
                 <a:cs typeface="Calibri"/>
               </a:rPr>
@@ -19008,6 +21344,9 @@
             </a:r>
             <a:r>
               <a:rPr sz="2800" dirty="0">
+                <a:highlight>
+                  <a:srgbClr val="FFFF00"/>
+                </a:highlight>
                 <a:latin typeface="Calibri"/>
                 <a:cs typeface="Calibri"/>
               </a:rPr>
@@ -19015,6 +21354,9 @@
             </a:r>
             <a:r>
               <a:rPr sz="2800" spc="-10" dirty="0">
+                <a:highlight>
+                  <a:srgbClr val="FFFF00"/>
+                </a:highlight>
                 <a:latin typeface="Calibri"/>
                 <a:cs typeface="Calibri"/>
               </a:rPr>
@@ -19022,6 +21364,9 @@
             </a:r>
             <a:r>
               <a:rPr sz="2800" spc="20" dirty="0">
+                <a:highlight>
+                  <a:srgbClr val="FFFF00"/>
+                </a:highlight>
                 <a:latin typeface="Calibri"/>
                 <a:cs typeface="Calibri"/>
               </a:rPr>
@@ -19029,6 +21374,9 @@
             </a:r>
             <a:r>
               <a:rPr sz="2800" spc="-5" dirty="0">
+                <a:highlight>
+                  <a:srgbClr val="FFFF00"/>
+                </a:highlight>
                 <a:latin typeface="Calibri"/>
                 <a:cs typeface="Calibri"/>
               </a:rPr>
@@ -19036,6 +21384,9 @@
             </a:r>
             <a:r>
               <a:rPr sz="2800" spc="10" dirty="0">
+                <a:highlight>
+                  <a:srgbClr val="FFFF00"/>
+                </a:highlight>
                 <a:latin typeface="Calibri"/>
                 <a:cs typeface="Calibri"/>
               </a:rPr>
@@ -19043,6 +21394,9 @@
             </a:r>
             <a:r>
               <a:rPr sz="2800" spc="-15" dirty="0">
+                <a:highlight>
+                  <a:srgbClr val="FFFF00"/>
+                </a:highlight>
                 <a:latin typeface="Calibri"/>
                 <a:cs typeface="Calibri"/>
               </a:rPr>
@@ -19050,6 +21404,9 @@
             </a:r>
             <a:r>
               <a:rPr sz="2800" spc="-620" dirty="0">
+                <a:highlight>
+                  <a:srgbClr val="FFFF00"/>
+                </a:highlight>
                 <a:latin typeface="Calibri"/>
                 <a:cs typeface="Calibri"/>
               </a:rPr>
@@ -19057,6 +21414,9 @@
             </a:r>
             <a:r>
               <a:rPr sz="2800" spc="-5" dirty="0">
+                <a:highlight>
+                  <a:srgbClr val="FFFF00"/>
+                </a:highlight>
                 <a:latin typeface="Calibri"/>
                 <a:cs typeface="Calibri"/>
               </a:rPr>
@@ -19064,6 +21424,9 @@
             </a:r>
             <a:r>
               <a:rPr sz="2800" spc="10" dirty="0">
+                <a:highlight>
+                  <a:srgbClr val="FFFF00"/>
+                </a:highlight>
                 <a:latin typeface="Calibri"/>
                 <a:cs typeface="Calibri"/>
               </a:rPr>
@@ -19071,6 +21434,9 @@
             </a:r>
             <a:r>
               <a:rPr sz="2800" spc="-5" dirty="0">
+                <a:highlight>
+                  <a:srgbClr val="FFFF00"/>
+                </a:highlight>
                 <a:latin typeface="Calibri"/>
                 <a:cs typeface="Calibri"/>
               </a:rPr>
@@ -19078,6 +21444,9 @@
             </a:r>
             <a:r>
               <a:rPr sz="2800" spc="15" dirty="0">
+                <a:highlight>
+                  <a:srgbClr val="FFFF00"/>
+                </a:highlight>
                 <a:latin typeface="Calibri"/>
                 <a:cs typeface="Calibri"/>
               </a:rPr>
@@ -19085,6 +21454,9 @@
             </a:r>
             <a:r>
               <a:rPr sz="2800" spc="-10" dirty="0">
+                <a:highlight>
+                  <a:srgbClr val="FFFF00"/>
+                </a:highlight>
                 <a:latin typeface="Calibri"/>
                 <a:cs typeface="Calibri"/>
               </a:rPr>
@@ -19092,6 +21464,9 @@
             </a:r>
             <a:r>
               <a:rPr sz="2800" spc="25" dirty="0">
+                <a:highlight>
+                  <a:srgbClr val="FFFF00"/>
+                </a:highlight>
                 <a:latin typeface="Calibri"/>
                 <a:cs typeface="Calibri"/>
               </a:rPr>
@@ -19099,6 +21474,9 @@
             </a:r>
             <a:r>
               <a:rPr sz="2800" spc="-5" dirty="0">
+                <a:highlight>
+                  <a:srgbClr val="FFFF00"/>
+                </a:highlight>
                 <a:latin typeface="Calibri"/>
                 <a:cs typeface="Calibri"/>
               </a:rPr>
@@ -19106,6 +21484,9 @@
             </a:r>
             <a:r>
               <a:rPr sz="2800" spc="5" dirty="0">
+                <a:highlight>
+                  <a:srgbClr val="FFFF00"/>
+                </a:highlight>
                 <a:latin typeface="Calibri"/>
                 <a:cs typeface="Calibri"/>
               </a:rPr>
@@ -19113,6 +21494,9 @@
             </a:r>
             <a:r>
               <a:rPr sz="2800" spc="-10" dirty="0">
+                <a:highlight>
+                  <a:srgbClr val="FFFF00"/>
+                </a:highlight>
                 <a:latin typeface="Calibri"/>
                 <a:cs typeface="Calibri"/>
               </a:rPr>
@@ -19120,6 +21504,9 @@
             </a:r>
             <a:r>
               <a:rPr sz="2800" spc="5" dirty="0">
+                <a:highlight>
+                  <a:srgbClr val="FFFF00"/>
+                </a:highlight>
                 <a:latin typeface="Calibri"/>
                 <a:cs typeface="Calibri"/>
               </a:rPr>
@@ -19127,12 +21514,18 @@
             </a:r>
             <a:r>
               <a:rPr sz="2800" spc="-15" dirty="0">
+                <a:highlight>
+                  <a:srgbClr val="FFFF00"/>
+                </a:highlight>
                 <a:latin typeface="Calibri"/>
                 <a:cs typeface="Calibri"/>
               </a:rPr>
               <a:t>data.</a:t>
             </a:r>
-            <a:endParaRPr sz="2800">
+            <a:endParaRPr sz="2800" dirty="0">
+              <a:highlight>
+                <a:srgbClr val="FFFF00"/>
+              </a:highlight>
               <a:latin typeface="Calibri"/>
               <a:cs typeface="Calibri"/>
             </a:endParaRPr>
@@ -19153,6 +21546,9 @@
             </a:pPr>
             <a:r>
               <a:rPr sz="2800" b="1" spc="-10" dirty="0">
+                <a:highlight>
+                  <a:srgbClr val="FFFF00"/>
+                </a:highlight>
                 <a:latin typeface="Calibri"/>
                 <a:cs typeface="Calibri"/>
               </a:rPr>
@@ -19160,6 +21556,9 @@
             </a:r>
             <a:r>
               <a:rPr sz="2800" b="1" spc="40" dirty="0">
+                <a:highlight>
+                  <a:srgbClr val="FFFF00"/>
+                </a:highlight>
                 <a:latin typeface="Calibri"/>
                 <a:cs typeface="Calibri"/>
               </a:rPr>
@@ -19167,6 +21566,9 @@
             </a:r>
             <a:r>
               <a:rPr sz="2800" b="1" spc="-10" dirty="0">
+                <a:highlight>
+                  <a:srgbClr val="FFFF00"/>
+                </a:highlight>
                 <a:latin typeface="Calibri"/>
                 <a:cs typeface="Calibri"/>
               </a:rPr>
@@ -19174,6 +21576,9 @@
             </a:r>
             <a:r>
               <a:rPr sz="2800" spc="-10" dirty="0">
+                <a:highlight>
+                  <a:srgbClr val="FFFF00"/>
+                </a:highlight>
                 <a:latin typeface="Calibri"/>
                 <a:cs typeface="Calibri"/>
               </a:rPr>
@@ -19181,6 +21586,9 @@
             </a:r>
             <a:r>
               <a:rPr sz="2800" spc="25" dirty="0">
+                <a:highlight>
+                  <a:srgbClr val="FFFF00"/>
+                </a:highlight>
                 <a:latin typeface="Calibri"/>
                 <a:cs typeface="Calibri"/>
               </a:rPr>
@@ -19188,6 +21596,9 @@
             </a:r>
             <a:r>
               <a:rPr sz="2800" spc="-10" dirty="0">
+                <a:highlight>
+                  <a:srgbClr val="FFFF00"/>
+                </a:highlight>
                 <a:latin typeface="Calibri"/>
                 <a:cs typeface="Calibri"/>
               </a:rPr>
@@ -19195,6 +21606,9 @@
             </a:r>
             <a:r>
               <a:rPr sz="2800" spc="-30" dirty="0">
+                <a:highlight>
+                  <a:srgbClr val="FFFF00"/>
+                </a:highlight>
                 <a:latin typeface="Calibri"/>
                 <a:cs typeface="Calibri"/>
               </a:rPr>
@@ -19202,6 +21616,9 @@
             </a:r>
             <a:r>
               <a:rPr sz="2800" spc="5" dirty="0">
+                <a:highlight>
+                  <a:srgbClr val="FFFF00"/>
+                </a:highlight>
                 <a:latin typeface="Calibri"/>
                 <a:cs typeface="Calibri"/>
               </a:rPr>
@@ -19209,6 +21626,9 @@
             </a:r>
             <a:r>
               <a:rPr sz="2800" spc="-20" dirty="0">
+                <a:highlight>
+                  <a:srgbClr val="FFFF00"/>
+                </a:highlight>
                 <a:latin typeface="Calibri"/>
                 <a:cs typeface="Calibri"/>
               </a:rPr>
@@ -19216,6 +21636,9 @@
             </a:r>
             <a:r>
               <a:rPr sz="2800" dirty="0">
+                <a:highlight>
+                  <a:srgbClr val="FFFF00"/>
+                </a:highlight>
                 <a:latin typeface="Calibri"/>
                 <a:cs typeface="Calibri"/>
               </a:rPr>
@@ -19223,6 +21646,9 @@
             </a:r>
             <a:r>
               <a:rPr sz="2800" spc="-10" dirty="0">
+                <a:highlight>
+                  <a:srgbClr val="FFFF00"/>
+                </a:highlight>
                 <a:latin typeface="Calibri"/>
                 <a:cs typeface="Calibri"/>
               </a:rPr>
@@ -19230,6 +21656,9 @@
             </a:r>
             <a:r>
               <a:rPr sz="2800" spc="15" dirty="0">
+                <a:highlight>
+                  <a:srgbClr val="FFFF00"/>
+                </a:highlight>
                 <a:latin typeface="Calibri"/>
                 <a:cs typeface="Calibri"/>
               </a:rPr>
@@ -19237,6 +21666,9 @@
             </a:r>
             <a:r>
               <a:rPr sz="2800" spc="-5" dirty="0">
+                <a:highlight>
+                  <a:srgbClr val="FFFF00"/>
+                </a:highlight>
                 <a:latin typeface="Calibri"/>
                 <a:cs typeface="Calibri"/>
               </a:rPr>
@@ -19244,6 +21676,9 @@
             </a:r>
             <a:r>
               <a:rPr sz="2800" spc="10" dirty="0">
+                <a:highlight>
+                  <a:srgbClr val="FFFF00"/>
+                </a:highlight>
                 <a:latin typeface="Calibri"/>
                 <a:cs typeface="Calibri"/>
               </a:rPr>
@@ -19251,6 +21686,9 @@
             </a:r>
             <a:r>
               <a:rPr sz="2800" spc="-10" dirty="0">
+                <a:highlight>
+                  <a:srgbClr val="FFFF00"/>
+                </a:highlight>
                 <a:latin typeface="Calibri"/>
                 <a:cs typeface="Calibri"/>
               </a:rPr>
@@ -19258,6 +21696,9 @@
             </a:r>
             <a:r>
               <a:rPr sz="2800" spc="5" dirty="0">
+                <a:highlight>
+                  <a:srgbClr val="FFFF00"/>
+                </a:highlight>
                 <a:latin typeface="Calibri"/>
                 <a:cs typeface="Calibri"/>
               </a:rPr>
@@ -19265,6 +21706,9 @@
             </a:r>
             <a:r>
               <a:rPr sz="2800" spc="-5" dirty="0">
+                <a:highlight>
+                  <a:srgbClr val="FFFF00"/>
+                </a:highlight>
                 <a:latin typeface="Calibri"/>
                 <a:cs typeface="Calibri"/>
               </a:rPr>
@@ -19272,6 +21716,9 @@
             </a:r>
             <a:r>
               <a:rPr sz="2800" spc="15" dirty="0">
+                <a:highlight>
+                  <a:srgbClr val="FFFF00"/>
+                </a:highlight>
                 <a:latin typeface="Calibri"/>
                 <a:cs typeface="Calibri"/>
               </a:rPr>
@@ -19279,6 +21726,9 @@
             </a:r>
             <a:r>
               <a:rPr sz="2800" spc="-15" dirty="0">
+                <a:highlight>
+                  <a:srgbClr val="FFFF00"/>
+                </a:highlight>
                 <a:latin typeface="Calibri"/>
                 <a:cs typeface="Calibri"/>
               </a:rPr>
@@ -19286,6 +21736,9 @@
             </a:r>
             <a:r>
               <a:rPr sz="2800" dirty="0">
+                <a:highlight>
+                  <a:srgbClr val="FFFF00"/>
+                </a:highlight>
                 <a:latin typeface="Calibri"/>
                 <a:cs typeface="Calibri"/>
               </a:rPr>
@@ -19293,6 +21746,9 @@
             </a:r>
             <a:r>
               <a:rPr sz="2800" spc="-5" dirty="0">
+                <a:highlight>
+                  <a:srgbClr val="FFFF00"/>
+                </a:highlight>
                 <a:latin typeface="Calibri"/>
                 <a:cs typeface="Calibri"/>
               </a:rPr>
@@ -19300,6 +21756,9 @@
             </a:r>
             <a:r>
               <a:rPr sz="2800" spc="5" dirty="0">
+                <a:highlight>
+                  <a:srgbClr val="FFFF00"/>
+                </a:highlight>
                 <a:latin typeface="Calibri"/>
                 <a:cs typeface="Calibri"/>
               </a:rPr>
@@ -19307,6 +21766,9 @@
             </a:r>
             <a:r>
               <a:rPr sz="2800" spc="-5" dirty="0">
+                <a:highlight>
+                  <a:srgbClr val="FFFF00"/>
+                </a:highlight>
                 <a:latin typeface="Calibri"/>
                 <a:cs typeface="Calibri"/>
               </a:rPr>
@@ -19314,6 +21776,9 @@
             </a:r>
             <a:r>
               <a:rPr sz="2800" dirty="0">
+                <a:highlight>
+                  <a:srgbClr val="FFFF00"/>
+                </a:highlight>
                 <a:latin typeface="Calibri"/>
                 <a:cs typeface="Calibri"/>
               </a:rPr>
@@ -19321,6 +21786,9 @@
             </a:r>
             <a:r>
               <a:rPr sz="2800" spc="-10" dirty="0">
+                <a:highlight>
+                  <a:srgbClr val="FFFF00"/>
+                </a:highlight>
                 <a:latin typeface="Calibri"/>
                 <a:cs typeface="Calibri"/>
               </a:rPr>
@@ -19328,6 +21796,9 @@
             </a:r>
             <a:r>
               <a:rPr sz="2800" spc="-15" dirty="0">
+                <a:highlight>
+                  <a:srgbClr val="FFFF00"/>
+                </a:highlight>
                 <a:latin typeface="Calibri"/>
                 <a:cs typeface="Calibri"/>
               </a:rPr>
@@ -19335,6 +21806,9 @@
             </a:r>
             <a:r>
               <a:rPr sz="2800" dirty="0">
+                <a:highlight>
+                  <a:srgbClr val="FFFF00"/>
+                </a:highlight>
                 <a:latin typeface="Calibri"/>
                 <a:cs typeface="Calibri"/>
               </a:rPr>
@@ -19342,6 +21816,9 @@
             </a:r>
             <a:r>
               <a:rPr sz="2800" spc="-615" dirty="0">
+                <a:highlight>
+                  <a:srgbClr val="FFFF00"/>
+                </a:highlight>
                 <a:latin typeface="Calibri"/>
                 <a:cs typeface="Calibri"/>
               </a:rPr>
@@ -19349,6 +21826,9 @@
             </a:r>
             <a:r>
               <a:rPr sz="2800" spc="-15" dirty="0">
+                <a:highlight>
+                  <a:srgbClr val="FFFF00"/>
+                </a:highlight>
                 <a:latin typeface="Calibri"/>
                 <a:cs typeface="Calibri"/>
               </a:rPr>
@@ -19356,6 +21836,9 @@
             </a:r>
             <a:r>
               <a:rPr sz="2800" spc="10" dirty="0">
+                <a:highlight>
+                  <a:srgbClr val="FFFF00"/>
+                </a:highlight>
                 <a:latin typeface="Calibri"/>
                 <a:cs typeface="Calibri"/>
               </a:rPr>
@@ -19363,6 +21846,9 @@
             </a:r>
             <a:r>
               <a:rPr sz="2800" spc="-5" dirty="0">
+                <a:highlight>
+                  <a:srgbClr val="FFFF00"/>
+                </a:highlight>
                 <a:latin typeface="Calibri"/>
                 <a:cs typeface="Calibri"/>
               </a:rPr>
@@ -19370,6 +21856,9 @@
             </a:r>
             <a:r>
               <a:rPr sz="2800" spc="15" dirty="0">
+                <a:highlight>
+                  <a:srgbClr val="FFFF00"/>
+                </a:highlight>
                 <a:latin typeface="Calibri"/>
                 <a:cs typeface="Calibri"/>
               </a:rPr>
@@ -19377,6 +21866,9 @@
             </a:r>
             <a:r>
               <a:rPr sz="2800" spc="-15" dirty="0">
+                <a:highlight>
+                  <a:srgbClr val="FFFF00"/>
+                </a:highlight>
                 <a:latin typeface="Calibri"/>
                 <a:cs typeface="Calibri"/>
               </a:rPr>
@@ -19384,6 +21876,9 @@
             </a:r>
             <a:r>
               <a:rPr sz="2800" spc="25" dirty="0">
+                <a:highlight>
+                  <a:srgbClr val="FFFF00"/>
+                </a:highlight>
                 <a:latin typeface="Calibri"/>
                 <a:cs typeface="Calibri"/>
               </a:rPr>
@@ -19391,12 +21886,18 @@
             </a:r>
             <a:r>
               <a:rPr sz="2800" spc="-10" dirty="0">
+                <a:highlight>
+                  <a:srgbClr val="FFFF00"/>
+                </a:highlight>
                 <a:latin typeface="Calibri"/>
                 <a:cs typeface="Calibri"/>
               </a:rPr>
               <a:t>structure.</a:t>
             </a:r>
-            <a:endParaRPr sz="2800">
+            <a:endParaRPr sz="2800" dirty="0">
+              <a:highlight>
+                <a:srgbClr val="FFFF00"/>
+              </a:highlight>
               <a:latin typeface="Calibri"/>
               <a:cs typeface="Calibri"/>
             </a:endParaRPr>
@@ -19417,6 +21918,9 @@
             </a:pPr>
             <a:r>
               <a:rPr sz="2800" b="1" spc="-5" dirty="0">
+                <a:highlight>
+                  <a:srgbClr val="FFFF00"/>
+                </a:highlight>
                 <a:latin typeface="Calibri"/>
                 <a:cs typeface="Calibri"/>
               </a:rPr>
@@ -19424,6 +21928,9 @@
             </a:r>
             <a:r>
               <a:rPr sz="2800" b="1" spc="20" dirty="0">
+                <a:highlight>
+                  <a:srgbClr val="FFFF00"/>
+                </a:highlight>
                 <a:latin typeface="Calibri"/>
                 <a:cs typeface="Calibri"/>
               </a:rPr>
@@ -19431,6 +21938,9 @@
             </a:r>
             <a:r>
               <a:rPr sz="2800" b="1" spc="-10" dirty="0">
+                <a:highlight>
+                  <a:srgbClr val="FFFF00"/>
+                </a:highlight>
                 <a:latin typeface="Calibri"/>
                 <a:cs typeface="Calibri"/>
               </a:rPr>
@@ -19438,6 +21948,9 @@
             </a:r>
             <a:r>
               <a:rPr sz="2800" spc="-10" dirty="0">
+                <a:highlight>
+                  <a:srgbClr val="FFFF00"/>
+                </a:highlight>
                 <a:latin typeface="Calibri"/>
                 <a:cs typeface="Calibri"/>
               </a:rPr>
@@ -19445,6 +21958,9 @@
             </a:r>
             <a:r>
               <a:rPr sz="2800" spc="20" dirty="0">
+                <a:highlight>
+                  <a:srgbClr val="FFFF00"/>
+                </a:highlight>
                 <a:latin typeface="Calibri"/>
                 <a:cs typeface="Calibri"/>
               </a:rPr>
@@ -19452,6 +21968,9 @@
             </a:r>
             <a:r>
               <a:rPr sz="2800" spc="-5" dirty="0">
+                <a:highlight>
+                  <a:srgbClr val="FFFF00"/>
+                </a:highlight>
                 <a:latin typeface="Calibri"/>
                 <a:cs typeface="Calibri"/>
               </a:rPr>
@@ -19459,6 +21978,9 @@
             </a:r>
             <a:r>
               <a:rPr sz="2800" dirty="0">
+                <a:highlight>
+                  <a:srgbClr val="FFFF00"/>
+                </a:highlight>
                 <a:latin typeface="Calibri"/>
                 <a:cs typeface="Calibri"/>
               </a:rPr>
@@ -19466,6 +21988,9 @@
             </a:r>
             <a:r>
               <a:rPr sz="2800" spc="-35" dirty="0">
+                <a:highlight>
+                  <a:srgbClr val="FFFF00"/>
+                </a:highlight>
                 <a:latin typeface="Calibri"/>
                 <a:cs typeface="Calibri"/>
               </a:rPr>
@@ -19473,6 +21998,9 @@
             </a:r>
             <a:r>
               <a:rPr sz="2800" spc="-5" dirty="0">
+                <a:highlight>
+                  <a:srgbClr val="FFFF00"/>
+                </a:highlight>
                 <a:latin typeface="Calibri"/>
                 <a:cs typeface="Calibri"/>
               </a:rPr>
@@ -19480,6 +22008,9 @@
             </a:r>
             <a:r>
               <a:rPr sz="2800" spc="-15" dirty="0">
+                <a:highlight>
+                  <a:srgbClr val="FFFF00"/>
+                </a:highlight>
                 <a:latin typeface="Calibri"/>
                 <a:cs typeface="Calibri"/>
               </a:rPr>
@@ -19487,6 +22018,9 @@
             </a:r>
             <a:r>
               <a:rPr sz="2800" spc="-5" dirty="0">
+                <a:highlight>
+                  <a:srgbClr val="FFFF00"/>
+                </a:highlight>
                 <a:latin typeface="Calibri"/>
                 <a:cs typeface="Calibri"/>
               </a:rPr>
@@ -19494,6 +22028,9 @@
             </a:r>
             <a:r>
               <a:rPr sz="2800" spc="15" dirty="0">
+                <a:highlight>
+                  <a:srgbClr val="FFFF00"/>
+                </a:highlight>
                 <a:latin typeface="Calibri"/>
                 <a:cs typeface="Calibri"/>
               </a:rPr>
@@ -19501,6 +22038,9 @@
             </a:r>
             <a:r>
               <a:rPr sz="2800" spc="-5" dirty="0">
+                <a:highlight>
+                  <a:srgbClr val="FFFF00"/>
+                </a:highlight>
                 <a:latin typeface="Calibri"/>
                 <a:cs typeface="Calibri"/>
               </a:rPr>
@@ -19508,6 +22048,9 @@
             </a:r>
             <a:r>
               <a:rPr sz="2800" spc="20" dirty="0">
+                <a:highlight>
+                  <a:srgbClr val="FFFF00"/>
+                </a:highlight>
                 <a:latin typeface="Calibri"/>
                 <a:cs typeface="Calibri"/>
               </a:rPr>
@@ -19515,6 +22058,9 @@
             </a:r>
             <a:r>
               <a:rPr sz="2800" spc="-10" dirty="0">
+                <a:highlight>
+                  <a:srgbClr val="FFFF00"/>
+                </a:highlight>
                 <a:latin typeface="Calibri"/>
                 <a:cs typeface="Calibri"/>
               </a:rPr>
@@ -19522,6 +22068,9 @@
             </a:r>
             <a:r>
               <a:rPr sz="2800" spc="15" dirty="0">
+                <a:highlight>
+                  <a:srgbClr val="FFFF00"/>
+                </a:highlight>
                 <a:latin typeface="Calibri"/>
                 <a:cs typeface="Calibri"/>
               </a:rPr>
@@ -19529,6 +22078,9 @@
             </a:r>
             <a:r>
               <a:rPr sz="2800" spc="-15" dirty="0">
+                <a:highlight>
+                  <a:srgbClr val="FFFF00"/>
+                </a:highlight>
                 <a:latin typeface="Calibri"/>
                 <a:cs typeface="Calibri"/>
               </a:rPr>
@@ -19536,6 +22088,9 @@
             </a:r>
             <a:r>
               <a:rPr sz="2800" spc="35" dirty="0">
+                <a:highlight>
+                  <a:srgbClr val="FFFF00"/>
+                </a:highlight>
                 <a:latin typeface="Calibri"/>
                 <a:cs typeface="Calibri"/>
               </a:rPr>
@@ -19543,6 +22098,9 @@
             </a:r>
             <a:r>
               <a:rPr sz="2800" spc="-15" dirty="0">
+                <a:highlight>
+                  <a:srgbClr val="FFFF00"/>
+                </a:highlight>
                 <a:latin typeface="Calibri"/>
                 <a:cs typeface="Calibri"/>
               </a:rPr>
@@ -19550,6 +22108,9 @@
             </a:r>
             <a:r>
               <a:rPr sz="2800" spc="5" dirty="0">
+                <a:highlight>
+                  <a:srgbClr val="FFFF00"/>
+                </a:highlight>
                 <a:latin typeface="Calibri"/>
                 <a:cs typeface="Calibri"/>
               </a:rPr>
@@ -19557,6 +22118,9 @@
             </a:r>
             <a:r>
               <a:rPr sz="2800" spc="-5" dirty="0">
+                <a:highlight>
+                  <a:srgbClr val="FFFF00"/>
+                </a:highlight>
                 <a:latin typeface="Calibri"/>
                 <a:cs typeface="Calibri"/>
               </a:rPr>
@@ -19564,6 +22128,9 @@
             </a:r>
             <a:r>
               <a:rPr sz="2800" spc="-620" dirty="0">
+                <a:highlight>
+                  <a:srgbClr val="FFFF00"/>
+                </a:highlight>
                 <a:latin typeface="Calibri"/>
                 <a:cs typeface="Calibri"/>
               </a:rPr>
@@ -19571,12 +22138,18 @@
             </a:r>
             <a:r>
               <a:rPr sz="2800" spc="-15" dirty="0">
+                <a:highlight>
+                  <a:srgbClr val="FFFF00"/>
+                </a:highlight>
                 <a:latin typeface="Calibri"/>
                 <a:cs typeface="Calibri"/>
               </a:rPr>
               <a:t>index.</a:t>
             </a:r>
-            <a:endParaRPr sz="2800">
+            <a:endParaRPr sz="2800" dirty="0">
+              <a:highlight>
+                <a:srgbClr val="FFFF00"/>
+              </a:highlight>
               <a:latin typeface="Calibri"/>
               <a:cs typeface="Calibri"/>
             </a:endParaRPr>
@@ -19692,7 +22265,11 @@
               <a:buChar char="•"/>
             </a:pPr>
             <a:r>
-              <a:rPr lang="en-US" sz="2400" dirty="0"/>
+              <a:rPr lang="en-US" sz="2400" dirty="0">
+                <a:highlight>
+                  <a:srgbClr val="FFFF00"/>
+                </a:highlight>
+              </a:rPr>
               <a:t>The index typically stores each value of the index field along with a list of pointers to all disk blocks that contain records with that field value.</a:t>
             </a:r>
           </a:p>
@@ -19701,7 +22278,11 @@
               <a:buFont typeface="Arial" panose="020B0604020202020204" pitchFamily="34" charset="0"/>
               <a:buChar char="•"/>
             </a:pPr>
-            <a:endParaRPr lang="en-US" sz="2400" dirty="0"/>
+            <a:endParaRPr lang="en-US" sz="2400" dirty="0">
+              <a:highlight>
+                <a:srgbClr val="FFFF00"/>
+              </a:highlight>
+            </a:endParaRPr>
           </a:p>
           <a:p>
             <a:pPr marL="285750" lvl="0" indent="-285750">
@@ -19709,7 +22290,11 @@
               <a:buChar char="•"/>
             </a:pPr>
             <a:r>
-              <a:rPr lang="en-US" sz="2400" dirty="0"/>
+              <a:rPr lang="en-US" sz="2400" dirty="0">
+                <a:highlight>
+                  <a:srgbClr val="FFFF00"/>
+                </a:highlight>
+              </a:rPr>
               <a:t>There are several types of indexes.</a:t>
             </a:r>
           </a:p>
@@ -19719,7 +22304,11 @@
               <a:buChar char="•"/>
             </a:pPr>
             <a:r>
-              <a:rPr lang="en-US" sz="2400" dirty="0"/>
+              <a:rPr lang="en-US" sz="2400" dirty="0">
+                <a:highlight>
+                  <a:srgbClr val="FFFF00"/>
+                </a:highlight>
+              </a:rPr>
               <a:t>Primary Index</a:t>
             </a:r>
           </a:p>
@@ -19729,7 +22318,11 @@
               <a:buChar char="•"/>
             </a:pPr>
             <a:r>
-              <a:rPr lang="en-US" sz="2400" dirty="0"/>
+              <a:rPr lang="en-US" sz="2400" dirty="0">
+                <a:highlight>
+                  <a:srgbClr val="FFFF00"/>
+                </a:highlight>
+              </a:rPr>
               <a:t>Clustering Index</a:t>
             </a:r>
           </a:p>
@@ -19739,7 +22332,11 @@
               <a:buChar char="•"/>
             </a:pPr>
             <a:r>
-              <a:rPr lang="en-US" sz="2400" dirty="0"/>
+              <a:rPr lang="en-US" sz="2400" dirty="0">
+                <a:highlight>
+                  <a:srgbClr val="FFFF00"/>
+                </a:highlight>
+              </a:rPr>
               <a:t>Secondary Index</a:t>
             </a:r>
           </a:p>
@@ -19816,11 +22413,19 @@
           <a:lstStyle/>
           <a:p>
             <a:r>
-              <a:rPr lang="en-US" b="1" dirty="0"/>
+              <a:rPr lang="en-US" b="1" dirty="0">
+                <a:highlight>
+                  <a:srgbClr val="FFFF00"/>
+                </a:highlight>
+              </a:rPr>
               <a:t>A primary index </a:t>
             </a:r>
             <a:r>
-              <a:rPr lang="en-US" dirty="0"/>
+              <a:rPr lang="en-US" dirty="0">
+                <a:highlight>
+                  <a:srgbClr val="FFFF00"/>
+                </a:highlight>
+              </a:rPr>
               <a:t>is specified on the ordering key field of an ordered file of records.</a:t>
             </a:r>
           </a:p>
@@ -19835,21 +22440,37 @@
           </a:p>
           <a:p>
             <a:r>
-              <a:rPr lang="en-US" dirty="0"/>
+              <a:rPr lang="en-US" dirty="0">
+                <a:highlight>
+                  <a:srgbClr val="FFFF00"/>
+                </a:highlight>
+              </a:rPr>
               <a:t>If the ordering field is not a key field—that is, if numerous records in the file can have the same value for the ordering field— another type of index, called a clustering index, can be used. </a:t>
             </a:r>
           </a:p>
           <a:p>
             <a:r>
-              <a:rPr lang="en-US" dirty="0"/>
+              <a:rPr lang="en-US" dirty="0">
+                <a:highlight>
+                  <a:srgbClr val="FFFF00"/>
+                </a:highlight>
+              </a:rPr>
               <a:t>The data file is called </a:t>
             </a:r>
             <a:r>
-              <a:rPr lang="en-US" b="1" dirty="0"/>
+              <a:rPr lang="en-US" b="1" dirty="0">
+                <a:highlight>
+                  <a:srgbClr val="FFFF00"/>
+                </a:highlight>
+              </a:rPr>
               <a:t>a clustered file</a:t>
             </a:r>
             <a:r>
-              <a:rPr lang="en-US" dirty="0"/>
+              <a:rPr lang="en-US" dirty="0">
+                <a:highlight>
+                  <a:srgbClr val="FFFF00"/>
+                </a:highlight>
+              </a:rPr>
               <a:t> in this latter case. Notice that a file can have at most one physical ordering field, so it can have at most one primary index or one clustering index, but not both. </a:t>
             </a:r>
           </a:p>
@@ -19858,15 +22479,27 @@
           </a:p>
           <a:p>
             <a:r>
-              <a:rPr lang="en-US" dirty="0"/>
+              <a:rPr lang="en-US" dirty="0">
+                <a:highlight>
+                  <a:srgbClr val="FFFF00"/>
+                </a:highlight>
+              </a:rPr>
               <a:t>A third type of index, called </a:t>
             </a:r>
             <a:r>
-              <a:rPr lang="en-US" b="1" dirty="0"/>
+              <a:rPr lang="en-US" b="1" dirty="0">
+                <a:highlight>
+                  <a:srgbClr val="FFFF00"/>
+                </a:highlight>
+              </a:rPr>
               <a:t>a secondary index</a:t>
             </a:r>
             <a:r>
-              <a:rPr lang="en-US" dirty="0"/>
+              <a:rPr lang="en-US" dirty="0">
+                <a:highlight>
+                  <a:srgbClr val="FFFF00"/>
+                </a:highlight>
+              </a:rPr>
               <a:t>, can be specified on any nonordering field of a file. </a:t>
             </a:r>
           </a:p>
